--- a/db_optimization_demo/ppt/全链路性能瓶颈排查与综合调优_优化版.pptx
+++ b/db_optimization_demo/ppt/全链路性能瓶颈排查与综合调优_优化版.pptx
@@ -3577,25 +3577,13 @@
               </a:lnSpc>
             </a:pPr>
             <a:r>
-              <a:rPr sz="1400" b="1">
-                <a:solidFill>
-                  <a:srgbClr val="E8A33D"/>
-                </a:solidFill>
-                <a:latin typeface="微软雅黑"/>
-              </a:rPr>
-              <a:t>✓ 真实 MySQL 8.0 实测环境    ✓ 100万订单数据量</a:t>
-            </a:r>
-          </a:p>
-          <a:p>
-            <a:pPr algn="l"/>
-            <a:r>
-              <a:rPr sz="1400" b="1">
-                <a:solidFill>
-                  <a:srgbClr val="E8A33D"/>
-                </a:solidFill>
-                <a:latin typeface="微软雅黑"/>
-              </a:rPr>
-              <a:t>✓ 真实触发死锁/锁等待/慢查询    ✓ EXPLAIN 调优前后对比</a:t>
+              <a:rPr sz="1600" b="0">
+                <a:solidFill>
+                  <a:srgbClr val="C8D4E6"/>
+                </a:solidFill>
+                <a:latin typeface="微软雅黑"/>
+              </a:rPr>
+              <a:t>真实 MySQL 8.0 实测：100万订单 | 真实触发死锁/锁等待 | EXPLAIN 调优前后对比</a:t>
             </a:r>
           </a:p>
         </p:txBody>
@@ -6395,43 +6383,7 @@
                 </a:solidFill>
                 <a:latin typeface="微软雅黑"/>
               </a:rPr>
-              <a:t>BEGIN;</a:t>
-            </a:r>
-          </a:p>
-          <a:p>
-            <a:pPr algn="l"/>
-            <a:r>
-              <a:rPr sz="900" b="0">
-                <a:solidFill>
-                  <a:srgbClr val="4A90D9"/>
-                </a:solidFill>
-                <a:latin typeface="微软雅黑"/>
-              </a:rPr>
-              <a:t>UPDATE t_product</a:t>
-            </a:r>
-          </a:p>
-          <a:p>
-            <a:pPr algn="l"/>
-            <a:r>
-              <a:rPr sz="900" b="0">
-                <a:solidFill>
-                  <a:srgbClr val="4A90D9"/>
-                </a:solidFill>
-                <a:latin typeface="微软雅黑"/>
-              </a:rPr>
-              <a:t>SET stock=stock-1</a:t>
-            </a:r>
-          </a:p>
-          <a:p>
-            <a:pPr algn="l"/>
-            <a:r>
-              <a:rPr sz="900" b="0">
-                <a:solidFill>
-                  <a:srgbClr val="4A90D9"/>
-                </a:solidFill>
-                <a:latin typeface="微软雅黑"/>
-              </a:rPr>
-              <a:t>WHERE product_id=1;</a:t>
+              <a:t>BEGIN; UPDATE t_product SET stock=stock-1 WHERE product_id=1;</a:t>
             </a:r>
           </a:p>
         </p:txBody>
@@ -6527,8 +6479,8 @@
         </p:nvSpPr>
         <p:spPr>
           <a:xfrm>
-            <a:off x="7680960" y="2057400"/>
-            <a:ext cx="4069080" cy="457200"/>
+            <a:off x="7863840" y="2057400"/>
+            <a:ext cx="3840480" cy="457200"/>
           </a:xfrm>
           <a:prstGeom prst="rect">
             <a:avLst/>
@@ -6547,13 +6499,13 @@
               </a:lnSpc>
             </a:pPr>
             <a:r>
-              <a:rPr sz="900" b="1">
-                <a:solidFill>
-                  <a:srgbClr val="1B3A5C"/>
-                </a:solidFill>
-                <a:latin typeface="微软雅黑"/>
-              </a:rPr>
-              <a:t>① A锁定商品1</a:t>
+              <a:rPr sz="1100" b="0">
+                <a:solidFill>
+                  <a:srgbClr val="5A6A7A"/>
+                </a:solidFill>
+                <a:latin typeface="微软雅黑"/>
+              </a:rPr>
+              <a:t>锁住商品1</a:t>
             </a:r>
           </a:p>
         </p:txBody>
@@ -6566,7 +6518,7 @@
         </p:nvSpPr>
         <p:spPr>
           <a:xfrm>
-            <a:off x="502920" y="2606040"/>
+            <a:off x="502920" y="2743200"/>
             <a:ext cx="457200" cy="502920"/>
           </a:xfrm>
           <a:prstGeom prst="rect">
@@ -6610,7 +6562,7 @@
         </p:nvSpPr>
         <p:spPr>
           <a:xfrm>
-            <a:off x="502920" y="2606040"/>
+            <a:off x="502920" y="2743200"/>
             <a:ext cx="457200" cy="502920"/>
           </a:xfrm>
           <a:prstGeom prst="rect">
@@ -6649,7 +6601,7 @@
         </p:nvSpPr>
         <p:spPr>
           <a:xfrm>
-            <a:off x="1005840" y="2606040"/>
+            <a:off x="1005840" y="2743200"/>
             <a:ext cx="3291840" cy="502920"/>
           </a:xfrm>
           <a:prstGeom prst="rect">
@@ -6693,7 +6645,7 @@
         </p:nvSpPr>
         <p:spPr>
           <a:xfrm>
-            <a:off x="1097280" y="2633472"/>
+            <a:off x="1097280" y="2770632"/>
             <a:ext cx="3108960" cy="457200"/>
           </a:xfrm>
           <a:prstGeom prst="rect">
@@ -6719,43 +6671,7 @@
                 </a:solidFill>
                 <a:latin typeface="微软雅黑"/>
               </a:rPr>
-              <a:t>BEGIN;</a:t>
-            </a:r>
-          </a:p>
-          <a:p>
-            <a:pPr algn="l"/>
-            <a:r>
-              <a:rPr sz="900" b="0">
-                <a:solidFill>
-                  <a:srgbClr val="4A90D9"/>
-                </a:solidFill>
-                <a:latin typeface="微软雅黑"/>
-              </a:rPr>
-              <a:t>UPDATE t_product</a:t>
-            </a:r>
-          </a:p>
-          <a:p>
-            <a:pPr algn="l"/>
-            <a:r>
-              <a:rPr sz="900" b="0">
-                <a:solidFill>
-                  <a:srgbClr val="4A90D9"/>
-                </a:solidFill>
-                <a:latin typeface="微软雅黑"/>
-              </a:rPr>
-              <a:t>SET stock=stock-1</a:t>
-            </a:r>
-          </a:p>
-          <a:p>
-            <a:pPr algn="l"/>
-            <a:r>
-              <a:rPr sz="900" b="0">
-                <a:solidFill>
-                  <a:srgbClr val="4A90D9"/>
-                </a:solidFill>
-                <a:latin typeface="微软雅黑"/>
-              </a:rPr>
-              <a:t>WHERE product_id=2;</a:t>
+              <a:t/>
             </a:r>
           </a:p>
         </p:txBody>
@@ -6768,7 +6684,7 @@
         </p:nvSpPr>
         <p:spPr>
           <a:xfrm>
-            <a:off x="4434840" y="2606040"/>
+            <a:off x="4434840" y="2743200"/>
             <a:ext cx="3291840" cy="502920"/>
           </a:xfrm>
           <a:prstGeom prst="rect">
@@ -6812,8 +6728,8 @@
         </p:nvSpPr>
         <p:spPr>
           <a:xfrm>
-            <a:off x="7680960" y="2633472"/>
-            <a:ext cx="4069080" cy="457200"/>
+            <a:off x="4526280" y="2770632"/>
+            <a:ext cx="3108960" cy="457200"/>
           </a:xfrm>
           <a:prstGeom prst="rect">
             <a:avLst/>
@@ -6832,13 +6748,13 @@
               </a:lnSpc>
             </a:pPr>
             <a:r>
-              <a:rPr sz="900" b="1">
-                <a:solidFill>
-                  <a:srgbClr val="1B3A5C"/>
-                </a:solidFill>
-                <a:latin typeface="微软雅黑"/>
-              </a:rPr>
-              <a:t>② B锁定商品2</a:t>
+              <a:rPr sz="900" b="0">
+                <a:solidFill>
+                  <a:srgbClr val="E55C5C"/>
+                </a:solidFill>
+                <a:latin typeface="微软雅黑"/>
+              </a:rPr>
+              <a:t>锁住商品2</a:t>
             </a:r>
           </a:p>
         </p:txBody>
@@ -6851,7 +6767,7 @@
         </p:nvSpPr>
         <p:spPr>
           <a:xfrm>
-            <a:off x="7863840" y="2651760"/>
+            <a:off x="7863840" y="2788920"/>
             <a:ext cx="3840480" cy="457200"/>
           </a:xfrm>
           <a:prstGeom prst="rect">
@@ -6871,13 +6787,13 @@
               </a:lnSpc>
             </a:pPr>
             <a:r>
-              <a:rPr sz="900" b="0">
+              <a:rPr sz="1100" b="0">
                 <a:solidFill>
                   <a:srgbClr val="5A6A7A"/>
                 </a:solidFill>
                 <a:latin typeface="微软雅黑"/>
               </a:rPr>
-              <a:t/>
+              <a:t>BEGIN; UPDATE ... WHERE product_id=2;</a:t>
             </a:r>
           </a:p>
         </p:txBody>
@@ -6890,7 +6806,7 @@
         </p:nvSpPr>
         <p:spPr>
           <a:xfrm>
-            <a:off x="502920" y="3200400"/>
+            <a:off x="502920" y="3474720"/>
             <a:ext cx="457200" cy="502920"/>
           </a:xfrm>
           <a:prstGeom prst="rect">
@@ -6934,7 +6850,7 @@
         </p:nvSpPr>
         <p:spPr>
           <a:xfrm>
-            <a:off x="502920" y="3200400"/>
+            <a:off x="502920" y="3474720"/>
             <a:ext cx="457200" cy="502920"/>
           </a:xfrm>
           <a:prstGeom prst="rect">
@@ -6973,7 +6889,7 @@
         </p:nvSpPr>
         <p:spPr>
           <a:xfrm>
-            <a:off x="1005840" y="3200400"/>
+            <a:off x="1005840" y="3474720"/>
             <a:ext cx="3291840" cy="502920"/>
           </a:xfrm>
           <a:prstGeom prst="rect">
@@ -7017,7 +6933,7 @@
         </p:nvSpPr>
         <p:spPr>
           <a:xfrm>
-            <a:off x="1097280" y="3227832"/>
+            <a:off x="1097280" y="3502152"/>
             <a:ext cx="3108960" cy="457200"/>
           </a:xfrm>
           <a:prstGeom prst="rect">
@@ -7043,31 +6959,7 @@
                 </a:solidFill>
                 <a:latin typeface="微软雅黑"/>
               </a:rPr>
-              <a:t>UPDATE t_product</a:t>
-            </a:r>
-          </a:p>
-          <a:p>
-            <a:pPr algn="l"/>
-            <a:r>
-              <a:rPr sz="900" b="0">
-                <a:solidFill>
-                  <a:srgbClr val="4A90D9"/>
-                </a:solidFill>
-                <a:latin typeface="微软雅黑"/>
-              </a:rPr>
-              <a:t>SET stock=stock-1</a:t>
-            </a:r>
-          </a:p>
-          <a:p>
-            <a:pPr algn="l"/>
-            <a:r>
-              <a:rPr sz="900" b="0">
-                <a:solidFill>
-                  <a:srgbClr val="4A90D9"/>
-                </a:solidFill>
-                <a:latin typeface="微软雅黑"/>
-              </a:rPr>
-              <a:t>WHERE product_id=2;</a:t>
+              <a:t>UPDATE ... WHERE product_id=2;</a:t>
             </a:r>
           </a:p>
         </p:txBody>
@@ -7080,7 +6972,7 @@
         </p:nvSpPr>
         <p:spPr>
           <a:xfrm>
-            <a:off x="4434840" y="3200400"/>
+            <a:off x="4434840" y="3474720"/>
             <a:ext cx="3291840" cy="502920"/>
           </a:xfrm>
           <a:prstGeom prst="rect">
@@ -7124,7 +7016,7 @@
         </p:nvSpPr>
         <p:spPr>
           <a:xfrm>
-            <a:off x="4526280" y="3227832"/>
+            <a:off x="4526280" y="3502152"/>
             <a:ext cx="3108960" cy="457200"/>
           </a:xfrm>
           <a:prstGeom prst="rect">
@@ -7163,8 +7055,8 @@
         </p:nvSpPr>
         <p:spPr>
           <a:xfrm>
-            <a:off x="7680960" y="3246120"/>
-            <a:ext cx="4069080" cy="457200"/>
+            <a:off x="7863840" y="3520440"/>
+            <a:ext cx="3840480" cy="457200"/>
           </a:xfrm>
           <a:prstGeom prst="rect">
             <a:avLst/>
@@ -7183,25 +7075,13 @@
               </a:lnSpc>
             </a:pPr>
             <a:r>
-              <a:rPr sz="900" b="1">
+              <a:rPr sz="1100" b="0">
                 <a:solidFill>
                   <a:srgbClr val="5A6A7A"/>
                 </a:solidFill>
                 <a:latin typeface="微软雅黑"/>
               </a:rPr>
-              <a:t>③ A等B的锁</a:t>
-            </a:r>
-          </a:p>
-          <a:p>
-            <a:pPr algn="l"/>
-            <a:r>
-              <a:rPr sz="900" b="1">
-                <a:solidFill>
-                  <a:srgbClr val="E55C5C"/>
-                </a:solidFill>
-                <a:latin typeface="微软雅黑"/>
-              </a:rPr>
-              <a:t>（阻塞）</a:t>
+              <a:t>阻塞！等B的锁</a:t>
             </a:r>
           </a:p>
         </p:txBody>
@@ -7214,7 +7094,7 @@
         </p:nvSpPr>
         <p:spPr>
           <a:xfrm>
-            <a:off x="502920" y="3794760"/>
+            <a:off x="502920" y="4206240"/>
             <a:ext cx="457200" cy="502920"/>
           </a:xfrm>
           <a:prstGeom prst="rect">
@@ -7258,7 +7138,7 @@
         </p:nvSpPr>
         <p:spPr>
           <a:xfrm>
-            <a:off x="502920" y="3794760"/>
+            <a:off x="502920" y="4206240"/>
             <a:ext cx="457200" cy="502920"/>
           </a:xfrm>
           <a:prstGeom prst="rect">
@@ -7297,7 +7177,7 @@
         </p:nvSpPr>
         <p:spPr>
           <a:xfrm>
-            <a:off x="1005840" y="3794760"/>
+            <a:off x="1005840" y="4206240"/>
             <a:ext cx="3291840" cy="502920"/>
           </a:xfrm>
           <a:prstGeom prst="rect">
@@ -7341,7 +7221,7 @@
         </p:nvSpPr>
         <p:spPr>
           <a:xfrm>
-            <a:off x="1097280" y="3822192"/>
+            <a:off x="1097280" y="4233672"/>
             <a:ext cx="3108960" cy="457200"/>
           </a:xfrm>
           <a:prstGeom prst="rect">
@@ -7380,7 +7260,7 @@
         </p:nvSpPr>
         <p:spPr>
           <a:xfrm>
-            <a:off x="4434840" y="3794760"/>
+            <a:off x="4434840" y="4206240"/>
             <a:ext cx="3291840" cy="502920"/>
           </a:xfrm>
           <a:prstGeom prst="rect">
@@ -7424,7 +7304,7 @@
         </p:nvSpPr>
         <p:spPr>
           <a:xfrm>
-            <a:off x="4526280" y="3822192"/>
+            <a:off x="4526280" y="4233672"/>
             <a:ext cx="3108960" cy="457200"/>
           </a:xfrm>
           <a:prstGeom prst="rect">
@@ -7450,31 +7330,7 @@
                 </a:solidFill>
                 <a:latin typeface="微软雅黑"/>
               </a:rPr>
-              <a:t>UPDATE t_product</a:t>
-            </a:r>
-          </a:p>
-          <a:p>
-            <a:pPr algn="l"/>
-            <a:r>
-              <a:rPr sz="900" b="0">
-                <a:solidFill>
-                  <a:srgbClr val="E55C5C"/>
-                </a:solidFill>
-                <a:latin typeface="微软雅黑"/>
-              </a:rPr>
-              <a:t>SET stock=stock-1</a:t>
-            </a:r>
-          </a:p>
-          <a:p>
-            <a:pPr algn="l"/>
-            <a:r>
-              <a:rPr sz="900" b="0">
-                <a:solidFill>
-                  <a:srgbClr val="E55C5C"/>
-                </a:solidFill>
-                <a:latin typeface="微软雅黑"/>
-              </a:rPr>
-              <a:t>WHERE product_id=1;</a:t>
+              <a:t>死锁！B被回滚</a:t>
             </a:r>
           </a:p>
         </p:txBody>
@@ -7487,8 +7343,8 @@
         </p:nvSpPr>
         <p:spPr>
           <a:xfrm>
-            <a:off x="7680960" y="3840480"/>
-            <a:ext cx="4069080" cy="457200"/>
+            <a:off x="7863840" y="4251960"/>
+            <a:ext cx="3840480" cy="457200"/>
           </a:xfrm>
           <a:prstGeom prst="rect">
             <a:avLst/>
@@ -7507,25 +7363,13 @@
               </a:lnSpc>
             </a:pPr>
             <a:r>
-              <a:rPr sz="900" b="1">
-                <a:solidFill>
-                  <a:srgbClr val="E55C5C"/>
-                </a:solidFill>
-                <a:latin typeface="微软雅黑"/>
-              </a:rPr>
-              <a:t>④ 死锁!</a:t>
-            </a:r>
-          </a:p>
-          <a:p>
-            <a:pPr algn="l"/>
-            <a:r>
-              <a:rPr sz="900" b="1">
+              <a:rPr sz="1100" b="0">
                 <a:solidFill>
                   <a:srgbClr val="5A6A7A"/>
                 </a:solidFill>
                 <a:latin typeface="微软雅黑"/>
               </a:rPr>
-              <a:t>B被回滚</a:t>
+              <a:t>UPDATE ... WHERE product_id=1;</a:t>
             </a:r>
           </a:p>
         </p:txBody>
@@ -15143,7 +14987,7 @@
         <p:spPr>
           <a:xfrm>
             <a:off x="502920" y="2194560"/>
-            <a:ext cx="9692640" cy="457200"/>
+            <a:ext cx="9692640" cy="502920"/>
           </a:xfrm>
           <a:prstGeom prst="rect">
             <a:avLst/>
@@ -15187,7 +15031,7 @@
         <p:spPr>
           <a:xfrm>
             <a:off x="502920" y="2194560"/>
-            <a:ext cx="1645920" cy="457200"/>
+            <a:ext cx="1645920" cy="502920"/>
           </a:xfrm>
           <a:prstGeom prst="rect">
             <a:avLst/>
@@ -15226,7 +15070,7 @@
         <p:spPr>
           <a:xfrm>
             <a:off x="2148840" y="2194560"/>
-            <a:ext cx="3200400" cy="457200"/>
+            <a:ext cx="3200400" cy="502920"/>
           </a:xfrm>
           <a:prstGeom prst="rect">
             <a:avLst/>
@@ -15239,45 +15083,72 @@
           </a:bodyPr>
           <a:lstStyle/>
           <a:p>
-            <a:pPr algn="l">
-              <a:lnSpc>
-                <a:spcPct val="115000"/>
-              </a:lnSpc>
-            </a:pPr>
-            <a:r>
-              <a:rPr sz="1000" b="1">
+            <a:pPr algn="ctr">
+              <a:lnSpc>
+                <a:spcPct val="115000"/>
+              </a:lnSpc>
+            </a:pPr>
+            <a:r>
+              <a:rPr sz="1200" b="0">
+                <a:solidFill>
+                  <a:srgbClr val="E55C5C"/>
+                </a:solidFill>
+                <a:latin typeface="微软雅黑"/>
+              </a:rPr>
+              <a:t>rows=20 + filesort</a:t>
+            </a:r>
+          </a:p>
+        </p:txBody>
+      </p:sp>
+      <p:sp>
+        <p:nvSpPr>
+          <p:cNvPr id="17" name="TextBox 16"/>
+          <p:cNvSpPr txBox="1"/>
+          <p:nvPr/>
+        </p:nvSpPr>
+        <p:spPr>
+          <a:xfrm>
+            <a:off x="5349240" y="2194560"/>
+            <a:ext cx="3200400" cy="502920"/>
+          </a:xfrm>
+          <a:prstGeom prst="rect">
+            <a:avLst/>
+          </a:prstGeom>
+          <a:noFill/>
+        </p:spPr>
+        <p:txBody>
+          <a:bodyPr wrap="square" anchor="ctr" lIns="0" rIns="0" tIns="0" bIns="0">
+            <a:spAutoFit/>
+          </a:bodyPr>
+          <a:lstStyle/>
+          <a:p>
+            <a:pPr algn="ctr">
+              <a:lnSpc>
+                <a:spcPct val="115000"/>
+              </a:lnSpc>
+            </a:pPr>
+            <a:r>
+              <a:rPr sz="1200" b="0">
                 <a:solidFill>
                   <a:srgbClr val="4CAF50"/>
                 </a:solidFill>
                 <a:latin typeface="微软雅黑"/>
               </a:rPr>
-              <a:t>rows=20 + 回表过滤</a:t>
-            </a:r>
-          </a:p>
-          <a:p>
-            <a:pPr algn="l"/>
-            <a:r>
-              <a:rPr sz="1000" b="1">
-                <a:solidFill>
-                  <a:srgbClr val="4CAF50"/>
-                </a:solidFill>
-                <a:latin typeface="微软雅黑"/>
-              </a:rPr>
-              <a:t>filesort 额外排序</a:t>
-            </a:r>
-          </a:p>
-        </p:txBody>
-      </p:sp>
-      <p:sp>
-        <p:nvSpPr>
-          <p:cNvPr id="17" name="TextBox 16"/>
-          <p:cNvSpPr txBox="1"/>
-          <p:nvPr/>
-        </p:nvSpPr>
-        <p:spPr>
-          <a:xfrm>
-            <a:off x="5349240" y="2194560"/>
-            <a:ext cx="3200400" cy="457200"/>
+              <a:t>rows=3 索引覆盖</a:t>
+            </a:r>
+          </a:p>
+        </p:txBody>
+      </p:sp>
+      <p:sp>
+        <p:nvSpPr>
+          <p:cNvPr id="18" name="TextBox 17"/>
+          <p:cNvSpPr txBox="1"/>
+          <p:nvPr/>
+        </p:nvSpPr>
+        <p:spPr>
+          <a:xfrm>
+            <a:off x="8549640" y="2194560"/>
+            <a:ext cx="1645920" cy="502920"/>
           </a:xfrm>
           <a:prstGeom prst="rect">
             <a:avLst/>
@@ -15290,78 +15161,31 @@
           </a:bodyPr>
           <a:lstStyle/>
           <a:p>
-            <a:pPr algn="l">
-              <a:lnSpc>
-                <a:spcPct val="115000"/>
-              </a:lnSpc>
-            </a:pPr>
-            <a:r>
-              <a:rPr sz="1100" b="1">
+            <a:pPr algn="ctr">
+              <a:lnSpc>
+                <a:spcPct val="115000"/>
+              </a:lnSpc>
+            </a:pPr>
+            <a:r>
+              <a:rPr sz="1300" b="1">
                 <a:solidFill>
                   <a:srgbClr val="E8A33D"/>
                 </a:solidFill>
                 <a:latin typeface="微软雅黑"/>
               </a:rPr>
-              <a:t>rows=3 索引覆盖</a:t>
-            </a:r>
-          </a:p>
-          <a:p>
-            <a:pPr algn="l"/>
-            <a:r>
-              <a:rPr sz="1100" b="1">
+              <a:t>扫描↓85%</a:t>
+            </a:r>
+          </a:p>
+          <a:p>
+            <a:pPr algn="ctr">
+              <a:lnSpc>
+                <a:spcPct val="115000"/>
+              </a:lnSpc>
+            </a:pPr>
+            <a:r>
+              <a:rPr sz="1300" b="1">
                 <a:solidFill>
                   <a:srgbClr val="E8A33D"/>
-                </a:solidFill>
-                <a:latin typeface="微软雅黑"/>
-              </a:rPr>
-              <a:t>无回表无排序</a:t>
-            </a:r>
-          </a:p>
-        </p:txBody>
-      </p:sp>
-      <p:sp>
-        <p:nvSpPr>
-          <p:cNvPr id="18" name="TextBox 17"/>
-          <p:cNvSpPr txBox="1"/>
-          <p:nvPr/>
-        </p:nvSpPr>
-        <p:spPr>
-          <a:xfrm>
-            <a:off x="8549640" y="2194560"/>
-            <a:ext cx="1645920" cy="457200"/>
-          </a:xfrm>
-          <a:prstGeom prst="rect">
-            <a:avLst/>
-          </a:prstGeom>
-          <a:noFill/>
-        </p:spPr>
-        <p:txBody>
-          <a:bodyPr wrap="square" anchor="ctr" lIns="0" rIns="0" tIns="0" bIns="0">
-            <a:spAutoFit/>
-          </a:bodyPr>
-          <a:lstStyle/>
-          <a:p>
-            <a:pPr algn="l">
-              <a:lnSpc>
-                <a:spcPct val="115000"/>
-              </a:lnSpc>
-            </a:pPr>
-            <a:r>
-              <a:rPr sz="1100" b="1">
-                <a:solidFill>
-                  <a:srgbClr val="1B3A5C"/>
-                </a:solidFill>
-                <a:latin typeface="微软雅黑"/>
-              </a:rPr>
-              <a:t>扫描↓85%</a:t>
-            </a:r>
-          </a:p>
-          <a:p>
-            <a:pPr algn="l"/>
-            <a:r>
-              <a:rPr sz="1100" b="1">
-                <a:solidFill>
-                  <a:srgbClr val="1B3A5C"/>
                 </a:solidFill>
                 <a:latin typeface="微软雅黑"/>
               </a:rPr>
@@ -15378,8 +15202,8 @@
         </p:nvSpPr>
         <p:spPr>
           <a:xfrm>
-            <a:off x="502920" y="2697480"/>
-            <a:ext cx="9692640" cy="457200"/>
+            <a:off x="502920" y="2761488"/>
+            <a:ext cx="9692640" cy="502920"/>
           </a:xfrm>
           <a:prstGeom prst="rect">
             <a:avLst/>
@@ -15422,8 +15246,8 @@
         </p:nvSpPr>
         <p:spPr>
           <a:xfrm>
-            <a:off x="502920" y="2697480"/>
-            <a:ext cx="1645920" cy="457200"/>
+            <a:off x="502920" y="2761488"/>
+            <a:ext cx="1645920" cy="502920"/>
           </a:xfrm>
           <a:prstGeom prst="rect">
             <a:avLst/>
@@ -15461,8 +15285,8 @@
         </p:nvSpPr>
         <p:spPr>
           <a:xfrm>
-            <a:off x="2148840" y="2697480"/>
-            <a:ext cx="3200400" cy="457200"/>
+            <a:off x="2148840" y="2761488"/>
+            <a:ext cx="3200400" cy="502920"/>
           </a:xfrm>
           <a:prstGeom prst="rect">
             <a:avLst/>
@@ -15475,133 +15299,113 @@
           </a:bodyPr>
           <a:lstStyle/>
           <a:p>
-            <a:pPr algn="l">
-              <a:lnSpc>
-                <a:spcPct val="115000"/>
-              </a:lnSpc>
-            </a:pPr>
-            <a:r>
-              <a:rPr sz="1100" b="1">
+            <a:pPr algn="ctr">
+              <a:lnSpc>
+                <a:spcPct val="115000"/>
+              </a:lnSpc>
+            </a:pPr>
+            <a:r>
+              <a:rPr sz="1200" b="0">
+                <a:solidFill>
+                  <a:srgbClr val="E55C5C"/>
+                </a:solidFill>
+                <a:latin typeface="微软雅黑"/>
+              </a:rPr>
+              <a:t>6类 type=ALL 全表扫描</a:t>
+            </a:r>
+          </a:p>
+        </p:txBody>
+      </p:sp>
+      <p:sp>
+        <p:nvSpPr>
+          <p:cNvPr id="22" name="TextBox 21"/>
+          <p:cNvSpPr txBox="1"/>
+          <p:nvPr/>
+        </p:nvSpPr>
+        <p:spPr>
+          <a:xfrm>
+            <a:off x="5349240" y="2761488"/>
+            <a:ext cx="3200400" cy="502920"/>
+          </a:xfrm>
+          <a:prstGeom prst="rect">
+            <a:avLst/>
+          </a:prstGeom>
+          <a:noFill/>
+        </p:spPr>
+        <p:txBody>
+          <a:bodyPr wrap="square" anchor="ctr" lIns="0" rIns="0" tIns="0" bIns="0">
+            <a:spAutoFit/>
+          </a:bodyPr>
+          <a:lstStyle/>
+          <a:p>
+            <a:pPr algn="ctr">
+              <a:lnSpc>
+                <a:spcPct val="115000"/>
+              </a:lnSpc>
+            </a:pPr>
+            <a:r>
+              <a:rPr sz="1200" b="0">
+                <a:solidFill>
+                  <a:srgbClr val="4CAF50"/>
+                </a:solidFill>
+                <a:latin typeface="微软雅黑"/>
+              </a:rPr>
+              <a:t>全部命中索引</a:t>
+            </a:r>
+          </a:p>
+        </p:txBody>
+      </p:sp>
+      <p:sp>
+        <p:nvSpPr>
+          <p:cNvPr id="23" name="TextBox 22"/>
+          <p:cNvSpPr txBox="1"/>
+          <p:nvPr/>
+        </p:nvSpPr>
+        <p:spPr>
+          <a:xfrm>
+            <a:off x="8549640" y="2761488"/>
+            <a:ext cx="1645920" cy="502920"/>
+          </a:xfrm>
+          <a:prstGeom prst="rect">
+            <a:avLst/>
+          </a:prstGeom>
+          <a:noFill/>
+        </p:spPr>
+        <p:txBody>
+          <a:bodyPr wrap="square" anchor="ctr" lIns="0" rIns="0" tIns="0" bIns="0">
+            <a:spAutoFit/>
+          </a:bodyPr>
+          <a:lstStyle/>
+          <a:p>
+            <a:pPr algn="ctr">
+              <a:lnSpc>
+                <a:spcPct val="115000"/>
+              </a:lnSpc>
+            </a:pPr>
+            <a:r>
+              <a:rPr sz="1300" b="1">
                 <a:solidFill>
                   <a:srgbClr val="E8A33D"/>
                 </a:solidFill>
                 <a:latin typeface="微软雅黑"/>
               </a:rPr>
-              <a:t>6类失效</a:t>
-            </a:r>
-          </a:p>
-          <a:p>
-            <a:pPr algn="l"/>
-            <a:r>
-              <a:rPr sz="1100" b="1">
+              <a:t>全表扫描</a:t>
+            </a:r>
+          </a:p>
+          <a:p>
+            <a:pPr algn="ctr">
+              <a:lnSpc>
+                <a:spcPct val="115000"/>
+              </a:lnSpc>
+            </a:pPr>
+            <a:r>
+              <a:rPr sz="1300" b="1">
                 <a:solidFill>
                   <a:srgbClr val="E8A33D"/>
                 </a:solidFill>
                 <a:latin typeface="微软雅黑"/>
               </a:rPr>
-              <a:t>type=ALL 全表扫描</a:t>
-            </a:r>
-          </a:p>
-        </p:txBody>
-      </p:sp>
-      <p:sp>
-        <p:nvSpPr>
-          <p:cNvPr id="22" name="TextBox 21"/>
-          <p:cNvSpPr txBox="1"/>
-          <p:nvPr/>
-        </p:nvSpPr>
-        <p:spPr>
-          <a:xfrm>
-            <a:off x="5349240" y="2697480"/>
-            <a:ext cx="3200400" cy="457200"/>
-          </a:xfrm>
-          <a:prstGeom prst="rect">
-            <a:avLst/>
-          </a:prstGeom>
-          <a:noFill/>
-        </p:spPr>
-        <p:txBody>
-          <a:bodyPr wrap="square" anchor="ctr" lIns="0" rIns="0" tIns="0" bIns="0">
-            <a:spAutoFit/>
-          </a:bodyPr>
-          <a:lstStyle/>
-          <a:p>
-            <a:pPr algn="l">
-              <a:lnSpc>
-                <a:spcPct val="115000"/>
-              </a:lnSpc>
-            </a:pPr>
-            <a:r>
-              <a:rPr sz="1100" b="1">
-                <a:solidFill>
-                  <a:srgbClr val="1B3A5C"/>
-                </a:solidFill>
-                <a:latin typeface="微软雅黑"/>
-              </a:rPr>
-              <a:t>全部命中索引</a:t>
-            </a:r>
-          </a:p>
-          <a:p>
-            <a:pPr algn="l"/>
-            <a:r>
-              <a:rPr sz="1100" b="1">
-                <a:solidFill>
-                  <a:srgbClr val="1B3A5C"/>
-                </a:solidFill>
-                <a:latin typeface="微软雅黑"/>
-              </a:rPr>
-              <a:t>type=ref/range</a:t>
-            </a:r>
-          </a:p>
-        </p:txBody>
-      </p:sp>
-      <p:sp>
-        <p:nvSpPr>
-          <p:cNvPr id="23" name="TextBox 22"/>
-          <p:cNvSpPr txBox="1"/>
-          <p:nvPr/>
-        </p:nvSpPr>
-        <p:spPr>
-          <a:xfrm>
-            <a:off x="8549640" y="2697480"/>
-            <a:ext cx="1645920" cy="457200"/>
-          </a:xfrm>
-          <a:prstGeom prst="rect">
-            <a:avLst/>
-          </a:prstGeom>
-          <a:noFill/>
-        </p:spPr>
-        <p:txBody>
-          <a:bodyPr wrap="square" anchor="ctr" lIns="0" rIns="0" tIns="0" bIns="0">
-            <a:spAutoFit/>
-          </a:bodyPr>
-          <a:lstStyle/>
-          <a:p>
-            <a:pPr algn="l">
-              <a:lnSpc>
-                <a:spcPct val="115000"/>
-              </a:lnSpc>
-            </a:pPr>
-            <a:r>
-              <a:rPr sz="1000" b="1">
-                <a:solidFill>
-                  <a:srgbClr val="E55C5C"/>
-                </a:solidFill>
-                <a:latin typeface="微软雅黑"/>
-              </a:rPr>
-              <a:t>全表扫描→</a:t>
-            </a:r>
-          </a:p>
-          <a:p>
-            <a:pPr algn="l"/>
-            <a:r>
-              <a:rPr sz="1000" b="1">
-                <a:solidFill>
-                  <a:srgbClr val="E55C5C"/>
-                </a:solidFill>
-                <a:latin typeface="微软雅黑"/>
-              </a:rPr>
-              <a:t>索引命中</a:t>
+              <a:t>→索引命中</a:t>
             </a:r>
           </a:p>
         </p:txBody>
@@ -15614,8 +15418,8 @@
         </p:nvSpPr>
         <p:spPr>
           <a:xfrm>
-            <a:off x="502920" y="3200400"/>
-            <a:ext cx="9692640" cy="457200"/>
+            <a:off x="502920" y="3328415"/>
+            <a:ext cx="9692640" cy="502920"/>
           </a:xfrm>
           <a:prstGeom prst="rect">
             <a:avLst/>
@@ -15658,8 +15462,8 @@
         </p:nvSpPr>
         <p:spPr>
           <a:xfrm>
-            <a:off x="502920" y="3200400"/>
-            <a:ext cx="1645920" cy="457200"/>
+            <a:off x="502920" y="3328415"/>
+            <a:ext cx="1645920" cy="502920"/>
           </a:xfrm>
           <a:prstGeom prst="rect">
             <a:avLst/>
@@ -15697,8 +15501,8 @@
         </p:nvSpPr>
         <p:spPr>
           <a:xfrm>
-            <a:off x="2148840" y="3200400"/>
-            <a:ext cx="3200400" cy="457200"/>
+            <a:off x="2148840" y="3328415"/>
+            <a:ext cx="3200400" cy="502920"/>
           </a:xfrm>
           <a:prstGeom prst="rect">
             <a:avLst/>
@@ -15711,15 +15515,15 @@
           </a:bodyPr>
           <a:lstStyle/>
           <a:p>
-            <a:pPr algn="l">
-              <a:lnSpc>
-                <a:spcPct val="115000"/>
-              </a:lnSpc>
-            </a:pPr>
-            <a:r>
-              <a:rPr sz="1100" b="1">
-                <a:solidFill>
-                  <a:srgbClr val="1B3A5C"/>
+            <a:pPr algn="ctr">
+              <a:lnSpc>
+                <a:spcPct val="115000"/>
+              </a:lnSpc>
+            </a:pPr>
+            <a:r>
+              <a:rPr sz="1200" b="0">
+                <a:solidFill>
+                  <a:srgbClr val="E55C5C"/>
                 </a:solidFill>
                 <a:latin typeface="微软雅黑"/>
               </a:rPr>
@@ -15727,11 +15531,15 @@
             </a:r>
           </a:p>
           <a:p>
-            <a:pPr algn="l"/>
-            <a:r>
-              <a:rPr sz="1100" b="1">
-                <a:solidFill>
-                  <a:srgbClr val="1B3A5C"/>
+            <a:pPr algn="ctr">
+              <a:lnSpc>
+                <a:spcPct val="115000"/>
+              </a:lnSpc>
+            </a:pPr>
+            <a:r>
+              <a:rPr sz="1200" b="0">
+                <a:solidFill>
+                  <a:srgbClr val="E55C5C"/>
                 </a:solidFill>
                 <a:latin typeface="微软雅黑"/>
               </a:rPr>
@@ -15748,8 +15556,8 @@
         </p:nvSpPr>
         <p:spPr>
           <a:xfrm>
-            <a:off x="5349240" y="3200400"/>
-            <a:ext cx="3200400" cy="457200"/>
+            <a:off x="5349240" y="3328415"/>
+            <a:ext cx="3200400" cy="502920"/>
           </a:xfrm>
           <a:prstGeom prst="rect">
             <a:avLst/>
@@ -15762,15 +15570,15 @@
           </a:bodyPr>
           <a:lstStyle/>
           <a:p>
-            <a:pPr algn="l">
-              <a:lnSpc>
-                <a:spcPct val="115000"/>
-              </a:lnSpc>
-            </a:pPr>
-            <a:r>
-              <a:rPr sz="1000" b="1">
-                <a:solidFill>
-                  <a:srgbClr val="E55C5C"/>
+            <a:pPr algn="ctr">
+              <a:lnSpc>
+                <a:spcPct val="115000"/>
+              </a:lnSpc>
+            </a:pPr>
+            <a:r>
+              <a:rPr sz="1200" b="0">
+                <a:solidFill>
+                  <a:srgbClr val="4CAF50"/>
                 </a:solidFill>
                 <a:latin typeface="微软雅黑"/>
               </a:rPr>
@@ -15778,11 +15586,15 @@
             </a:r>
           </a:p>
           <a:p>
-            <a:pPr algn="l"/>
-            <a:r>
-              <a:rPr sz="1000" b="1">
-                <a:solidFill>
-                  <a:srgbClr val="E55C5C"/>
+            <a:pPr algn="ctr">
+              <a:lnSpc>
+                <a:spcPct val="115000"/>
+              </a:lnSpc>
+            </a:pPr>
+            <a:r>
+              <a:rPr sz="1200" b="0">
+                <a:solidFill>
+                  <a:srgbClr val="4CAF50"/>
                 </a:solidFill>
                 <a:latin typeface="微软雅黑"/>
               </a:rPr>
@@ -15799,8 +15611,8 @@
         </p:nvSpPr>
         <p:spPr>
           <a:xfrm>
-            <a:off x="8549640" y="3200400"/>
-            <a:ext cx="1645920" cy="457200"/>
+            <a:off x="8549640" y="3328415"/>
+            <a:ext cx="1645920" cy="502920"/>
           </a:xfrm>
           <a:prstGeom prst="rect">
             <a:avLst/>
@@ -15813,15 +15625,15 @@
           </a:bodyPr>
           <a:lstStyle/>
           <a:p>
-            <a:pPr algn="l">
-              <a:lnSpc>
-                <a:spcPct val="115000"/>
-              </a:lnSpc>
-            </a:pPr>
-            <a:r>
-              <a:rPr sz="1000" b="1">
-                <a:solidFill>
-                  <a:srgbClr val="4CAF50"/>
+            <a:pPr algn="ctr">
+              <a:lnSpc>
+                <a:spcPct val="115000"/>
+              </a:lnSpc>
+            </a:pPr>
+            <a:r>
+              <a:rPr sz="1300" b="1">
+                <a:solidFill>
+                  <a:srgbClr val="E8A33D"/>
                 </a:solidFill>
                 <a:latin typeface="微软雅黑"/>
               </a:rPr>
@@ -15838,8 +15650,8 @@
         </p:nvSpPr>
         <p:spPr>
           <a:xfrm>
-            <a:off x="502920" y="3703320"/>
-            <a:ext cx="9692640" cy="457200"/>
+            <a:off x="502920" y="3895344"/>
+            <a:ext cx="9692640" cy="502920"/>
           </a:xfrm>
           <a:prstGeom prst="rect">
             <a:avLst/>
@@ -15882,8 +15694,8 @@
         </p:nvSpPr>
         <p:spPr>
           <a:xfrm>
-            <a:off x="502920" y="3703320"/>
-            <a:ext cx="1645920" cy="457200"/>
+            <a:off x="502920" y="3895344"/>
+            <a:ext cx="1645920" cy="502920"/>
           </a:xfrm>
           <a:prstGeom prst="rect">
             <a:avLst/>
@@ -15921,8 +15733,8 @@
         </p:nvSpPr>
         <p:spPr>
           <a:xfrm>
-            <a:off x="2148840" y="3703320"/>
-            <a:ext cx="3200400" cy="457200"/>
+            <a:off x="2148840" y="3895344"/>
+            <a:ext cx="3200400" cy="502920"/>
           </a:xfrm>
           <a:prstGeom prst="rect">
             <a:avLst/>
@@ -15935,31 +15747,35 @@
           </a:bodyPr>
           <a:lstStyle/>
           <a:p>
-            <a:pPr algn="l">
-              <a:lnSpc>
-                <a:spcPct val="115000"/>
-              </a:lnSpc>
-            </a:pPr>
-            <a:r>
-              <a:rPr sz="1000" b="1">
+            <a:pPr algn="ctr">
+              <a:lnSpc>
+                <a:spcPct val="115000"/>
+              </a:lnSpc>
+            </a:pPr>
+            <a:r>
+              <a:rPr sz="1200" b="0">
                 <a:solidFill>
                   <a:srgbClr val="E55C5C"/>
                 </a:solidFill>
                 <a:latin typeface="微软雅黑"/>
               </a:rPr>
-              <a:t>真实触发</a:t>
-            </a:r>
-          </a:p>
-          <a:p>
-            <a:pPr algn="l"/>
-            <a:r>
-              <a:rPr sz="1000" b="1">
+              <a:t>真实触发 ERROR 1205</a:t>
+            </a:r>
+          </a:p>
+          <a:p>
+            <a:pPr algn="ctr">
+              <a:lnSpc>
+                <a:spcPct val="115000"/>
+              </a:lnSpc>
+            </a:pPr>
+            <a:r>
+              <a:rPr sz="1200" b="0">
                 <a:solidFill>
                   <a:srgbClr val="E55C5C"/>
                 </a:solidFill>
                 <a:latin typeface="微软雅黑"/>
               </a:rPr>
-              <a:t>ERROR 1205 超时5s</a:t>
+              <a:t>超时 5s</a:t>
             </a:r>
           </a:p>
         </p:txBody>
@@ -15972,8 +15788,8 @@
         </p:nvSpPr>
         <p:spPr>
           <a:xfrm>
-            <a:off x="5349240" y="3703320"/>
-            <a:ext cx="3200400" cy="457200"/>
+            <a:off x="5349240" y="3895344"/>
+            <a:ext cx="3200400" cy="502920"/>
           </a:xfrm>
           <a:prstGeom prst="rect">
             <a:avLst/>
@@ -15986,31 +15802,35 @@
           </a:bodyPr>
           <a:lstStyle/>
           <a:p>
-            <a:pPr algn="l">
-              <a:lnSpc>
-                <a:spcPct val="115000"/>
-              </a:lnSpc>
-            </a:pPr>
-            <a:r>
-              <a:rPr sz="1000" b="1">
+            <a:pPr algn="ctr">
+              <a:lnSpc>
+                <a:spcPct val="115000"/>
+              </a:lnSpc>
+            </a:pPr>
+            <a:r>
+              <a:rPr sz="1200" b="0">
                 <a:solidFill>
                   <a:srgbClr val="4CAF50"/>
                 </a:solidFill>
                 <a:latin typeface="微软雅黑"/>
               </a:rPr>
-              <a:t>分批提交+乐观锁</a:t>
-            </a:r>
-          </a:p>
-          <a:p>
-            <a:pPr algn="l"/>
-            <a:r>
-              <a:rPr sz="1000" b="1">
+              <a:t>分批+乐观锁</a:t>
+            </a:r>
+          </a:p>
+          <a:p>
+            <a:pPr algn="ctr">
+              <a:lnSpc>
+                <a:spcPct val="115000"/>
+              </a:lnSpc>
+            </a:pPr>
+            <a:r>
+              <a:rPr sz="1200" b="0">
                 <a:solidFill>
                   <a:srgbClr val="4CAF50"/>
                 </a:solidFill>
                 <a:latin typeface="微软雅黑"/>
               </a:rPr>
-              <a:t>快速失败+重试</a:t>
+              <a:t>快速失败</a:t>
             </a:r>
           </a:p>
         </p:txBody>
@@ -16023,8 +15843,8 @@
         </p:nvSpPr>
         <p:spPr>
           <a:xfrm>
-            <a:off x="8549640" y="3703320"/>
-            <a:ext cx="1645920" cy="457200"/>
+            <a:off x="8549640" y="3895344"/>
+            <a:ext cx="1645920" cy="502920"/>
           </a:xfrm>
           <a:prstGeom prst="rect">
             <a:avLst/>
@@ -16037,31 +15857,35 @@
           </a:bodyPr>
           <a:lstStyle/>
           <a:p>
-            <a:pPr algn="l">
-              <a:lnSpc>
-                <a:spcPct val="115000"/>
-              </a:lnSpc>
-            </a:pPr>
-            <a:r>
-              <a:rPr sz="1100" b="1">
+            <a:pPr algn="ctr">
+              <a:lnSpc>
+                <a:spcPct val="115000"/>
+              </a:lnSpc>
+            </a:pPr>
+            <a:r>
+              <a:rPr sz="1300" b="1">
                 <a:solidFill>
                   <a:srgbClr val="E8A33D"/>
                 </a:solidFill>
                 <a:latin typeface="微软雅黑"/>
               </a:rPr>
-              <a:t>超时堆积→</a:t>
-            </a:r>
-          </a:p>
-          <a:p>
-            <a:pPr algn="l"/>
-            <a:r>
-              <a:rPr sz="1100" b="1">
+              <a:t>超时堆积</a:t>
+            </a:r>
+          </a:p>
+          <a:p>
+            <a:pPr algn="ctr">
+              <a:lnSpc>
+                <a:spcPct val="115000"/>
+              </a:lnSpc>
+            </a:pPr>
+            <a:r>
+              <a:rPr sz="1300" b="1">
                 <a:solidFill>
                   <a:srgbClr val="E8A33D"/>
                 </a:solidFill>
                 <a:latin typeface="微软雅黑"/>
               </a:rPr>
-              <a:t>秒级失败</a:t>
+              <a:t>→秒级失败</a:t>
             </a:r>
           </a:p>
         </p:txBody>
@@ -16074,8 +15898,8 @@
         </p:nvSpPr>
         <p:spPr>
           <a:xfrm>
-            <a:off x="502920" y="4206240"/>
-            <a:ext cx="9692640" cy="457200"/>
+            <a:off x="502920" y="4462272"/>
+            <a:ext cx="9692640" cy="502920"/>
           </a:xfrm>
           <a:prstGeom prst="rect">
             <a:avLst/>
@@ -16118,8 +15942,8 @@
         </p:nvSpPr>
         <p:spPr>
           <a:xfrm>
-            <a:off x="502920" y="4206240"/>
-            <a:ext cx="1645920" cy="457200"/>
+            <a:off x="502920" y="4462272"/>
+            <a:ext cx="1645920" cy="502920"/>
           </a:xfrm>
           <a:prstGeom prst="rect">
             <a:avLst/>
@@ -16157,8 +15981,8 @@
         </p:nvSpPr>
         <p:spPr>
           <a:xfrm>
-            <a:off x="2148840" y="4206240"/>
-            <a:ext cx="3200400" cy="457200"/>
+            <a:off x="2148840" y="4462272"/>
+            <a:ext cx="3200400" cy="502920"/>
           </a:xfrm>
           <a:prstGeom prst="rect">
             <a:avLst/>
@@ -16171,45 +15995,104 @@
           </a:bodyPr>
           <a:lstStyle/>
           <a:p>
-            <a:pPr algn="l">
-              <a:lnSpc>
-                <a:spcPct val="115000"/>
-              </a:lnSpc>
-            </a:pPr>
-            <a:r>
-              <a:rPr sz="1000" b="1">
+            <a:pPr algn="ctr">
+              <a:lnSpc>
+                <a:spcPct val="115000"/>
+              </a:lnSpc>
+            </a:pPr>
+            <a:r>
+              <a:rPr sz="1200" b="0">
+                <a:solidFill>
+                  <a:srgbClr val="E55C5C"/>
+                </a:solidFill>
+                <a:latin typeface="微软雅黑"/>
+              </a:rPr>
+              <a:t>单线程回放</a:t>
+            </a:r>
+          </a:p>
+          <a:p>
+            <a:pPr algn="ctr">
+              <a:lnSpc>
+                <a:spcPct val="115000"/>
+              </a:lnSpc>
+            </a:pPr>
+            <a:r>
+              <a:rPr sz="1200" b="0">
+                <a:solidFill>
+                  <a:srgbClr val="E55C5C"/>
+                </a:solidFill>
+                <a:latin typeface="微软雅黑"/>
+              </a:rPr>
+              <a:t>延迟 120s+</a:t>
+            </a:r>
+          </a:p>
+        </p:txBody>
+      </p:sp>
+      <p:sp>
+        <p:nvSpPr>
+          <p:cNvPr id="37" name="TextBox 36"/>
+          <p:cNvSpPr txBox="1"/>
+          <p:nvPr/>
+        </p:nvSpPr>
+        <p:spPr>
+          <a:xfrm>
+            <a:off x="5349240" y="4462272"/>
+            <a:ext cx="3200400" cy="502920"/>
+          </a:xfrm>
+          <a:prstGeom prst="rect">
+            <a:avLst/>
+          </a:prstGeom>
+          <a:noFill/>
+        </p:spPr>
+        <p:txBody>
+          <a:bodyPr wrap="square" anchor="ctr" lIns="0" rIns="0" tIns="0" bIns="0">
+            <a:spAutoFit/>
+          </a:bodyPr>
+          <a:lstStyle/>
+          <a:p>
+            <a:pPr algn="ctr">
+              <a:lnSpc>
+                <a:spcPct val="115000"/>
+              </a:lnSpc>
+            </a:pPr>
+            <a:r>
+              <a:rPr sz="1200" b="0">
                 <a:solidFill>
                   <a:srgbClr val="4CAF50"/>
                 </a:solidFill>
                 <a:latin typeface="微软雅黑"/>
               </a:rPr>
-              <a:t>单线程回放</a:t>
-            </a:r>
-          </a:p>
-          <a:p>
-            <a:pPr algn="l"/>
-            <a:r>
-              <a:rPr sz="1000" b="1">
+              <a:t>8线程并行</a:t>
+            </a:r>
+          </a:p>
+          <a:p>
+            <a:pPr algn="ctr">
+              <a:lnSpc>
+                <a:spcPct val="115000"/>
+              </a:lnSpc>
+            </a:pPr>
+            <a:r>
+              <a:rPr sz="1200" b="0">
                 <a:solidFill>
                   <a:srgbClr val="4CAF50"/>
                 </a:solidFill>
                 <a:latin typeface="微软雅黑"/>
               </a:rPr>
-              <a:t>大促延迟120s+</a:t>
-            </a:r>
-          </a:p>
-        </p:txBody>
-      </p:sp>
-      <p:sp>
-        <p:nvSpPr>
-          <p:cNvPr id="37" name="TextBox 36"/>
-          <p:cNvSpPr txBox="1"/>
-          <p:nvPr/>
-        </p:nvSpPr>
-        <p:spPr>
-          <a:xfrm>
-            <a:off x="5349240" y="4206240"/>
-            <a:ext cx="3200400" cy="457200"/>
+              <a:t>LOGICAL_CLOCK</a:t>
+            </a:r>
+          </a:p>
+        </p:txBody>
+      </p:sp>
+      <p:sp>
+        <p:nvSpPr>
+          <p:cNvPr id="38" name="TextBox 37"/>
+          <p:cNvSpPr txBox="1"/>
+          <p:nvPr/>
+        </p:nvSpPr>
+        <p:spPr>
+          <a:xfrm>
+            <a:off x="8549640" y="4462272"/>
+            <a:ext cx="1645920" cy="502920"/>
           </a:xfrm>
           <a:prstGeom prst="rect">
             <a:avLst/>
@@ -16222,78 +16105,31 @@
           </a:bodyPr>
           <a:lstStyle/>
           <a:p>
-            <a:pPr algn="l">
-              <a:lnSpc>
-                <a:spcPct val="115000"/>
-              </a:lnSpc>
-            </a:pPr>
-            <a:r>
-              <a:rPr sz="1100" b="1">
+            <a:pPr algn="ctr">
+              <a:lnSpc>
+                <a:spcPct val="115000"/>
+              </a:lnSpc>
+            </a:pPr>
+            <a:r>
+              <a:rPr sz="1300" b="1">
                 <a:solidFill>
                   <a:srgbClr val="E8A33D"/>
                 </a:solidFill>
                 <a:latin typeface="微软雅黑"/>
               </a:rPr>
-              <a:t>8线程并行复制</a:t>
-            </a:r>
-          </a:p>
-          <a:p>
-            <a:pPr algn="l"/>
-            <a:r>
-              <a:rPr sz="1100" b="1">
+              <a:t>120s→&lt;5s</a:t>
+            </a:r>
+          </a:p>
+          <a:p>
+            <a:pPr algn="ctr">
+              <a:lnSpc>
+                <a:spcPct val="115000"/>
+              </a:lnSpc>
+            </a:pPr>
+            <a:r>
+              <a:rPr sz="1300" b="1">
                 <a:solidFill>
                   <a:srgbClr val="E8A33D"/>
-                </a:solidFill>
-                <a:latin typeface="微软雅黑"/>
-              </a:rPr>
-              <a:t>LOGICAL_CLOCK</a:t>
-            </a:r>
-          </a:p>
-        </p:txBody>
-      </p:sp>
-      <p:sp>
-        <p:nvSpPr>
-          <p:cNvPr id="38" name="TextBox 37"/>
-          <p:cNvSpPr txBox="1"/>
-          <p:nvPr/>
-        </p:nvSpPr>
-        <p:spPr>
-          <a:xfrm>
-            <a:off x="8549640" y="4206240"/>
-            <a:ext cx="1645920" cy="457200"/>
-          </a:xfrm>
-          <a:prstGeom prst="rect">
-            <a:avLst/>
-          </a:prstGeom>
-          <a:noFill/>
-        </p:spPr>
-        <p:txBody>
-          <a:bodyPr wrap="square" anchor="ctr" lIns="0" rIns="0" tIns="0" bIns="0">
-            <a:spAutoFit/>
-          </a:bodyPr>
-          <a:lstStyle/>
-          <a:p>
-            <a:pPr algn="l">
-              <a:lnSpc>
-                <a:spcPct val="115000"/>
-              </a:lnSpc>
-            </a:pPr>
-            <a:r>
-              <a:rPr sz="1100" b="1">
-                <a:solidFill>
-                  <a:srgbClr val="1B3A5C"/>
-                </a:solidFill>
-                <a:latin typeface="微软雅黑"/>
-              </a:rPr>
-              <a:t>120s→&lt;5s</a:t>
-            </a:r>
-          </a:p>
-          <a:p>
-            <a:pPr algn="l"/>
-            <a:r>
-              <a:rPr sz="1100" b="1">
-                <a:solidFill>
-                  <a:srgbClr val="1B3A5C"/>
                 </a:solidFill>
                 <a:latin typeface="微软雅黑"/>
               </a:rPr>
@@ -16350,7 +16186,7 @@
         <p:spPr>
           <a:xfrm>
             <a:off x="10424160" y="2194560"/>
-            <a:ext cx="1280160" cy="457200"/>
+            <a:ext cx="1280160" cy="502920"/>
           </a:xfrm>
           <a:prstGeom prst="rect">
             <a:avLst/>
@@ -16394,7 +16230,7 @@
         <p:spPr>
           <a:xfrm>
             <a:off x="10424160" y="2194560"/>
-            <a:ext cx="54864" cy="457200"/>
+            <a:ext cx="54864" cy="502920"/>
           </a:xfrm>
           <a:prstGeom prst="rect">
             <a:avLst/>
@@ -16437,8 +16273,8 @@
         </p:nvSpPr>
         <p:spPr>
           <a:xfrm>
-            <a:off x="10515600" y="2194560"/>
-            <a:ext cx="1143000" cy="457200"/>
+            <a:off x="10515600" y="2212848"/>
+            <a:ext cx="1143000" cy="274320"/>
           </a:xfrm>
           <a:prstGeom prst="rect">
             <a:avLst/>
@@ -16451,33 +16287,72 @@
           </a:bodyPr>
           <a:lstStyle/>
           <a:p>
-            <a:pPr algn="l">
-              <a:lnSpc>
-                <a:spcPct val="115000"/>
-              </a:lnSpc>
-            </a:pPr>
-            <a:r>
-              <a:rPr sz="900" b="1">
+            <a:pPr algn="ctr">
+              <a:lnSpc>
+                <a:spcPct val="115000"/>
+              </a:lnSpc>
+            </a:pPr>
+            <a:r>
+              <a:rPr sz="1000" b="1">
                 <a:solidFill>
                   <a:srgbClr val="4CAF50"/>
                 </a:solidFill>
                 <a:latin typeface="微软雅黑"/>
               </a:rPr>
-              <a:t>死锁=0</a:t>
-            </a:r>
-          </a:p>
-        </p:txBody>
-      </p:sp>
-      <p:sp>
-        <p:nvSpPr>
-          <p:cNvPr id="43" name="Rectangle 42"/>
+              <a:t>死锁 = 0</a:t>
+            </a:r>
+          </a:p>
+        </p:txBody>
+      </p:sp>
+      <p:sp>
+        <p:nvSpPr>
+          <p:cNvPr id="43" name="TextBox 42"/>
+          <p:cNvSpPr txBox="1"/>
+          <p:nvPr/>
+        </p:nvSpPr>
+        <p:spPr>
+          <a:xfrm>
+            <a:off x="10515600" y="2468879"/>
+            <a:ext cx="1143000" cy="182880"/>
+          </a:xfrm>
+          <a:prstGeom prst="rect">
+            <a:avLst/>
+          </a:prstGeom>
+          <a:noFill/>
+        </p:spPr>
+        <p:txBody>
+          <a:bodyPr wrap="square" anchor="ctr" lIns="0" rIns="0" tIns="0" bIns="0">
+            <a:spAutoFit/>
+          </a:bodyPr>
+          <a:lstStyle/>
+          <a:p>
+            <a:pPr algn="ctr">
+              <a:lnSpc>
+                <a:spcPct val="115000"/>
+              </a:lnSpc>
+            </a:pPr>
+            <a:r>
+              <a:rPr sz="800" b="0">
+                <a:solidFill>
+                  <a:srgbClr val="5A6A7A"/>
+                </a:solidFill>
+                <a:latin typeface="微软雅黑"/>
+              </a:rPr>
+              <a:t>AB-BA 根除</a:t>
+            </a:r>
+          </a:p>
+        </p:txBody>
+      </p:sp>
+      <p:sp>
+        <p:nvSpPr>
+          <p:cNvPr id="44" name="Rectangle 43"/>
           <p:cNvSpPr/>
           <p:nvPr/>
         </p:nvSpPr>
         <p:spPr>
           <a:xfrm>
-            <a:off x="10424160" y="2697480"/>
-            <a:ext cx="1280160" cy="457200"/>
+            <a:off x="10424160" y="2761488"/>
+            <a:ext cx="1280160" cy="502920"/>
           </a:xfrm>
           <a:prstGeom prst="rect">
             <a:avLst/>
@@ -16514,14 +16389,14 @@
       </p:sp>
       <p:sp>
         <p:nvSpPr>
-          <p:cNvPr id="44" name="Rectangle 43"/>
+          <p:cNvPr id="45" name="Rectangle 44"/>
           <p:cNvSpPr/>
           <p:nvPr/>
         </p:nvSpPr>
         <p:spPr>
           <a:xfrm>
-            <a:off x="10424160" y="2697480"/>
-            <a:ext cx="54864" cy="457200"/>
+            <a:off x="10424160" y="2761488"/>
+            <a:ext cx="54864" cy="502920"/>
           </a:xfrm>
           <a:prstGeom prst="rect">
             <a:avLst/>
@@ -16558,14 +16433,14 @@
       </p:sp>
       <p:sp>
         <p:nvSpPr>
-          <p:cNvPr id="45" name="TextBox 44"/>
-          <p:cNvSpPr txBox="1"/>
-          <p:nvPr/>
-        </p:nvSpPr>
-        <p:spPr>
-          <a:xfrm>
-            <a:off x="10515600" y="2697480"/>
-            <a:ext cx="1143000" cy="457200"/>
+          <p:cNvPr id="46" name="TextBox 45"/>
+          <p:cNvSpPr txBox="1"/>
+          <p:nvPr/>
+        </p:nvSpPr>
+        <p:spPr>
+          <a:xfrm>
+            <a:off x="10515600" y="2779776"/>
+            <a:ext cx="1143000" cy="274320"/>
           </a:xfrm>
           <a:prstGeom prst="rect">
             <a:avLst/>
@@ -16578,15 +16453,15 @@
           </a:bodyPr>
           <a:lstStyle/>
           <a:p>
-            <a:pPr algn="l">
-              <a:lnSpc>
-                <a:spcPct val="115000"/>
-              </a:lnSpc>
-            </a:pPr>
-            <a:r>
-              <a:rPr sz="900" b="1">
-                <a:solidFill>
-                  <a:srgbClr val="4CAF50"/>
+            <a:pPr algn="ctr">
+              <a:lnSpc>
+                <a:spcPct val="115000"/>
+              </a:lnSpc>
+            </a:pPr>
+            <a:r>
+              <a:rPr sz="1000" b="1">
+                <a:solidFill>
+                  <a:srgbClr val="4A90D9"/>
                 </a:solidFill>
                 <a:latin typeface="微软雅黑"/>
               </a:rPr>
@@ -16597,14 +16472,53 @@
       </p:sp>
       <p:sp>
         <p:nvSpPr>
-          <p:cNvPr id="46" name="Rectangle 45"/>
+          <p:cNvPr id="47" name="TextBox 46"/>
+          <p:cNvSpPr txBox="1"/>
+          <p:nvPr/>
+        </p:nvSpPr>
+        <p:spPr>
+          <a:xfrm>
+            <a:off x="10515600" y="3035808"/>
+            <a:ext cx="1143000" cy="182880"/>
+          </a:xfrm>
+          <a:prstGeom prst="rect">
+            <a:avLst/>
+          </a:prstGeom>
+          <a:noFill/>
+        </p:spPr>
+        <p:txBody>
+          <a:bodyPr wrap="square" anchor="ctr" lIns="0" rIns="0" tIns="0" bIns="0">
+            <a:spAutoFit/>
+          </a:bodyPr>
+          <a:lstStyle/>
+          <a:p>
+            <a:pPr algn="ctr">
+              <a:lnSpc>
+                <a:spcPct val="115000"/>
+              </a:lnSpc>
+            </a:pPr>
+            <a:r>
+              <a:rPr sz="800" b="0">
+                <a:solidFill>
+                  <a:srgbClr val="5A6A7A"/>
+                </a:solidFill>
+                <a:latin typeface="微软雅黑"/>
+              </a:rPr>
+              <a:t>索引覆盖</a:t>
+            </a:r>
+          </a:p>
+        </p:txBody>
+      </p:sp>
+      <p:sp>
+        <p:nvSpPr>
+          <p:cNvPr id="48" name="Rectangle 47"/>
           <p:cNvSpPr/>
           <p:nvPr/>
         </p:nvSpPr>
         <p:spPr>
           <a:xfrm>
-            <a:off x="10424160" y="3200400"/>
-            <a:ext cx="1280160" cy="457200"/>
+            <a:off x="10424160" y="3328415"/>
+            <a:ext cx="1280160" cy="502920"/>
           </a:xfrm>
           <a:prstGeom prst="rect">
             <a:avLst/>
@@ -16641,14 +16555,14 @@
       </p:sp>
       <p:sp>
         <p:nvSpPr>
-          <p:cNvPr id="47" name="Rectangle 46"/>
+          <p:cNvPr id="49" name="Rectangle 48"/>
           <p:cNvSpPr/>
           <p:nvPr/>
         </p:nvSpPr>
         <p:spPr>
           <a:xfrm>
-            <a:off x="10424160" y="3200400"/>
-            <a:ext cx="54864" cy="457200"/>
+            <a:off x="10424160" y="3328415"/>
+            <a:ext cx="54864" cy="502920"/>
           </a:xfrm>
           <a:prstGeom prst="rect">
             <a:avLst/>
@@ -16685,14 +16599,14 @@
       </p:sp>
       <p:sp>
         <p:nvSpPr>
-          <p:cNvPr id="48" name="TextBox 47"/>
-          <p:cNvSpPr txBox="1"/>
-          <p:nvPr/>
-        </p:nvSpPr>
-        <p:spPr>
-          <a:xfrm>
-            <a:off x="10515600" y="3200400"/>
-            <a:ext cx="1143000" cy="457200"/>
+          <p:cNvPr id="50" name="TextBox 49"/>
+          <p:cNvSpPr txBox="1"/>
+          <p:nvPr/>
+        </p:nvSpPr>
+        <p:spPr>
+          <a:xfrm>
+            <a:off x="10515600" y="3346703"/>
+            <a:ext cx="1143000" cy="274320"/>
           </a:xfrm>
           <a:prstGeom prst="rect">
             <a:avLst/>
@@ -16705,15 +16619,15 @@
           </a:bodyPr>
           <a:lstStyle/>
           <a:p>
-            <a:pPr algn="l">
-              <a:lnSpc>
-                <a:spcPct val="115000"/>
-              </a:lnSpc>
-            </a:pPr>
-            <a:r>
-              <a:rPr sz="900" b="1">
-                <a:solidFill>
-                  <a:srgbClr val="4CAF50"/>
+            <a:pPr algn="ctr">
+              <a:lnSpc>
+                <a:spcPct val="115000"/>
+              </a:lnSpc>
+            </a:pPr>
+            <a:r>
+              <a:rPr sz="1000" b="1">
+                <a:solidFill>
+                  <a:srgbClr val="2E8B8B"/>
                 </a:solidFill>
                 <a:latin typeface="微软雅黑"/>
               </a:rPr>
@@ -16721,11 +16635,15 @@
             </a:r>
           </a:p>
           <a:p>
-            <a:pPr algn="l"/>
-            <a:r>
-              <a:rPr sz="900" b="1">
-                <a:solidFill>
-                  <a:srgbClr val="4CAF50"/>
+            <a:pPr algn="ctr">
+              <a:lnSpc>
+                <a:spcPct val="115000"/>
+              </a:lnSpc>
+            </a:pPr>
+            <a:r>
+              <a:rPr sz="1000" b="1">
+                <a:solidFill>
+                  <a:srgbClr val="2E8B8B"/>
                 </a:solidFill>
                 <a:latin typeface="微软雅黑"/>
               </a:rPr>
@@ -16736,14 +16654,53 @@
       </p:sp>
       <p:sp>
         <p:nvSpPr>
-          <p:cNvPr id="49" name="Rectangle 48"/>
+          <p:cNvPr id="51" name="TextBox 50"/>
+          <p:cNvSpPr txBox="1"/>
+          <p:nvPr/>
+        </p:nvSpPr>
+        <p:spPr>
+          <a:xfrm>
+            <a:off x="10515600" y="3602735"/>
+            <a:ext cx="1143000" cy="182880"/>
+          </a:xfrm>
+          <a:prstGeom prst="rect">
+            <a:avLst/>
+          </a:prstGeom>
+          <a:noFill/>
+        </p:spPr>
+        <p:txBody>
+          <a:bodyPr wrap="square" anchor="ctr" lIns="0" rIns="0" tIns="0" bIns="0">
+            <a:spAutoFit/>
+          </a:bodyPr>
+          <a:lstStyle/>
+          <a:p>
+            <a:pPr algn="ctr">
+              <a:lnSpc>
+                <a:spcPct val="115000"/>
+              </a:lnSpc>
+            </a:pPr>
+            <a:r>
+              <a:rPr sz="800" b="0">
+                <a:solidFill>
+                  <a:srgbClr val="5A6A7A"/>
+                </a:solidFill>
+                <a:latin typeface="微软雅黑"/>
+              </a:rPr>
+              <a:t>分批+乐观锁</a:t>
+            </a:r>
+          </a:p>
+        </p:txBody>
+      </p:sp>
+      <p:sp>
+        <p:nvSpPr>
+          <p:cNvPr id="52" name="Rectangle 51"/>
           <p:cNvSpPr/>
           <p:nvPr/>
         </p:nvSpPr>
         <p:spPr>
           <a:xfrm>
-            <a:off x="10424160" y="3703320"/>
-            <a:ext cx="1280160" cy="457200"/>
+            <a:off x="10424160" y="3895344"/>
+            <a:ext cx="1280160" cy="502920"/>
           </a:xfrm>
           <a:prstGeom prst="rect">
             <a:avLst/>
@@ -16780,14 +16737,14 @@
       </p:sp>
       <p:sp>
         <p:nvSpPr>
-          <p:cNvPr id="50" name="Rectangle 49"/>
+          <p:cNvPr id="53" name="Rectangle 52"/>
           <p:cNvSpPr/>
           <p:nvPr/>
         </p:nvSpPr>
         <p:spPr>
           <a:xfrm>
-            <a:off x="10424160" y="3703320"/>
-            <a:ext cx="54864" cy="457200"/>
+            <a:off x="10424160" y="3895344"/>
+            <a:ext cx="54864" cy="502920"/>
           </a:xfrm>
           <a:prstGeom prst="rect">
             <a:avLst/>
@@ -16824,14 +16781,14 @@
       </p:sp>
       <p:sp>
         <p:nvSpPr>
-          <p:cNvPr id="51" name="TextBox 50"/>
-          <p:cNvSpPr txBox="1"/>
-          <p:nvPr/>
-        </p:nvSpPr>
-        <p:spPr>
-          <a:xfrm>
-            <a:off x="10515600" y="3703320"/>
-            <a:ext cx="1143000" cy="457200"/>
+          <p:cNvPr id="54" name="TextBox 53"/>
+          <p:cNvSpPr txBox="1"/>
+          <p:nvPr/>
+        </p:nvSpPr>
+        <p:spPr>
+          <a:xfrm>
+            <a:off x="10515600" y="3913631"/>
+            <a:ext cx="1143000" cy="274320"/>
           </a:xfrm>
           <a:prstGeom prst="rect">
             <a:avLst/>
@@ -16844,33 +16801,72 @@
           </a:bodyPr>
           <a:lstStyle/>
           <a:p>
-            <a:pPr algn="l">
-              <a:lnSpc>
-                <a:spcPct val="115000"/>
-              </a:lnSpc>
-            </a:pPr>
-            <a:r>
-              <a:rPr sz="900" b="1">
-                <a:solidFill>
-                  <a:srgbClr val="4CAF50"/>
-                </a:solidFill>
-                <a:latin typeface="微软雅黑"/>
-              </a:rPr>
-              <a:t>延迟↓96%</a:t>
-            </a:r>
-          </a:p>
-        </p:txBody>
-      </p:sp>
-      <p:sp>
-        <p:nvSpPr>
-          <p:cNvPr id="52" name="TextBox 51"/>
-          <p:cNvSpPr txBox="1"/>
-          <p:nvPr/>
-        </p:nvSpPr>
-        <p:spPr>
-          <a:xfrm>
-            <a:off x="502920" y="4937760"/>
-            <a:ext cx="10972800" cy="0"/>
+            <a:pPr algn="ctr">
+              <a:lnSpc>
+                <a:spcPct val="115000"/>
+              </a:lnSpc>
+            </a:pPr>
+            <a:r>
+              <a:rPr sz="1000" b="1">
+                <a:solidFill>
+                  <a:srgbClr val="E8A33D"/>
+                </a:solidFill>
+                <a:latin typeface="微软雅黑"/>
+              </a:rPr>
+              <a:t>延迟 ↓96%</a:t>
+            </a:r>
+          </a:p>
+        </p:txBody>
+      </p:sp>
+      <p:sp>
+        <p:nvSpPr>
+          <p:cNvPr id="55" name="TextBox 54"/>
+          <p:cNvSpPr txBox="1"/>
+          <p:nvPr/>
+        </p:nvSpPr>
+        <p:spPr>
+          <a:xfrm>
+            <a:off x="10515600" y="4169663"/>
+            <a:ext cx="1143000" cy="182880"/>
+          </a:xfrm>
+          <a:prstGeom prst="rect">
+            <a:avLst/>
+          </a:prstGeom>
+          <a:noFill/>
+        </p:spPr>
+        <p:txBody>
+          <a:bodyPr wrap="square" anchor="ctr" lIns="0" rIns="0" tIns="0" bIns="0">
+            <a:spAutoFit/>
+          </a:bodyPr>
+          <a:lstStyle/>
+          <a:p>
+            <a:pPr algn="ctr">
+              <a:lnSpc>
+                <a:spcPct val="115000"/>
+              </a:lnSpc>
+            </a:pPr>
+            <a:r>
+              <a:rPr sz="800" b="0">
+                <a:solidFill>
+                  <a:srgbClr val="5A6A7A"/>
+                </a:solidFill>
+                <a:latin typeface="微软雅黑"/>
+              </a:rPr>
+              <a:t>120s→&lt;5s</a:t>
+            </a:r>
+          </a:p>
+        </p:txBody>
+      </p:sp>
+      <p:sp>
+        <p:nvSpPr>
+          <p:cNvPr id="56" name="TextBox 55"/>
+          <p:cNvSpPr txBox="1"/>
+          <p:nvPr/>
+        </p:nvSpPr>
+        <p:spPr>
+          <a:xfrm>
+            <a:off x="502920" y="5394960"/>
+            <a:ext cx="11155680" cy="0"/>
           </a:xfrm>
           <a:prstGeom prst="rect">
             <a:avLst/>
@@ -16889,733 +16885,20 @@
               </a:lnSpc>
             </a:pPr>
             <a:r>
-              <a:rPr sz="1600" b="1">
-                <a:solidFill>
-                  <a:srgbClr val="1B3A5C"/>
-                </a:solidFill>
-                <a:latin typeface="微软雅黑"/>
-              </a:rPr>
-              <a:t>▍全链路调优闭环：监控 → 定位 → 分析 → 调优 → 验证 → 沉淀</a:t>
-            </a:r>
-          </a:p>
-        </p:txBody>
-      </p:sp>
-      <p:sp>
-        <p:nvSpPr>
-          <p:cNvPr id="53" name="Rectangle 52"/>
-          <p:cNvSpPr/>
-          <p:nvPr/>
-        </p:nvSpPr>
-        <p:spPr>
-          <a:xfrm>
-            <a:off x="822960" y="5394960"/>
-            <a:ext cx="1554480" cy="548640"/>
-          </a:xfrm>
-          <a:prstGeom prst="rect">
-            <a:avLst/>
-          </a:prstGeom>
-          <a:solidFill>
-            <a:srgbClr val="4A90D9"/>
-          </a:solidFill>
-          <a:ln>
-            <a:noFill/>
-          </a:ln>
-          <a:effectLst/>
-        </p:spPr>
-        <p:style>
-          <a:lnRef idx="1">
-            <a:schemeClr val="accent1"/>
-          </a:lnRef>
-          <a:fillRef idx="3">
-            <a:schemeClr val="accent1"/>
-          </a:fillRef>
-          <a:effectRef idx="2">
-            <a:schemeClr val="accent1"/>
-          </a:effectRef>
-          <a:fontRef idx="minor">
-            <a:schemeClr val="lt1"/>
-          </a:fontRef>
-        </p:style>
-        <p:txBody>
-          <a:bodyPr rtlCol="0" anchor="ctr"/>
-          <a:lstStyle/>
-          <a:p>
-            <a:pPr algn="ctr"/>
-          </a:p>
-        </p:txBody>
-      </p:sp>
-      <p:sp>
-        <p:nvSpPr>
-          <p:cNvPr id="54" name="TextBox 53"/>
-          <p:cNvSpPr txBox="1"/>
-          <p:nvPr/>
-        </p:nvSpPr>
-        <p:spPr>
-          <a:xfrm>
-            <a:off x="822960" y="5394960"/>
-            <a:ext cx="1554480" cy="548640"/>
-          </a:xfrm>
-          <a:prstGeom prst="rect">
-            <a:avLst/>
-          </a:prstGeom>
-          <a:noFill/>
-        </p:spPr>
-        <p:txBody>
-          <a:bodyPr wrap="square" anchor="ctr" lIns="0" rIns="0" tIns="0" bIns="0">
-            <a:spAutoFit/>
-          </a:bodyPr>
-          <a:lstStyle/>
-          <a:p>
-            <a:pPr algn="ctr">
-              <a:lnSpc>
-                <a:spcPct val="115000"/>
-              </a:lnSpc>
-            </a:pPr>
-            <a:r>
-              <a:rPr sz="1200" b="1">
-                <a:solidFill>
-                  <a:srgbClr val="FFFFFF"/>
-                </a:solidFill>
-                <a:latin typeface="微软雅黑"/>
-              </a:rPr>
-              <a:t>监控告警</a:t>
-            </a:r>
-          </a:p>
-        </p:txBody>
-      </p:sp>
-      <p:sp>
-        <p:nvSpPr>
-          <p:cNvPr id="55" name="Right Arrow 54"/>
-          <p:cNvSpPr/>
-          <p:nvPr/>
-        </p:nvSpPr>
-        <p:spPr>
-          <a:xfrm>
-            <a:off x="2395728" y="5532120"/>
-            <a:ext cx="164592" cy="274320"/>
-          </a:xfrm>
-          <a:prstGeom prst="rightArrow">
-            <a:avLst/>
-          </a:prstGeom>
-          <a:solidFill>
-            <a:srgbClr val="5A6A7A"/>
-          </a:solidFill>
-          <a:ln>
-            <a:noFill/>
-          </a:ln>
-        </p:spPr>
-        <p:style>
-          <a:lnRef idx="1">
-            <a:schemeClr val="accent1"/>
-          </a:lnRef>
-          <a:fillRef idx="3">
-            <a:schemeClr val="accent1"/>
-          </a:fillRef>
-          <a:effectRef idx="2">
-            <a:schemeClr val="accent1"/>
-          </a:effectRef>
-          <a:fontRef idx="minor">
-            <a:schemeClr val="lt1"/>
-          </a:fontRef>
-        </p:style>
-        <p:txBody>
-          <a:bodyPr rtlCol="0" anchor="ctr"/>
-          <a:lstStyle/>
-          <a:p>
-            <a:pPr algn="ctr"/>
-          </a:p>
-        </p:txBody>
-      </p:sp>
-      <p:sp>
-        <p:nvSpPr>
-          <p:cNvPr id="56" name="Rectangle 55"/>
-          <p:cNvSpPr/>
-          <p:nvPr/>
-        </p:nvSpPr>
-        <p:spPr>
-          <a:xfrm>
-            <a:off x="2743200" y="5394960"/>
-            <a:ext cx="1554480" cy="548640"/>
-          </a:xfrm>
-          <a:prstGeom prst="rect">
-            <a:avLst/>
-          </a:prstGeom>
-          <a:solidFill>
-            <a:srgbClr val="E8A33D"/>
-          </a:solidFill>
-          <a:ln>
-            <a:noFill/>
-          </a:ln>
-          <a:effectLst/>
-        </p:spPr>
-        <p:style>
-          <a:lnRef idx="1">
-            <a:schemeClr val="accent1"/>
-          </a:lnRef>
-          <a:fillRef idx="3">
-            <a:schemeClr val="accent1"/>
-          </a:fillRef>
-          <a:effectRef idx="2">
-            <a:schemeClr val="accent1"/>
-          </a:effectRef>
-          <a:fontRef idx="minor">
-            <a:schemeClr val="lt1"/>
-          </a:fontRef>
-        </p:style>
-        <p:txBody>
-          <a:bodyPr rtlCol="0" anchor="ctr"/>
-          <a:lstStyle/>
-          <a:p>
-            <a:pPr algn="ctr"/>
+              <a:rPr sz="1400" b="1">
+                <a:solidFill>
+                  <a:srgbClr val="E8A33D"/>
+                </a:solidFill>
+                <a:latin typeface="微软雅黑"/>
+              </a:rPr>
+              <a:t>▍调优效果基于真实 MySQL 8.0 环境实测，数据库 shop_demo 含 100 万订单</a:t>
+            </a:r>
           </a:p>
         </p:txBody>
       </p:sp>
       <p:sp>
         <p:nvSpPr>
           <p:cNvPr id="57" name="TextBox 56"/>
-          <p:cNvSpPr txBox="1"/>
-          <p:nvPr/>
-        </p:nvSpPr>
-        <p:spPr>
-          <a:xfrm>
-            <a:off x="2743200" y="5394960"/>
-            <a:ext cx="1554480" cy="548640"/>
-          </a:xfrm>
-          <a:prstGeom prst="rect">
-            <a:avLst/>
-          </a:prstGeom>
-          <a:noFill/>
-        </p:spPr>
-        <p:txBody>
-          <a:bodyPr wrap="square" anchor="ctr" lIns="0" rIns="0" tIns="0" bIns="0">
-            <a:spAutoFit/>
-          </a:bodyPr>
-          <a:lstStyle/>
-          <a:p>
-            <a:pPr algn="ctr">
-              <a:lnSpc>
-                <a:spcPct val="115000"/>
-              </a:lnSpc>
-            </a:pPr>
-            <a:r>
-              <a:rPr sz="1200" b="1">
-                <a:solidFill>
-                  <a:srgbClr val="FFFFFF"/>
-                </a:solidFill>
-                <a:latin typeface="微软雅黑"/>
-              </a:rPr>
-              <a:t>现象定位</a:t>
-            </a:r>
-          </a:p>
-        </p:txBody>
-      </p:sp>
-      <p:sp>
-        <p:nvSpPr>
-          <p:cNvPr id="58" name="Right Arrow 57"/>
-          <p:cNvSpPr/>
-          <p:nvPr/>
-        </p:nvSpPr>
-        <p:spPr>
-          <a:xfrm>
-            <a:off x="4315968" y="5532120"/>
-            <a:ext cx="164592" cy="274320"/>
-          </a:xfrm>
-          <a:prstGeom prst="rightArrow">
-            <a:avLst/>
-          </a:prstGeom>
-          <a:solidFill>
-            <a:srgbClr val="5A6A7A"/>
-          </a:solidFill>
-          <a:ln>
-            <a:noFill/>
-          </a:ln>
-        </p:spPr>
-        <p:style>
-          <a:lnRef idx="1">
-            <a:schemeClr val="accent1"/>
-          </a:lnRef>
-          <a:fillRef idx="3">
-            <a:schemeClr val="accent1"/>
-          </a:fillRef>
-          <a:effectRef idx="2">
-            <a:schemeClr val="accent1"/>
-          </a:effectRef>
-          <a:fontRef idx="minor">
-            <a:schemeClr val="lt1"/>
-          </a:fontRef>
-        </p:style>
-        <p:txBody>
-          <a:bodyPr rtlCol="0" anchor="ctr"/>
-          <a:lstStyle/>
-          <a:p>
-            <a:pPr algn="ctr"/>
-          </a:p>
-        </p:txBody>
-      </p:sp>
-      <p:sp>
-        <p:nvSpPr>
-          <p:cNvPr id="59" name="Rectangle 58"/>
-          <p:cNvSpPr/>
-          <p:nvPr/>
-        </p:nvSpPr>
-        <p:spPr>
-          <a:xfrm>
-            <a:off x="4663440" y="5394960"/>
-            <a:ext cx="1554480" cy="548640"/>
-          </a:xfrm>
-          <a:prstGeom prst="rect">
-            <a:avLst/>
-          </a:prstGeom>
-          <a:solidFill>
-            <a:srgbClr val="E55C5C"/>
-          </a:solidFill>
-          <a:ln>
-            <a:noFill/>
-          </a:ln>
-          <a:effectLst/>
-        </p:spPr>
-        <p:style>
-          <a:lnRef idx="1">
-            <a:schemeClr val="accent1"/>
-          </a:lnRef>
-          <a:fillRef idx="3">
-            <a:schemeClr val="accent1"/>
-          </a:fillRef>
-          <a:effectRef idx="2">
-            <a:schemeClr val="accent1"/>
-          </a:effectRef>
-          <a:fontRef idx="minor">
-            <a:schemeClr val="lt1"/>
-          </a:fontRef>
-        </p:style>
-        <p:txBody>
-          <a:bodyPr rtlCol="0" anchor="ctr"/>
-          <a:lstStyle/>
-          <a:p>
-            <a:pPr algn="ctr"/>
-          </a:p>
-        </p:txBody>
-      </p:sp>
-      <p:sp>
-        <p:nvSpPr>
-          <p:cNvPr id="60" name="TextBox 59"/>
-          <p:cNvSpPr txBox="1"/>
-          <p:nvPr/>
-        </p:nvSpPr>
-        <p:spPr>
-          <a:xfrm>
-            <a:off x="4663440" y="5394960"/>
-            <a:ext cx="1554480" cy="548640"/>
-          </a:xfrm>
-          <a:prstGeom prst="rect">
-            <a:avLst/>
-          </a:prstGeom>
-          <a:noFill/>
-        </p:spPr>
-        <p:txBody>
-          <a:bodyPr wrap="square" anchor="ctr" lIns="0" rIns="0" tIns="0" bIns="0">
-            <a:spAutoFit/>
-          </a:bodyPr>
-          <a:lstStyle/>
-          <a:p>
-            <a:pPr algn="ctr">
-              <a:lnSpc>
-                <a:spcPct val="115000"/>
-              </a:lnSpc>
-            </a:pPr>
-            <a:r>
-              <a:rPr sz="1200" b="1">
-                <a:solidFill>
-                  <a:srgbClr val="FFFFFF"/>
-                </a:solidFill>
-                <a:latin typeface="微软雅黑"/>
-              </a:rPr>
-              <a:t>根因分析</a:t>
-            </a:r>
-          </a:p>
-        </p:txBody>
-      </p:sp>
-      <p:sp>
-        <p:nvSpPr>
-          <p:cNvPr id="61" name="Right Arrow 60"/>
-          <p:cNvSpPr/>
-          <p:nvPr/>
-        </p:nvSpPr>
-        <p:spPr>
-          <a:xfrm>
-            <a:off x="6236208" y="5532120"/>
-            <a:ext cx="164592" cy="274320"/>
-          </a:xfrm>
-          <a:prstGeom prst="rightArrow">
-            <a:avLst/>
-          </a:prstGeom>
-          <a:solidFill>
-            <a:srgbClr val="5A6A7A"/>
-          </a:solidFill>
-          <a:ln>
-            <a:noFill/>
-          </a:ln>
-        </p:spPr>
-        <p:style>
-          <a:lnRef idx="1">
-            <a:schemeClr val="accent1"/>
-          </a:lnRef>
-          <a:fillRef idx="3">
-            <a:schemeClr val="accent1"/>
-          </a:fillRef>
-          <a:effectRef idx="2">
-            <a:schemeClr val="accent1"/>
-          </a:effectRef>
-          <a:fontRef idx="minor">
-            <a:schemeClr val="lt1"/>
-          </a:fontRef>
-        </p:style>
-        <p:txBody>
-          <a:bodyPr rtlCol="0" anchor="ctr"/>
-          <a:lstStyle/>
-          <a:p>
-            <a:pPr algn="ctr"/>
-          </a:p>
-        </p:txBody>
-      </p:sp>
-      <p:sp>
-        <p:nvSpPr>
-          <p:cNvPr id="62" name="Rectangle 61"/>
-          <p:cNvSpPr/>
-          <p:nvPr/>
-        </p:nvSpPr>
-        <p:spPr>
-          <a:xfrm>
-            <a:off x="6583680" y="5394960"/>
-            <a:ext cx="1554480" cy="548640"/>
-          </a:xfrm>
-          <a:prstGeom prst="rect">
-            <a:avLst/>
-          </a:prstGeom>
-          <a:solidFill>
-            <a:srgbClr val="2E8B8B"/>
-          </a:solidFill>
-          <a:ln>
-            <a:noFill/>
-          </a:ln>
-          <a:effectLst/>
-        </p:spPr>
-        <p:style>
-          <a:lnRef idx="1">
-            <a:schemeClr val="accent1"/>
-          </a:lnRef>
-          <a:fillRef idx="3">
-            <a:schemeClr val="accent1"/>
-          </a:fillRef>
-          <a:effectRef idx="2">
-            <a:schemeClr val="accent1"/>
-          </a:effectRef>
-          <a:fontRef idx="minor">
-            <a:schemeClr val="lt1"/>
-          </a:fontRef>
-        </p:style>
-        <p:txBody>
-          <a:bodyPr rtlCol="0" anchor="ctr"/>
-          <a:lstStyle/>
-          <a:p>
-            <a:pPr algn="ctr"/>
-          </a:p>
-        </p:txBody>
-      </p:sp>
-      <p:sp>
-        <p:nvSpPr>
-          <p:cNvPr id="63" name="TextBox 62"/>
-          <p:cNvSpPr txBox="1"/>
-          <p:nvPr/>
-        </p:nvSpPr>
-        <p:spPr>
-          <a:xfrm>
-            <a:off x="6583680" y="5394960"/>
-            <a:ext cx="1554480" cy="548640"/>
-          </a:xfrm>
-          <a:prstGeom prst="rect">
-            <a:avLst/>
-          </a:prstGeom>
-          <a:noFill/>
-        </p:spPr>
-        <p:txBody>
-          <a:bodyPr wrap="square" anchor="ctr" lIns="0" rIns="0" tIns="0" bIns="0">
-            <a:spAutoFit/>
-          </a:bodyPr>
-          <a:lstStyle/>
-          <a:p>
-            <a:pPr algn="ctr">
-              <a:lnSpc>
-                <a:spcPct val="115000"/>
-              </a:lnSpc>
-            </a:pPr>
-            <a:r>
-              <a:rPr sz="1200" b="1">
-                <a:solidFill>
-                  <a:srgbClr val="FFFFFF"/>
-                </a:solidFill>
-                <a:latin typeface="微软雅黑"/>
-              </a:rPr>
-              <a:t>方案调优</a:t>
-            </a:r>
-          </a:p>
-        </p:txBody>
-      </p:sp>
-      <p:sp>
-        <p:nvSpPr>
-          <p:cNvPr id="64" name="Right Arrow 63"/>
-          <p:cNvSpPr/>
-          <p:nvPr/>
-        </p:nvSpPr>
-        <p:spPr>
-          <a:xfrm>
-            <a:off x="8156448" y="5532120"/>
-            <a:ext cx="164592" cy="274320"/>
-          </a:xfrm>
-          <a:prstGeom prst="rightArrow">
-            <a:avLst/>
-          </a:prstGeom>
-          <a:solidFill>
-            <a:srgbClr val="5A6A7A"/>
-          </a:solidFill>
-          <a:ln>
-            <a:noFill/>
-          </a:ln>
-        </p:spPr>
-        <p:style>
-          <a:lnRef idx="1">
-            <a:schemeClr val="accent1"/>
-          </a:lnRef>
-          <a:fillRef idx="3">
-            <a:schemeClr val="accent1"/>
-          </a:fillRef>
-          <a:effectRef idx="2">
-            <a:schemeClr val="accent1"/>
-          </a:effectRef>
-          <a:fontRef idx="minor">
-            <a:schemeClr val="lt1"/>
-          </a:fontRef>
-        </p:style>
-        <p:txBody>
-          <a:bodyPr rtlCol="0" anchor="ctr"/>
-          <a:lstStyle/>
-          <a:p>
-            <a:pPr algn="ctr"/>
-          </a:p>
-        </p:txBody>
-      </p:sp>
-      <p:sp>
-        <p:nvSpPr>
-          <p:cNvPr id="65" name="Rectangle 64"/>
-          <p:cNvSpPr/>
-          <p:nvPr/>
-        </p:nvSpPr>
-        <p:spPr>
-          <a:xfrm>
-            <a:off x="8503920" y="5394960"/>
-            <a:ext cx="1554480" cy="548640"/>
-          </a:xfrm>
-          <a:prstGeom prst="rect">
-            <a:avLst/>
-          </a:prstGeom>
-          <a:solidFill>
-            <a:srgbClr val="4CAF50"/>
-          </a:solidFill>
-          <a:ln>
-            <a:noFill/>
-          </a:ln>
-          <a:effectLst/>
-        </p:spPr>
-        <p:style>
-          <a:lnRef idx="1">
-            <a:schemeClr val="accent1"/>
-          </a:lnRef>
-          <a:fillRef idx="3">
-            <a:schemeClr val="accent1"/>
-          </a:fillRef>
-          <a:effectRef idx="2">
-            <a:schemeClr val="accent1"/>
-          </a:effectRef>
-          <a:fontRef idx="minor">
-            <a:schemeClr val="lt1"/>
-          </a:fontRef>
-        </p:style>
-        <p:txBody>
-          <a:bodyPr rtlCol="0" anchor="ctr"/>
-          <a:lstStyle/>
-          <a:p>
-            <a:pPr algn="ctr"/>
-          </a:p>
-        </p:txBody>
-      </p:sp>
-      <p:sp>
-        <p:nvSpPr>
-          <p:cNvPr id="66" name="TextBox 65"/>
-          <p:cNvSpPr txBox="1"/>
-          <p:nvPr/>
-        </p:nvSpPr>
-        <p:spPr>
-          <a:xfrm>
-            <a:off x="8503920" y="5394960"/>
-            <a:ext cx="1554480" cy="548640"/>
-          </a:xfrm>
-          <a:prstGeom prst="rect">
-            <a:avLst/>
-          </a:prstGeom>
-          <a:noFill/>
-        </p:spPr>
-        <p:txBody>
-          <a:bodyPr wrap="square" anchor="ctr" lIns="0" rIns="0" tIns="0" bIns="0">
-            <a:spAutoFit/>
-          </a:bodyPr>
-          <a:lstStyle/>
-          <a:p>
-            <a:pPr algn="ctr">
-              <a:lnSpc>
-                <a:spcPct val="115000"/>
-              </a:lnSpc>
-            </a:pPr>
-            <a:r>
-              <a:rPr sz="1200" b="1">
-                <a:solidFill>
-                  <a:srgbClr val="FFFFFF"/>
-                </a:solidFill>
-                <a:latin typeface="微软雅黑"/>
-              </a:rPr>
-              <a:t>效果验证</a:t>
-            </a:r>
-          </a:p>
-        </p:txBody>
-      </p:sp>
-      <p:sp>
-        <p:nvSpPr>
-          <p:cNvPr id="67" name="Right Arrow 66"/>
-          <p:cNvSpPr/>
-          <p:nvPr/>
-        </p:nvSpPr>
-        <p:spPr>
-          <a:xfrm>
-            <a:off x="10076688" y="5532120"/>
-            <a:ext cx="164592" cy="274320"/>
-          </a:xfrm>
-          <a:prstGeom prst="rightArrow">
-            <a:avLst/>
-          </a:prstGeom>
-          <a:solidFill>
-            <a:srgbClr val="5A6A7A"/>
-          </a:solidFill>
-          <a:ln>
-            <a:noFill/>
-          </a:ln>
-        </p:spPr>
-        <p:style>
-          <a:lnRef idx="1">
-            <a:schemeClr val="accent1"/>
-          </a:lnRef>
-          <a:fillRef idx="3">
-            <a:schemeClr val="accent1"/>
-          </a:fillRef>
-          <a:effectRef idx="2">
-            <a:schemeClr val="accent1"/>
-          </a:effectRef>
-          <a:fontRef idx="minor">
-            <a:schemeClr val="lt1"/>
-          </a:fontRef>
-        </p:style>
-        <p:txBody>
-          <a:bodyPr rtlCol="0" anchor="ctr"/>
-          <a:lstStyle/>
-          <a:p>
-            <a:pPr algn="ctr"/>
-          </a:p>
-        </p:txBody>
-      </p:sp>
-      <p:sp>
-        <p:nvSpPr>
-          <p:cNvPr id="68" name="Rectangle 67"/>
-          <p:cNvSpPr/>
-          <p:nvPr/>
-        </p:nvSpPr>
-        <p:spPr>
-          <a:xfrm>
-            <a:off x="10424160" y="5394960"/>
-            <a:ext cx="1554480" cy="548640"/>
-          </a:xfrm>
-          <a:prstGeom prst="rect">
-            <a:avLst/>
-          </a:prstGeom>
-          <a:solidFill>
-            <a:srgbClr val="1B3A5C"/>
-          </a:solidFill>
-          <a:ln>
-            <a:noFill/>
-          </a:ln>
-          <a:effectLst/>
-        </p:spPr>
-        <p:style>
-          <a:lnRef idx="1">
-            <a:schemeClr val="accent1"/>
-          </a:lnRef>
-          <a:fillRef idx="3">
-            <a:schemeClr val="accent1"/>
-          </a:fillRef>
-          <a:effectRef idx="2">
-            <a:schemeClr val="accent1"/>
-          </a:effectRef>
-          <a:fontRef idx="minor">
-            <a:schemeClr val="lt1"/>
-          </a:fontRef>
-        </p:style>
-        <p:txBody>
-          <a:bodyPr rtlCol="0" anchor="ctr"/>
-          <a:lstStyle/>
-          <a:p>
-            <a:pPr algn="ctr"/>
-          </a:p>
-        </p:txBody>
-      </p:sp>
-      <p:sp>
-        <p:nvSpPr>
-          <p:cNvPr id="69" name="TextBox 68"/>
-          <p:cNvSpPr txBox="1"/>
-          <p:nvPr/>
-        </p:nvSpPr>
-        <p:spPr>
-          <a:xfrm>
-            <a:off x="10424160" y="5394960"/>
-            <a:ext cx="1554480" cy="548640"/>
-          </a:xfrm>
-          <a:prstGeom prst="rect">
-            <a:avLst/>
-          </a:prstGeom>
-          <a:noFill/>
-        </p:spPr>
-        <p:txBody>
-          <a:bodyPr wrap="square" anchor="ctr" lIns="0" rIns="0" tIns="0" bIns="0">
-            <a:spAutoFit/>
-          </a:bodyPr>
-          <a:lstStyle/>
-          <a:p>
-            <a:pPr algn="ctr">
-              <a:lnSpc>
-                <a:spcPct val="115000"/>
-              </a:lnSpc>
-            </a:pPr>
-            <a:r>
-              <a:rPr sz="1200" b="1">
-                <a:solidFill>
-                  <a:srgbClr val="FFFFFF"/>
-                </a:solidFill>
-                <a:latin typeface="微软雅黑"/>
-              </a:rPr>
-              <a:t>经验沉淀</a:t>
-            </a:r>
-          </a:p>
-        </p:txBody>
-      </p:sp>
-      <p:sp>
-        <p:nvSpPr>
-          <p:cNvPr id="70" name="TextBox 69"/>
           <p:cNvSpPr txBox="1"/>
           <p:nvPr/>
         </p:nvSpPr>
@@ -17880,7 +17163,7 @@
                 </a:solidFill>
                 <a:latin typeface="微软雅黑"/>
               </a:rPr>
-              <a:t>经验总结与展望</a:t>
+              <a:t>08  调优闭环与经验沉淀</a:t>
             </a:r>
           </a:p>
         </p:txBody>
@@ -17933,6 +17216,758 @@
         <p:spPr>
           <a:xfrm>
             <a:off x="502920" y="1188720"/>
+            <a:ext cx="10972800" cy="0"/>
+          </a:xfrm>
+          <a:prstGeom prst="rect">
+            <a:avLst/>
+          </a:prstGeom>
+          <a:noFill/>
+        </p:spPr>
+        <p:txBody>
+          <a:bodyPr wrap="square" anchor="t" lIns="0" rIns="0" tIns="0" bIns="0">
+            <a:spAutoFit/>
+          </a:bodyPr>
+          <a:lstStyle/>
+          <a:p>
+            <a:pPr algn="l">
+              <a:lnSpc>
+                <a:spcPct val="115000"/>
+              </a:lnSpc>
+            </a:pPr>
+            <a:r>
+              <a:rPr sz="1600" b="1">
+                <a:solidFill>
+                  <a:srgbClr val="1B3A5C"/>
+                </a:solidFill>
+                <a:latin typeface="微软雅黑"/>
+              </a:rPr>
+              <a:t>▍全链路调优闭环：监控 → 定位 → 分析 → 调优 → 验证 → 沉淀</a:t>
+            </a:r>
+          </a:p>
+        </p:txBody>
+      </p:sp>
+      <p:sp>
+        <p:nvSpPr>
+          <p:cNvPr id="9" name="Rectangle 8"/>
+          <p:cNvSpPr/>
+          <p:nvPr/>
+        </p:nvSpPr>
+        <p:spPr>
+          <a:xfrm>
+            <a:off x="822960" y="1691640"/>
+            <a:ext cx="1554480" cy="594360"/>
+          </a:xfrm>
+          <a:prstGeom prst="rect">
+            <a:avLst/>
+          </a:prstGeom>
+          <a:solidFill>
+            <a:srgbClr val="4A90D9"/>
+          </a:solidFill>
+          <a:ln>
+            <a:noFill/>
+          </a:ln>
+          <a:effectLst/>
+        </p:spPr>
+        <p:style>
+          <a:lnRef idx="1">
+            <a:schemeClr val="accent1"/>
+          </a:lnRef>
+          <a:fillRef idx="3">
+            <a:schemeClr val="accent1"/>
+          </a:fillRef>
+          <a:effectRef idx="2">
+            <a:schemeClr val="accent1"/>
+          </a:effectRef>
+          <a:fontRef idx="minor">
+            <a:schemeClr val="lt1"/>
+          </a:fontRef>
+        </p:style>
+        <p:txBody>
+          <a:bodyPr rtlCol="0" anchor="ctr"/>
+          <a:lstStyle/>
+          <a:p>
+            <a:pPr algn="ctr"/>
+          </a:p>
+        </p:txBody>
+      </p:sp>
+      <p:sp>
+        <p:nvSpPr>
+          <p:cNvPr id="10" name="TextBox 9"/>
+          <p:cNvSpPr txBox="1"/>
+          <p:nvPr/>
+        </p:nvSpPr>
+        <p:spPr>
+          <a:xfrm>
+            <a:off x="822960" y="1691640"/>
+            <a:ext cx="1554480" cy="594360"/>
+          </a:xfrm>
+          <a:prstGeom prst="rect">
+            <a:avLst/>
+          </a:prstGeom>
+          <a:noFill/>
+        </p:spPr>
+        <p:txBody>
+          <a:bodyPr wrap="square" anchor="ctr" lIns="0" rIns="0" tIns="0" bIns="0">
+            <a:spAutoFit/>
+          </a:bodyPr>
+          <a:lstStyle/>
+          <a:p>
+            <a:pPr algn="ctr">
+              <a:lnSpc>
+                <a:spcPct val="115000"/>
+              </a:lnSpc>
+            </a:pPr>
+            <a:r>
+              <a:rPr sz="1200" b="1">
+                <a:solidFill>
+                  <a:srgbClr val="FFFFFF"/>
+                </a:solidFill>
+                <a:latin typeface="微软雅黑"/>
+              </a:rPr>
+              <a:t>监控告警</a:t>
+            </a:r>
+          </a:p>
+        </p:txBody>
+      </p:sp>
+      <p:sp>
+        <p:nvSpPr>
+          <p:cNvPr id="11" name="Right Arrow 10"/>
+          <p:cNvSpPr/>
+          <p:nvPr/>
+        </p:nvSpPr>
+        <p:spPr>
+          <a:xfrm>
+            <a:off x="2395728" y="1847088"/>
+            <a:ext cx="164592" cy="274320"/>
+          </a:xfrm>
+          <a:prstGeom prst="rightArrow">
+            <a:avLst/>
+          </a:prstGeom>
+          <a:solidFill>
+            <a:srgbClr val="5A6A7A"/>
+          </a:solidFill>
+          <a:ln>
+            <a:noFill/>
+          </a:ln>
+        </p:spPr>
+        <p:style>
+          <a:lnRef idx="1">
+            <a:schemeClr val="accent1"/>
+          </a:lnRef>
+          <a:fillRef idx="3">
+            <a:schemeClr val="accent1"/>
+          </a:fillRef>
+          <a:effectRef idx="2">
+            <a:schemeClr val="accent1"/>
+          </a:effectRef>
+          <a:fontRef idx="minor">
+            <a:schemeClr val="lt1"/>
+          </a:fontRef>
+        </p:style>
+        <p:txBody>
+          <a:bodyPr rtlCol="0" anchor="ctr"/>
+          <a:lstStyle/>
+          <a:p>
+            <a:pPr algn="ctr"/>
+          </a:p>
+        </p:txBody>
+      </p:sp>
+      <p:sp>
+        <p:nvSpPr>
+          <p:cNvPr id="12" name="Rectangle 11"/>
+          <p:cNvSpPr/>
+          <p:nvPr/>
+        </p:nvSpPr>
+        <p:spPr>
+          <a:xfrm>
+            <a:off x="2743200" y="1691640"/>
+            <a:ext cx="1554480" cy="594360"/>
+          </a:xfrm>
+          <a:prstGeom prst="rect">
+            <a:avLst/>
+          </a:prstGeom>
+          <a:solidFill>
+            <a:srgbClr val="E8A33D"/>
+          </a:solidFill>
+          <a:ln>
+            <a:noFill/>
+          </a:ln>
+          <a:effectLst/>
+        </p:spPr>
+        <p:style>
+          <a:lnRef idx="1">
+            <a:schemeClr val="accent1"/>
+          </a:lnRef>
+          <a:fillRef idx="3">
+            <a:schemeClr val="accent1"/>
+          </a:fillRef>
+          <a:effectRef idx="2">
+            <a:schemeClr val="accent1"/>
+          </a:effectRef>
+          <a:fontRef idx="minor">
+            <a:schemeClr val="lt1"/>
+          </a:fontRef>
+        </p:style>
+        <p:txBody>
+          <a:bodyPr rtlCol="0" anchor="ctr"/>
+          <a:lstStyle/>
+          <a:p>
+            <a:pPr algn="ctr"/>
+          </a:p>
+        </p:txBody>
+      </p:sp>
+      <p:sp>
+        <p:nvSpPr>
+          <p:cNvPr id="13" name="TextBox 12"/>
+          <p:cNvSpPr txBox="1"/>
+          <p:nvPr/>
+        </p:nvSpPr>
+        <p:spPr>
+          <a:xfrm>
+            <a:off x="2743200" y="1691640"/>
+            <a:ext cx="1554480" cy="594360"/>
+          </a:xfrm>
+          <a:prstGeom prst="rect">
+            <a:avLst/>
+          </a:prstGeom>
+          <a:noFill/>
+        </p:spPr>
+        <p:txBody>
+          <a:bodyPr wrap="square" anchor="ctr" lIns="0" rIns="0" tIns="0" bIns="0">
+            <a:spAutoFit/>
+          </a:bodyPr>
+          <a:lstStyle/>
+          <a:p>
+            <a:pPr algn="ctr">
+              <a:lnSpc>
+                <a:spcPct val="115000"/>
+              </a:lnSpc>
+            </a:pPr>
+            <a:r>
+              <a:rPr sz="1200" b="1">
+                <a:solidFill>
+                  <a:srgbClr val="FFFFFF"/>
+                </a:solidFill>
+                <a:latin typeface="微软雅黑"/>
+              </a:rPr>
+              <a:t>现象定位</a:t>
+            </a:r>
+          </a:p>
+        </p:txBody>
+      </p:sp>
+      <p:sp>
+        <p:nvSpPr>
+          <p:cNvPr id="14" name="Right Arrow 13"/>
+          <p:cNvSpPr/>
+          <p:nvPr/>
+        </p:nvSpPr>
+        <p:spPr>
+          <a:xfrm>
+            <a:off x="4315968" y="1847088"/>
+            <a:ext cx="164592" cy="274320"/>
+          </a:xfrm>
+          <a:prstGeom prst="rightArrow">
+            <a:avLst/>
+          </a:prstGeom>
+          <a:solidFill>
+            <a:srgbClr val="5A6A7A"/>
+          </a:solidFill>
+          <a:ln>
+            <a:noFill/>
+          </a:ln>
+        </p:spPr>
+        <p:style>
+          <a:lnRef idx="1">
+            <a:schemeClr val="accent1"/>
+          </a:lnRef>
+          <a:fillRef idx="3">
+            <a:schemeClr val="accent1"/>
+          </a:fillRef>
+          <a:effectRef idx="2">
+            <a:schemeClr val="accent1"/>
+          </a:effectRef>
+          <a:fontRef idx="minor">
+            <a:schemeClr val="lt1"/>
+          </a:fontRef>
+        </p:style>
+        <p:txBody>
+          <a:bodyPr rtlCol="0" anchor="ctr"/>
+          <a:lstStyle/>
+          <a:p>
+            <a:pPr algn="ctr"/>
+          </a:p>
+        </p:txBody>
+      </p:sp>
+      <p:sp>
+        <p:nvSpPr>
+          <p:cNvPr id="15" name="Rectangle 14"/>
+          <p:cNvSpPr/>
+          <p:nvPr/>
+        </p:nvSpPr>
+        <p:spPr>
+          <a:xfrm>
+            <a:off x="4663440" y="1691640"/>
+            <a:ext cx="1554480" cy="594360"/>
+          </a:xfrm>
+          <a:prstGeom prst="rect">
+            <a:avLst/>
+          </a:prstGeom>
+          <a:solidFill>
+            <a:srgbClr val="E55C5C"/>
+          </a:solidFill>
+          <a:ln>
+            <a:noFill/>
+          </a:ln>
+          <a:effectLst/>
+        </p:spPr>
+        <p:style>
+          <a:lnRef idx="1">
+            <a:schemeClr val="accent1"/>
+          </a:lnRef>
+          <a:fillRef idx="3">
+            <a:schemeClr val="accent1"/>
+          </a:fillRef>
+          <a:effectRef idx="2">
+            <a:schemeClr val="accent1"/>
+          </a:effectRef>
+          <a:fontRef idx="minor">
+            <a:schemeClr val="lt1"/>
+          </a:fontRef>
+        </p:style>
+        <p:txBody>
+          <a:bodyPr rtlCol="0" anchor="ctr"/>
+          <a:lstStyle/>
+          <a:p>
+            <a:pPr algn="ctr"/>
+          </a:p>
+        </p:txBody>
+      </p:sp>
+      <p:sp>
+        <p:nvSpPr>
+          <p:cNvPr id="16" name="TextBox 15"/>
+          <p:cNvSpPr txBox="1"/>
+          <p:nvPr/>
+        </p:nvSpPr>
+        <p:spPr>
+          <a:xfrm>
+            <a:off x="4663440" y="1691640"/>
+            <a:ext cx="1554480" cy="594360"/>
+          </a:xfrm>
+          <a:prstGeom prst="rect">
+            <a:avLst/>
+          </a:prstGeom>
+          <a:noFill/>
+        </p:spPr>
+        <p:txBody>
+          <a:bodyPr wrap="square" anchor="ctr" lIns="0" rIns="0" tIns="0" bIns="0">
+            <a:spAutoFit/>
+          </a:bodyPr>
+          <a:lstStyle/>
+          <a:p>
+            <a:pPr algn="ctr">
+              <a:lnSpc>
+                <a:spcPct val="115000"/>
+              </a:lnSpc>
+            </a:pPr>
+            <a:r>
+              <a:rPr sz="1200" b="1">
+                <a:solidFill>
+                  <a:srgbClr val="FFFFFF"/>
+                </a:solidFill>
+                <a:latin typeface="微软雅黑"/>
+              </a:rPr>
+              <a:t>根因分析</a:t>
+            </a:r>
+          </a:p>
+        </p:txBody>
+      </p:sp>
+      <p:sp>
+        <p:nvSpPr>
+          <p:cNvPr id="17" name="Right Arrow 16"/>
+          <p:cNvSpPr/>
+          <p:nvPr/>
+        </p:nvSpPr>
+        <p:spPr>
+          <a:xfrm>
+            <a:off x="6236208" y="1847088"/>
+            <a:ext cx="164592" cy="274320"/>
+          </a:xfrm>
+          <a:prstGeom prst="rightArrow">
+            <a:avLst/>
+          </a:prstGeom>
+          <a:solidFill>
+            <a:srgbClr val="5A6A7A"/>
+          </a:solidFill>
+          <a:ln>
+            <a:noFill/>
+          </a:ln>
+        </p:spPr>
+        <p:style>
+          <a:lnRef idx="1">
+            <a:schemeClr val="accent1"/>
+          </a:lnRef>
+          <a:fillRef idx="3">
+            <a:schemeClr val="accent1"/>
+          </a:fillRef>
+          <a:effectRef idx="2">
+            <a:schemeClr val="accent1"/>
+          </a:effectRef>
+          <a:fontRef idx="minor">
+            <a:schemeClr val="lt1"/>
+          </a:fontRef>
+        </p:style>
+        <p:txBody>
+          <a:bodyPr rtlCol="0" anchor="ctr"/>
+          <a:lstStyle/>
+          <a:p>
+            <a:pPr algn="ctr"/>
+          </a:p>
+        </p:txBody>
+      </p:sp>
+      <p:sp>
+        <p:nvSpPr>
+          <p:cNvPr id="18" name="Rectangle 17"/>
+          <p:cNvSpPr/>
+          <p:nvPr/>
+        </p:nvSpPr>
+        <p:spPr>
+          <a:xfrm>
+            <a:off x="6583680" y="1691640"/>
+            <a:ext cx="1554480" cy="594360"/>
+          </a:xfrm>
+          <a:prstGeom prst="rect">
+            <a:avLst/>
+          </a:prstGeom>
+          <a:solidFill>
+            <a:srgbClr val="2E8B8B"/>
+          </a:solidFill>
+          <a:ln>
+            <a:noFill/>
+          </a:ln>
+          <a:effectLst/>
+        </p:spPr>
+        <p:style>
+          <a:lnRef idx="1">
+            <a:schemeClr val="accent1"/>
+          </a:lnRef>
+          <a:fillRef idx="3">
+            <a:schemeClr val="accent1"/>
+          </a:fillRef>
+          <a:effectRef idx="2">
+            <a:schemeClr val="accent1"/>
+          </a:effectRef>
+          <a:fontRef idx="minor">
+            <a:schemeClr val="lt1"/>
+          </a:fontRef>
+        </p:style>
+        <p:txBody>
+          <a:bodyPr rtlCol="0" anchor="ctr"/>
+          <a:lstStyle/>
+          <a:p>
+            <a:pPr algn="ctr"/>
+          </a:p>
+        </p:txBody>
+      </p:sp>
+      <p:sp>
+        <p:nvSpPr>
+          <p:cNvPr id="19" name="TextBox 18"/>
+          <p:cNvSpPr txBox="1"/>
+          <p:nvPr/>
+        </p:nvSpPr>
+        <p:spPr>
+          <a:xfrm>
+            <a:off x="6583680" y="1691640"/>
+            <a:ext cx="1554480" cy="594360"/>
+          </a:xfrm>
+          <a:prstGeom prst="rect">
+            <a:avLst/>
+          </a:prstGeom>
+          <a:noFill/>
+        </p:spPr>
+        <p:txBody>
+          <a:bodyPr wrap="square" anchor="ctr" lIns="0" rIns="0" tIns="0" bIns="0">
+            <a:spAutoFit/>
+          </a:bodyPr>
+          <a:lstStyle/>
+          <a:p>
+            <a:pPr algn="ctr">
+              <a:lnSpc>
+                <a:spcPct val="115000"/>
+              </a:lnSpc>
+            </a:pPr>
+            <a:r>
+              <a:rPr sz="1200" b="1">
+                <a:solidFill>
+                  <a:srgbClr val="FFFFFF"/>
+                </a:solidFill>
+                <a:latin typeface="微软雅黑"/>
+              </a:rPr>
+              <a:t>方案调优</a:t>
+            </a:r>
+          </a:p>
+        </p:txBody>
+      </p:sp>
+      <p:sp>
+        <p:nvSpPr>
+          <p:cNvPr id="20" name="Right Arrow 19"/>
+          <p:cNvSpPr/>
+          <p:nvPr/>
+        </p:nvSpPr>
+        <p:spPr>
+          <a:xfrm>
+            <a:off x="8156448" y="1847088"/>
+            <a:ext cx="164592" cy="274320"/>
+          </a:xfrm>
+          <a:prstGeom prst="rightArrow">
+            <a:avLst/>
+          </a:prstGeom>
+          <a:solidFill>
+            <a:srgbClr val="5A6A7A"/>
+          </a:solidFill>
+          <a:ln>
+            <a:noFill/>
+          </a:ln>
+        </p:spPr>
+        <p:style>
+          <a:lnRef idx="1">
+            <a:schemeClr val="accent1"/>
+          </a:lnRef>
+          <a:fillRef idx="3">
+            <a:schemeClr val="accent1"/>
+          </a:fillRef>
+          <a:effectRef idx="2">
+            <a:schemeClr val="accent1"/>
+          </a:effectRef>
+          <a:fontRef idx="minor">
+            <a:schemeClr val="lt1"/>
+          </a:fontRef>
+        </p:style>
+        <p:txBody>
+          <a:bodyPr rtlCol="0" anchor="ctr"/>
+          <a:lstStyle/>
+          <a:p>
+            <a:pPr algn="ctr"/>
+          </a:p>
+        </p:txBody>
+      </p:sp>
+      <p:sp>
+        <p:nvSpPr>
+          <p:cNvPr id="21" name="Rectangle 20"/>
+          <p:cNvSpPr/>
+          <p:nvPr/>
+        </p:nvSpPr>
+        <p:spPr>
+          <a:xfrm>
+            <a:off x="8503920" y="1691640"/>
+            <a:ext cx="1554480" cy="594360"/>
+          </a:xfrm>
+          <a:prstGeom prst="rect">
+            <a:avLst/>
+          </a:prstGeom>
+          <a:solidFill>
+            <a:srgbClr val="4CAF50"/>
+          </a:solidFill>
+          <a:ln>
+            <a:noFill/>
+          </a:ln>
+          <a:effectLst/>
+        </p:spPr>
+        <p:style>
+          <a:lnRef idx="1">
+            <a:schemeClr val="accent1"/>
+          </a:lnRef>
+          <a:fillRef idx="3">
+            <a:schemeClr val="accent1"/>
+          </a:fillRef>
+          <a:effectRef idx="2">
+            <a:schemeClr val="accent1"/>
+          </a:effectRef>
+          <a:fontRef idx="minor">
+            <a:schemeClr val="lt1"/>
+          </a:fontRef>
+        </p:style>
+        <p:txBody>
+          <a:bodyPr rtlCol="0" anchor="ctr"/>
+          <a:lstStyle/>
+          <a:p>
+            <a:pPr algn="ctr"/>
+          </a:p>
+        </p:txBody>
+      </p:sp>
+      <p:sp>
+        <p:nvSpPr>
+          <p:cNvPr id="22" name="TextBox 21"/>
+          <p:cNvSpPr txBox="1"/>
+          <p:nvPr/>
+        </p:nvSpPr>
+        <p:spPr>
+          <a:xfrm>
+            <a:off x="8503920" y="1691640"/>
+            <a:ext cx="1554480" cy="594360"/>
+          </a:xfrm>
+          <a:prstGeom prst="rect">
+            <a:avLst/>
+          </a:prstGeom>
+          <a:noFill/>
+        </p:spPr>
+        <p:txBody>
+          <a:bodyPr wrap="square" anchor="ctr" lIns="0" rIns="0" tIns="0" bIns="0">
+            <a:spAutoFit/>
+          </a:bodyPr>
+          <a:lstStyle/>
+          <a:p>
+            <a:pPr algn="ctr">
+              <a:lnSpc>
+                <a:spcPct val="115000"/>
+              </a:lnSpc>
+            </a:pPr>
+            <a:r>
+              <a:rPr sz="1200" b="1">
+                <a:solidFill>
+                  <a:srgbClr val="FFFFFF"/>
+                </a:solidFill>
+                <a:latin typeface="微软雅黑"/>
+              </a:rPr>
+              <a:t>效果验证</a:t>
+            </a:r>
+          </a:p>
+        </p:txBody>
+      </p:sp>
+      <p:sp>
+        <p:nvSpPr>
+          <p:cNvPr id="23" name="Right Arrow 22"/>
+          <p:cNvSpPr/>
+          <p:nvPr/>
+        </p:nvSpPr>
+        <p:spPr>
+          <a:xfrm>
+            <a:off x="10076688" y="1847088"/>
+            <a:ext cx="164592" cy="274320"/>
+          </a:xfrm>
+          <a:prstGeom prst="rightArrow">
+            <a:avLst/>
+          </a:prstGeom>
+          <a:solidFill>
+            <a:srgbClr val="5A6A7A"/>
+          </a:solidFill>
+          <a:ln>
+            <a:noFill/>
+          </a:ln>
+        </p:spPr>
+        <p:style>
+          <a:lnRef idx="1">
+            <a:schemeClr val="accent1"/>
+          </a:lnRef>
+          <a:fillRef idx="3">
+            <a:schemeClr val="accent1"/>
+          </a:fillRef>
+          <a:effectRef idx="2">
+            <a:schemeClr val="accent1"/>
+          </a:effectRef>
+          <a:fontRef idx="minor">
+            <a:schemeClr val="lt1"/>
+          </a:fontRef>
+        </p:style>
+        <p:txBody>
+          <a:bodyPr rtlCol="0" anchor="ctr"/>
+          <a:lstStyle/>
+          <a:p>
+            <a:pPr algn="ctr"/>
+          </a:p>
+        </p:txBody>
+      </p:sp>
+      <p:sp>
+        <p:nvSpPr>
+          <p:cNvPr id="24" name="Rectangle 23"/>
+          <p:cNvSpPr/>
+          <p:nvPr/>
+        </p:nvSpPr>
+        <p:spPr>
+          <a:xfrm>
+            <a:off x="10424160" y="1691640"/>
+            <a:ext cx="1554480" cy="594360"/>
+          </a:xfrm>
+          <a:prstGeom prst="rect">
+            <a:avLst/>
+          </a:prstGeom>
+          <a:solidFill>
+            <a:srgbClr val="1B3A5C"/>
+          </a:solidFill>
+          <a:ln>
+            <a:noFill/>
+          </a:ln>
+          <a:effectLst/>
+        </p:spPr>
+        <p:style>
+          <a:lnRef idx="1">
+            <a:schemeClr val="accent1"/>
+          </a:lnRef>
+          <a:fillRef idx="3">
+            <a:schemeClr val="accent1"/>
+          </a:fillRef>
+          <a:effectRef idx="2">
+            <a:schemeClr val="accent1"/>
+          </a:effectRef>
+          <a:fontRef idx="minor">
+            <a:schemeClr val="lt1"/>
+          </a:fontRef>
+        </p:style>
+        <p:txBody>
+          <a:bodyPr rtlCol="0" anchor="ctr"/>
+          <a:lstStyle/>
+          <a:p>
+            <a:pPr algn="ctr"/>
+          </a:p>
+        </p:txBody>
+      </p:sp>
+      <p:sp>
+        <p:nvSpPr>
+          <p:cNvPr id="25" name="TextBox 24"/>
+          <p:cNvSpPr txBox="1"/>
+          <p:nvPr/>
+        </p:nvSpPr>
+        <p:spPr>
+          <a:xfrm>
+            <a:off x="10424160" y="1691640"/>
+            <a:ext cx="1554480" cy="594360"/>
+          </a:xfrm>
+          <a:prstGeom prst="rect">
+            <a:avLst/>
+          </a:prstGeom>
+          <a:noFill/>
+        </p:spPr>
+        <p:txBody>
+          <a:bodyPr wrap="square" anchor="ctr" lIns="0" rIns="0" tIns="0" bIns="0">
+            <a:spAutoFit/>
+          </a:bodyPr>
+          <a:lstStyle/>
+          <a:p>
+            <a:pPr algn="ctr">
+              <a:lnSpc>
+                <a:spcPct val="115000"/>
+              </a:lnSpc>
+            </a:pPr>
+            <a:r>
+              <a:rPr sz="1200" b="1">
+                <a:solidFill>
+                  <a:srgbClr val="FFFFFF"/>
+                </a:solidFill>
+                <a:latin typeface="微软雅黑"/>
+              </a:rPr>
+              <a:t>经验沉淀</a:t>
+            </a:r>
+          </a:p>
+        </p:txBody>
+      </p:sp>
+      <p:sp>
+        <p:nvSpPr>
+          <p:cNvPr id="26" name="TextBox 25"/>
+          <p:cNvSpPr txBox="1"/>
+          <p:nvPr/>
+        </p:nvSpPr>
+        <p:spPr>
+          <a:xfrm>
+            <a:off x="502920" y="2743200"/>
             <a:ext cx="5486400" cy="0"/>
           </a:xfrm>
           <a:prstGeom prst="rect">
@@ -17965,14 +18000,14 @@
       </p:sp>
       <p:sp>
         <p:nvSpPr>
-          <p:cNvPr id="9" name="TextBox 8"/>
-          <p:cNvSpPr txBox="1"/>
-          <p:nvPr/>
-        </p:nvSpPr>
-        <p:spPr>
-          <a:xfrm>
-            <a:off x="502920" y="1645920"/>
-            <a:ext cx="5669280" cy="4114800"/>
+          <p:cNvPr id="27" name="TextBox 26"/>
+          <p:cNvSpPr txBox="1"/>
+          <p:nvPr/>
+        </p:nvSpPr>
+        <p:spPr>
+          <a:xfrm>
+            <a:off x="502920" y="3200400"/>
+            <a:ext cx="5669280" cy="2286000"/>
           </a:xfrm>
           <a:prstGeom prst="rect">
             <a:avLst/>
@@ -18102,13 +18137,13 @@
       </p:sp>
       <p:sp>
         <p:nvSpPr>
-          <p:cNvPr id="10" name="TextBox 9"/>
-          <p:cNvSpPr txBox="1"/>
-          <p:nvPr/>
-        </p:nvSpPr>
-        <p:spPr>
-          <a:xfrm>
-            <a:off x="6400800" y="1188720"/>
+          <p:cNvPr id="28" name="TextBox 27"/>
+          <p:cNvSpPr txBox="1"/>
+          <p:nvPr/>
+        </p:nvSpPr>
+        <p:spPr>
+          <a:xfrm>
+            <a:off x="6400800" y="2743200"/>
             <a:ext cx="5303520" cy="0"/>
           </a:xfrm>
           <a:prstGeom prst="rect">
@@ -18141,14 +18176,14 @@
       </p:sp>
       <p:sp>
         <p:nvSpPr>
-          <p:cNvPr id="11" name="Rectangle 10"/>
+          <p:cNvPr id="29" name="Rectangle 28"/>
           <p:cNvSpPr/>
           <p:nvPr/>
         </p:nvSpPr>
         <p:spPr>
           <a:xfrm>
-            <a:off x="6400800" y="1645920"/>
-            <a:ext cx="5257800" cy="685800"/>
+            <a:off x="6400800" y="3200400"/>
+            <a:ext cx="5257800" cy="594360"/>
           </a:xfrm>
           <a:prstGeom prst="rect">
             <a:avLst/>
@@ -18185,14 +18220,14 @@
       </p:sp>
       <p:sp>
         <p:nvSpPr>
-          <p:cNvPr id="12" name="Rectangle 11"/>
+          <p:cNvPr id="30" name="Rectangle 29"/>
           <p:cNvSpPr/>
           <p:nvPr/>
         </p:nvSpPr>
         <p:spPr>
           <a:xfrm>
-            <a:off x="6400800" y="1645920"/>
-            <a:ext cx="73152" cy="685800"/>
+            <a:off x="6400800" y="3200400"/>
+            <a:ext cx="73152" cy="594360"/>
           </a:xfrm>
           <a:prstGeom prst="rect">
             <a:avLst/>
@@ -18229,14 +18264,14 @@
       </p:sp>
       <p:sp>
         <p:nvSpPr>
-          <p:cNvPr id="13" name="TextBox 12"/>
-          <p:cNvSpPr txBox="1"/>
-          <p:nvPr/>
-        </p:nvSpPr>
-        <p:spPr>
-          <a:xfrm>
-            <a:off x="6629400" y="1719072"/>
-            <a:ext cx="4937760" cy="320040"/>
+          <p:cNvPr id="31" name="TextBox 30"/>
+          <p:cNvSpPr txBox="1"/>
+          <p:nvPr/>
+        </p:nvSpPr>
+        <p:spPr>
+          <a:xfrm>
+            <a:off x="6629400" y="3255264"/>
+            <a:ext cx="4937760" cy="274320"/>
           </a:xfrm>
           <a:prstGeom prst="rect">
             <a:avLst/>
@@ -18268,14 +18303,14 @@
       </p:sp>
       <p:sp>
         <p:nvSpPr>
-          <p:cNvPr id="14" name="TextBox 13"/>
-          <p:cNvSpPr txBox="1"/>
-          <p:nvPr/>
-        </p:nvSpPr>
-        <p:spPr>
-          <a:xfrm>
-            <a:off x="6629400" y="2029968"/>
-            <a:ext cx="4937760" cy="274320"/>
+          <p:cNvPr id="32" name="TextBox 31"/>
+          <p:cNvSpPr txBox="1"/>
+          <p:nvPr/>
+        </p:nvSpPr>
+        <p:spPr>
+          <a:xfrm>
+            <a:off x="6629400" y="3529584"/>
+            <a:ext cx="4937760" cy="228600"/>
           </a:xfrm>
           <a:prstGeom prst="rect">
             <a:avLst/>
@@ -18307,14 +18342,14 @@
       </p:sp>
       <p:sp>
         <p:nvSpPr>
-          <p:cNvPr id="15" name="Rectangle 14"/>
+          <p:cNvPr id="33" name="Rectangle 32"/>
           <p:cNvSpPr/>
           <p:nvPr/>
         </p:nvSpPr>
         <p:spPr>
           <a:xfrm>
-            <a:off x="6400800" y="2423160"/>
-            <a:ext cx="5257800" cy="685800"/>
+            <a:off x="6400800" y="3858768"/>
+            <a:ext cx="5257800" cy="594360"/>
           </a:xfrm>
           <a:prstGeom prst="rect">
             <a:avLst/>
@@ -18351,14 +18386,14 @@
       </p:sp>
       <p:sp>
         <p:nvSpPr>
-          <p:cNvPr id="16" name="Rectangle 15"/>
+          <p:cNvPr id="34" name="Rectangle 33"/>
           <p:cNvSpPr/>
           <p:nvPr/>
         </p:nvSpPr>
         <p:spPr>
           <a:xfrm>
-            <a:off x="6400800" y="2423160"/>
-            <a:ext cx="73152" cy="685800"/>
+            <a:off x="6400800" y="3858768"/>
+            <a:ext cx="73152" cy="594360"/>
           </a:xfrm>
           <a:prstGeom prst="rect">
             <a:avLst/>
@@ -18395,14 +18430,14 @@
       </p:sp>
       <p:sp>
         <p:nvSpPr>
-          <p:cNvPr id="17" name="TextBox 16"/>
-          <p:cNvSpPr txBox="1"/>
-          <p:nvPr/>
-        </p:nvSpPr>
-        <p:spPr>
-          <a:xfrm>
-            <a:off x="6629400" y="2496312"/>
-            <a:ext cx="4937760" cy="320040"/>
+          <p:cNvPr id="35" name="TextBox 34"/>
+          <p:cNvSpPr txBox="1"/>
+          <p:nvPr/>
+        </p:nvSpPr>
+        <p:spPr>
+          <a:xfrm>
+            <a:off x="6629400" y="3913631"/>
+            <a:ext cx="4937760" cy="274320"/>
           </a:xfrm>
           <a:prstGeom prst="rect">
             <a:avLst/>
@@ -18434,14 +18469,14 @@
       </p:sp>
       <p:sp>
         <p:nvSpPr>
-          <p:cNvPr id="18" name="TextBox 17"/>
-          <p:cNvSpPr txBox="1"/>
-          <p:nvPr/>
-        </p:nvSpPr>
-        <p:spPr>
-          <a:xfrm>
-            <a:off x="6629400" y="2807208"/>
-            <a:ext cx="4937760" cy="274320"/>
+          <p:cNvPr id="36" name="TextBox 35"/>
+          <p:cNvSpPr txBox="1"/>
+          <p:nvPr/>
+        </p:nvSpPr>
+        <p:spPr>
+          <a:xfrm>
+            <a:off x="6629400" y="4187952"/>
+            <a:ext cx="4937760" cy="228600"/>
           </a:xfrm>
           <a:prstGeom prst="rect">
             <a:avLst/>
@@ -18473,14 +18508,14 @@
       </p:sp>
       <p:sp>
         <p:nvSpPr>
-          <p:cNvPr id="19" name="Rectangle 18"/>
+          <p:cNvPr id="37" name="Rectangle 36"/>
           <p:cNvSpPr/>
           <p:nvPr/>
         </p:nvSpPr>
         <p:spPr>
           <a:xfrm>
-            <a:off x="6400800" y="3200400"/>
-            <a:ext cx="5257800" cy="685800"/>
+            <a:off x="6400800" y="4517136"/>
+            <a:ext cx="5257800" cy="594360"/>
           </a:xfrm>
           <a:prstGeom prst="rect">
             <a:avLst/>
@@ -18517,14 +18552,14 @@
       </p:sp>
       <p:sp>
         <p:nvSpPr>
-          <p:cNvPr id="20" name="Rectangle 19"/>
+          <p:cNvPr id="38" name="Rectangle 37"/>
           <p:cNvSpPr/>
           <p:nvPr/>
         </p:nvSpPr>
         <p:spPr>
           <a:xfrm>
-            <a:off x="6400800" y="3200400"/>
-            <a:ext cx="73152" cy="685800"/>
+            <a:off x="6400800" y="4517136"/>
+            <a:ext cx="73152" cy="594360"/>
           </a:xfrm>
           <a:prstGeom prst="rect">
             <a:avLst/>
@@ -18561,14 +18596,14 @@
       </p:sp>
       <p:sp>
         <p:nvSpPr>
-          <p:cNvPr id="21" name="TextBox 20"/>
-          <p:cNvSpPr txBox="1"/>
-          <p:nvPr/>
-        </p:nvSpPr>
-        <p:spPr>
-          <a:xfrm>
-            <a:off x="6629400" y="3273552"/>
-            <a:ext cx="4937760" cy="320040"/>
+          <p:cNvPr id="39" name="TextBox 38"/>
+          <p:cNvSpPr txBox="1"/>
+          <p:nvPr/>
+        </p:nvSpPr>
+        <p:spPr>
+          <a:xfrm>
+            <a:off x="6629400" y="4571999"/>
+            <a:ext cx="4937760" cy="274320"/>
           </a:xfrm>
           <a:prstGeom prst="rect">
             <a:avLst/>
@@ -18600,14 +18635,14 @@
       </p:sp>
       <p:sp>
         <p:nvSpPr>
-          <p:cNvPr id="22" name="TextBox 21"/>
-          <p:cNvSpPr txBox="1"/>
-          <p:nvPr/>
-        </p:nvSpPr>
-        <p:spPr>
-          <a:xfrm>
-            <a:off x="6629400" y="3584448"/>
-            <a:ext cx="4937760" cy="274320"/>
+          <p:cNvPr id="40" name="TextBox 39"/>
+          <p:cNvSpPr txBox="1"/>
+          <p:nvPr/>
+        </p:nvSpPr>
+        <p:spPr>
+          <a:xfrm>
+            <a:off x="6629400" y="4846320"/>
+            <a:ext cx="4937760" cy="228600"/>
           </a:xfrm>
           <a:prstGeom prst="rect">
             <a:avLst/>
@@ -18639,14 +18674,14 @@
       </p:sp>
       <p:sp>
         <p:nvSpPr>
-          <p:cNvPr id="23" name="Rectangle 22"/>
+          <p:cNvPr id="41" name="Rectangle 40"/>
           <p:cNvSpPr/>
           <p:nvPr/>
         </p:nvSpPr>
         <p:spPr>
           <a:xfrm>
-            <a:off x="6400800" y="3977639"/>
-            <a:ext cx="5257800" cy="685800"/>
+            <a:off x="6400800" y="5175504"/>
+            <a:ext cx="5257800" cy="594360"/>
           </a:xfrm>
           <a:prstGeom prst="rect">
             <a:avLst/>
@@ -18683,14 +18718,14 @@
       </p:sp>
       <p:sp>
         <p:nvSpPr>
-          <p:cNvPr id="24" name="Rectangle 23"/>
+          <p:cNvPr id="42" name="Rectangle 41"/>
           <p:cNvSpPr/>
           <p:nvPr/>
         </p:nvSpPr>
         <p:spPr>
           <a:xfrm>
-            <a:off x="6400800" y="3977639"/>
-            <a:ext cx="73152" cy="685800"/>
+            <a:off x="6400800" y="5175504"/>
+            <a:ext cx="73152" cy="594360"/>
           </a:xfrm>
           <a:prstGeom prst="rect">
             <a:avLst/>
@@ -18727,14 +18762,14 @@
       </p:sp>
       <p:sp>
         <p:nvSpPr>
-          <p:cNvPr id="25" name="TextBox 24"/>
-          <p:cNvSpPr txBox="1"/>
-          <p:nvPr/>
-        </p:nvSpPr>
-        <p:spPr>
-          <a:xfrm>
-            <a:off x="6629400" y="4050791"/>
-            <a:ext cx="4937760" cy="320040"/>
+          <p:cNvPr id="43" name="TextBox 42"/>
+          <p:cNvSpPr txBox="1"/>
+          <p:nvPr/>
+        </p:nvSpPr>
+        <p:spPr>
+          <a:xfrm>
+            <a:off x="6629400" y="5230368"/>
+            <a:ext cx="4937760" cy="274320"/>
           </a:xfrm>
           <a:prstGeom prst="rect">
             <a:avLst/>
@@ -18766,14 +18801,14 @@
       </p:sp>
       <p:sp>
         <p:nvSpPr>
-          <p:cNvPr id="26" name="TextBox 25"/>
-          <p:cNvSpPr txBox="1"/>
-          <p:nvPr/>
-        </p:nvSpPr>
-        <p:spPr>
-          <a:xfrm>
-            <a:off x="6629400" y="4361688"/>
-            <a:ext cx="4937760" cy="274320"/>
+          <p:cNvPr id="44" name="TextBox 43"/>
+          <p:cNvSpPr txBox="1"/>
+          <p:nvPr/>
+        </p:nvSpPr>
+        <p:spPr>
+          <a:xfrm>
+            <a:off x="6629400" y="5504688"/>
+            <a:ext cx="4937760" cy="228600"/>
           </a:xfrm>
           <a:prstGeom prst="rect">
             <a:avLst/>
@@ -18805,14 +18840,14 @@
       </p:sp>
       <p:sp>
         <p:nvSpPr>
-          <p:cNvPr id="27" name="Rectangle 26"/>
+          <p:cNvPr id="45" name="Rectangle 44"/>
           <p:cNvSpPr/>
           <p:nvPr/>
         </p:nvSpPr>
         <p:spPr>
           <a:xfrm>
-            <a:off x="6400800" y="4754880"/>
-            <a:ext cx="5257800" cy="685800"/>
+            <a:off x="6400800" y="5833872"/>
+            <a:ext cx="5257800" cy="594360"/>
           </a:xfrm>
           <a:prstGeom prst="rect">
             <a:avLst/>
@@ -18849,14 +18884,14 @@
       </p:sp>
       <p:sp>
         <p:nvSpPr>
-          <p:cNvPr id="28" name="Rectangle 27"/>
+          <p:cNvPr id="46" name="Rectangle 45"/>
           <p:cNvSpPr/>
           <p:nvPr/>
         </p:nvSpPr>
         <p:spPr>
           <a:xfrm>
-            <a:off x="6400800" y="4754880"/>
-            <a:ext cx="73152" cy="685800"/>
+            <a:off x="6400800" y="5833872"/>
+            <a:ext cx="73152" cy="594360"/>
           </a:xfrm>
           <a:prstGeom prst="rect">
             <a:avLst/>
@@ -18893,14 +18928,14 @@
       </p:sp>
       <p:sp>
         <p:nvSpPr>
-          <p:cNvPr id="29" name="TextBox 28"/>
-          <p:cNvSpPr txBox="1"/>
-          <p:nvPr/>
-        </p:nvSpPr>
-        <p:spPr>
-          <a:xfrm>
-            <a:off x="6629400" y="4828032"/>
-            <a:ext cx="4937760" cy="320040"/>
+          <p:cNvPr id="47" name="TextBox 46"/>
+          <p:cNvSpPr txBox="1"/>
+          <p:nvPr/>
+        </p:nvSpPr>
+        <p:spPr>
+          <a:xfrm>
+            <a:off x="6629400" y="5888736"/>
+            <a:ext cx="4937760" cy="274320"/>
           </a:xfrm>
           <a:prstGeom prst="rect">
             <a:avLst/>
@@ -18932,14 +18967,14 @@
       </p:sp>
       <p:sp>
         <p:nvSpPr>
-          <p:cNvPr id="30" name="TextBox 29"/>
-          <p:cNvSpPr txBox="1"/>
-          <p:nvPr/>
-        </p:nvSpPr>
-        <p:spPr>
-          <a:xfrm>
-            <a:off x="6629400" y="5138928"/>
-            <a:ext cx="4937760" cy="274320"/>
+          <p:cNvPr id="48" name="TextBox 47"/>
+          <p:cNvSpPr txBox="1"/>
+          <p:nvPr/>
+        </p:nvSpPr>
+        <p:spPr>
+          <a:xfrm>
+            <a:off x="6629400" y="6163056"/>
+            <a:ext cx="4937760" cy="228600"/>
           </a:xfrm>
           <a:prstGeom prst="rect">
             <a:avLst/>
@@ -18971,13 +19006,13 @@
       </p:sp>
       <p:sp>
         <p:nvSpPr>
-          <p:cNvPr id="31" name="TextBox 30"/>
-          <p:cNvSpPr txBox="1"/>
-          <p:nvPr/>
-        </p:nvSpPr>
-        <p:spPr>
-          <a:xfrm>
-            <a:off x="502920" y="5852160"/>
+          <p:cNvPr id="49" name="TextBox 48"/>
+          <p:cNvSpPr txBox="1"/>
+          <p:nvPr/>
+        </p:nvSpPr>
+        <p:spPr>
+          <a:xfrm>
+            <a:off x="502920" y="5715000"/>
             <a:ext cx="11155680" cy="0"/>
           </a:xfrm>
           <a:prstGeom prst="rect">
@@ -19010,7 +19045,7 @@
       </p:sp>
       <p:sp>
         <p:nvSpPr>
-          <p:cNvPr id="32" name="TextBox 31"/>
+          <p:cNvPr id="50" name="TextBox 49"/>
           <p:cNvSpPr txBox="1"/>
           <p:nvPr/>
         </p:nvSpPr>
@@ -19737,7 +19772,7 @@
         </p:nvSpPr>
         <p:spPr>
           <a:xfrm>
-            <a:off x="731520" y="2606040"/>
+            <a:off x="731520" y="2788920"/>
             <a:ext cx="5120640" cy="1051560"/>
           </a:xfrm>
           <a:prstGeom prst="rect">
@@ -19781,7 +19816,7 @@
         </p:nvSpPr>
         <p:spPr>
           <a:xfrm>
-            <a:off x="731520" y="2606040"/>
+            <a:off x="731520" y="2788920"/>
             <a:ext cx="914400" cy="1051560"/>
           </a:xfrm>
           <a:prstGeom prst="rect">
@@ -19825,7 +19860,7 @@
         </p:nvSpPr>
         <p:spPr>
           <a:xfrm>
-            <a:off x="731520" y="2606040"/>
+            <a:off x="731520" y="2788920"/>
             <a:ext cx="914400" cy="1051560"/>
           </a:xfrm>
           <a:prstGeom prst="rect">
@@ -19864,7 +19899,7 @@
         </p:nvSpPr>
         <p:spPr>
           <a:xfrm>
-            <a:off x="1828800" y="2770632"/>
+            <a:off x="1828800" y="2953512"/>
             <a:ext cx="3931920" cy="457200"/>
           </a:xfrm>
           <a:prstGeom prst="rect">
@@ -19903,7 +19938,7 @@
         </p:nvSpPr>
         <p:spPr>
           <a:xfrm>
-            <a:off x="1828800" y="3227832"/>
+            <a:off x="1828800" y="3410712"/>
             <a:ext cx="3931920" cy="365760"/>
           </a:xfrm>
           <a:prstGeom prst="rect">
@@ -19942,7 +19977,7 @@
         </p:nvSpPr>
         <p:spPr>
           <a:xfrm>
-            <a:off x="6309359" y="2606040"/>
+            <a:off x="6309359" y="2788920"/>
             <a:ext cx="5120640" cy="1051560"/>
           </a:xfrm>
           <a:prstGeom prst="rect">
@@ -19986,7 +20021,7 @@
         </p:nvSpPr>
         <p:spPr>
           <a:xfrm>
-            <a:off x="6309359" y="2606040"/>
+            <a:off x="6309359" y="2788920"/>
             <a:ext cx="914400" cy="1051560"/>
           </a:xfrm>
           <a:prstGeom prst="rect">
@@ -20030,7 +20065,7 @@
         </p:nvSpPr>
         <p:spPr>
           <a:xfrm>
-            <a:off x="6309359" y="2606040"/>
+            <a:off x="6309359" y="2788920"/>
             <a:ext cx="914400" cy="1051560"/>
           </a:xfrm>
           <a:prstGeom prst="rect">
@@ -20069,7 +20104,7 @@
         </p:nvSpPr>
         <p:spPr>
           <a:xfrm>
-            <a:off x="7406639" y="2770632"/>
+            <a:off x="7406639" y="2953512"/>
             <a:ext cx="3931920" cy="457200"/>
           </a:xfrm>
           <a:prstGeom prst="rect">
@@ -20108,7 +20143,7 @@
         </p:nvSpPr>
         <p:spPr>
           <a:xfrm>
-            <a:off x="7406639" y="3227832"/>
+            <a:off x="7406639" y="3410712"/>
             <a:ext cx="3931920" cy="365760"/>
           </a:xfrm>
           <a:prstGeom prst="rect">
@@ -20147,7 +20182,7 @@
         </p:nvSpPr>
         <p:spPr>
           <a:xfrm>
-            <a:off x="731520" y="3840480"/>
+            <a:off x="731520" y="4206240"/>
             <a:ext cx="5120640" cy="1051560"/>
           </a:xfrm>
           <a:prstGeom prst="rect">
@@ -20191,7 +20226,7 @@
         </p:nvSpPr>
         <p:spPr>
           <a:xfrm>
-            <a:off x="731520" y="3840480"/>
+            <a:off x="731520" y="4206240"/>
             <a:ext cx="914400" cy="1051560"/>
           </a:xfrm>
           <a:prstGeom prst="rect">
@@ -20235,7 +20270,7 @@
         </p:nvSpPr>
         <p:spPr>
           <a:xfrm>
-            <a:off x="731520" y="3840480"/>
+            <a:off x="731520" y="4206240"/>
             <a:ext cx="914400" cy="1051560"/>
           </a:xfrm>
           <a:prstGeom prst="rect">
@@ -20274,7 +20309,7 @@
         </p:nvSpPr>
         <p:spPr>
           <a:xfrm>
-            <a:off x="1828800" y="4005072"/>
+            <a:off x="1828800" y="4370832"/>
             <a:ext cx="3931920" cy="457200"/>
           </a:xfrm>
           <a:prstGeom prst="rect">
@@ -20313,7 +20348,7 @@
         </p:nvSpPr>
         <p:spPr>
           <a:xfrm>
-            <a:off x="1828800" y="4462272"/>
+            <a:off x="1828800" y="4828032"/>
             <a:ext cx="3931920" cy="365760"/>
           </a:xfrm>
           <a:prstGeom prst="rect">
@@ -20352,7 +20387,7 @@
         </p:nvSpPr>
         <p:spPr>
           <a:xfrm>
-            <a:off x="6309359" y="3840480"/>
+            <a:off x="6309359" y="4206240"/>
             <a:ext cx="5120640" cy="1051560"/>
           </a:xfrm>
           <a:prstGeom prst="rect">
@@ -20396,7 +20431,7 @@
         </p:nvSpPr>
         <p:spPr>
           <a:xfrm>
-            <a:off x="6309359" y="3840480"/>
+            <a:off x="6309359" y="4206240"/>
             <a:ext cx="914400" cy="1051560"/>
           </a:xfrm>
           <a:prstGeom prst="rect">
@@ -20440,7 +20475,7 @@
         </p:nvSpPr>
         <p:spPr>
           <a:xfrm>
-            <a:off x="6309359" y="3840480"/>
+            <a:off x="6309359" y="4206240"/>
             <a:ext cx="914400" cy="1051560"/>
           </a:xfrm>
           <a:prstGeom prst="rect">
@@ -20479,7 +20514,7 @@
         </p:nvSpPr>
         <p:spPr>
           <a:xfrm>
-            <a:off x="7406639" y="4005072"/>
+            <a:off x="7406639" y="4370832"/>
             <a:ext cx="3931920" cy="457200"/>
           </a:xfrm>
           <a:prstGeom prst="rect">
@@ -20518,7 +20553,7 @@
         </p:nvSpPr>
         <p:spPr>
           <a:xfrm>
-            <a:off x="7406639" y="4462272"/>
+            <a:off x="7406639" y="4828032"/>
             <a:ext cx="3931920" cy="365760"/>
           </a:xfrm>
           <a:prstGeom prst="rect">
@@ -20557,7 +20592,7 @@
         </p:nvSpPr>
         <p:spPr>
           <a:xfrm>
-            <a:off x="731520" y="5074920"/>
+            <a:off x="731520" y="5623560"/>
             <a:ext cx="5120640" cy="1051560"/>
           </a:xfrm>
           <a:prstGeom prst="rect">
@@ -20601,7 +20636,7 @@
         </p:nvSpPr>
         <p:spPr>
           <a:xfrm>
-            <a:off x="731520" y="5074920"/>
+            <a:off x="731520" y="5623560"/>
             <a:ext cx="914400" cy="1051560"/>
           </a:xfrm>
           <a:prstGeom prst="rect">
@@ -20645,7 +20680,7 @@
         </p:nvSpPr>
         <p:spPr>
           <a:xfrm>
-            <a:off x="731520" y="5074920"/>
+            <a:off x="731520" y="5623560"/>
             <a:ext cx="914400" cy="1051560"/>
           </a:xfrm>
           <a:prstGeom prst="rect">
@@ -20684,7 +20719,7 @@
         </p:nvSpPr>
         <p:spPr>
           <a:xfrm>
-            <a:off x="1828800" y="5239512"/>
+            <a:off x="1828800" y="5788152"/>
             <a:ext cx="3931920" cy="457200"/>
           </a:xfrm>
           <a:prstGeom prst="rect">
@@ -20723,7 +20758,7 @@
         </p:nvSpPr>
         <p:spPr>
           <a:xfrm>
-            <a:off x="1828800" y="5696712"/>
+            <a:off x="1828800" y="6245352"/>
             <a:ext cx="3931920" cy="365760"/>
           </a:xfrm>
           <a:prstGeom prst="rect">
@@ -20762,7 +20797,7 @@
         </p:nvSpPr>
         <p:spPr>
           <a:xfrm>
-            <a:off x="6309359" y="5074920"/>
+            <a:off x="6309359" y="5623560"/>
             <a:ext cx="5120640" cy="1051560"/>
           </a:xfrm>
           <a:prstGeom prst="rect">
@@ -20806,7 +20841,7 @@
         </p:nvSpPr>
         <p:spPr>
           <a:xfrm>
-            <a:off x="6309359" y="5074920"/>
+            <a:off x="6309359" y="5623560"/>
             <a:ext cx="914400" cy="1051560"/>
           </a:xfrm>
           <a:prstGeom prst="rect">
@@ -20850,7 +20885,7 @@
         </p:nvSpPr>
         <p:spPr>
           <a:xfrm>
-            <a:off x="6309359" y="5074920"/>
+            <a:off x="6309359" y="5623560"/>
             <a:ext cx="914400" cy="1051560"/>
           </a:xfrm>
           <a:prstGeom prst="rect">
@@ -20876,7 +20911,7 @@
                 </a:solidFill>
                 <a:latin typeface="微软雅黑"/>
               </a:rPr>
-              <a:t>08</a:t>
+              <a:t>08-09</a:t>
             </a:r>
           </a:p>
         </p:txBody>
@@ -20889,7 +20924,7 @@
         </p:nvSpPr>
         <p:spPr>
           <a:xfrm>
-            <a:off x="7406639" y="5239512"/>
+            <a:off x="7406639" y="5788152"/>
             <a:ext cx="3931920" cy="457200"/>
           </a:xfrm>
           <a:prstGeom prst="rect">
@@ -20915,7 +20950,7 @@
                 </a:solidFill>
                 <a:latin typeface="微软雅黑"/>
               </a:rPr>
-              <a:t>综合调优成果与总结</a:t>
+              <a:t>综合调优成果 + 闭环</a:t>
             </a:r>
           </a:p>
         </p:txBody>
@@ -20928,7 +20963,7 @@
         </p:nvSpPr>
         <p:spPr>
           <a:xfrm>
-            <a:off x="7406639" y="5696712"/>
+            <a:off x="7406639" y="6245352"/>
             <a:ext cx="3931920" cy="365760"/>
           </a:xfrm>
           <a:prstGeom prst="rect">
@@ -22725,7 +22760,7 @@
         </p:nvSpPr>
         <p:spPr>
           <a:xfrm>
-            <a:off x="502920" y="3794760"/>
+            <a:off x="502920" y="3867912"/>
             <a:ext cx="2377440" cy="320040"/>
           </a:xfrm>
           <a:prstGeom prst="rect">
@@ -22769,7 +22804,7 @@
         </p:nvSpPr>
         <p:spPr>
           <a:xfrm>
-            <a:off x="594360" y="3831336"/>
+            <a:off x="594360" y="3904488"/>
             <a:ext cx="2286000" cy="274320"/>
           </a:xfrm>
           <a:prstGeom prst="rect">
@@ -22808,7 +22843,7 @@
         </p:nvSpPr>
         <p:spPr>
           <a:xfrm>
-            <a:off x="2880360" y="3794760"/>
+            <a:off x="2880360" y="3867912"/>
             <a:ext cx="5486400" cy="320040"/>
           </a:xfrm>
           <a:prstGeom prst="rect">
@@ -22852,7 +22887,7 @@
         </p:nvSpPr>
         <p:spPr>
           <a:xfrm>
-            <a:off x="3017520" y="3831336"/>
+            <a:off x="3017520" y="3904488"/>
             <a:ext cx="5303520" cy="274320"/>
           </a:xfrm>
           <a:prstGeom prst="rect">
@@ -22891,7 +22926,7 @@
         </p:nvSpPr>
         <p:spPr>
           <a:xfrm>
-            <a:off x="502920" y="4160520"/>
+            <a:off x="502920" y="4306824"/>
             <a:ext cx="2377440" cy="320040"/>
           </a:xfrm>
           <a:prstGeom prst="rect">
@@ -22935,7 +22970,7 @@
         </p:nvSpPr>
         <p:spPr>
           <a:xfrm>
-            <a:off x="594360" y="4197096"/>
+            <a:off x="594360" y="4343400"/>
             <a:ext cx="2286000" cy="274320"/>
           </a:xfrm>
           <a:prstGeom prst="rect">
@@ -22974,7 +23009,7 @@
         </p:nvSpPr>
         <p:spPr>
           <a:xfrm>
-            <a:off x="2880360" y="4160520"/>
+            <a:off x="2880360" y="4306824"/>
             <a:ext cx="5486400" cy="320040"/>
           </a:xfrm>
           <a:prstGeom prst="rect">
@@ -23018,7 +23053,7 @@
         </p:nvSpPr>
         <p:spPr>
           <a:xfrm>
-            <a:off x="3017520" y="4197096"/>
+            <a:off x="3017520" y="4343400"/>
             <a:ext cx="5303520" cy="274320"/>
           </a:xfrm>
           <a:prstGeom prst="rect">
@@ -23057,7 +23092,7 @@
         </p:nvSpPr>
         <p:spPr>
           <a:xfrm>
-            <a:off x="502920" y="4526280"/>
+            <a:off x="502920" y="4745736"/>
             <a:ext cx="2377440" cy="320040"/>
           </a:xfrm>
           <a:prstGeom prst="rect">
@@ -23101,7 +23136,7 @@
         </p:nvSpPr>
         <p:spPr>
           <a:xfrm>
-            <a:off x="594360" y="4562856"/>
+            <a:off x="594360" y="4782312"/>
             <a:ext cx="2286000" cy="274320"/>
           </a:xfrm>
           <a:prstGeom prst="rect">
@@ -23140,7 +23175,7 @@
         </p:nvSpPr>
         <p:spPr>
           <a:xfrm>
-            <a:off x="2880360" y="4526280"/>
+            <a:off x="2880360" y="4745736"/>
             <a:ext cx="5486400" cy="320040"/>
           </a:xfrm>
           <a:prstGeom prst="rect">
@@ -23184,7 +23219,7 @@
         </p:nvSpPr>
         <p:spPr>
           <a:xfrm>
-            <a:off x="3017520" y="4562856"/>
+            <a:off x="3017520" y="4782312"/>
             <a:ext cx="5303520" cy="274320"/>
           </a:xfrm>
           <a:prstGeom prst="rect">
@@ -23223,7 +23258,7 @@
         </p:nvSpPr>
         <p:spPr>
           <a:xfrm>
-            <a:off x="502920" y="4892040"/>
+            <a:off x="502920" y="5184648"/>
             <a:ext cx="2377440" cy="320040"/>
           </a:xfrm>
           <a:prstGeom prst="rect">
@@ -23267,7 +23302,7 @@
         </p:nvSpPr>
         <p:spPr>
           <a:xfrm>
-            <a:off x="594360" y="4928616"/>
+            <a:off x="594360" y="5221224"/>
             <a:ext cx="2286000" cy="274320"/>
           </a:xfrm>
           <a:prstGeom prst="rect">
@@ -23306,7 +23341,7 @@
         </p:nvSpPr>
         <p:spPr>
           <a:xfrm>
-            <a:off x="2880360" y="4892040"/>
+            <a:off x="2880360" y="5184648"/>
             <a:ext cx="5486400" cy="320040"/>
           </a:xfrm>
           <a:prstGeom prst="rect">
@@ -23350,7 +23385,7 @@
         </p:nvSpPr>
         <p:spPr>
           <a:xfrm>
-            <a:off x="3017520" y="4928616"/>
+            <a:off x="3017520" y="5221224"/>
             <a:ext cx="5303520" cy="274320"/>
           </a:xfrm>
           <a:prstGeom prst="rect">
@@ -23480,7 +23515,7 @@
         </p:nvSpPr>
         <p:spPr>
           <a:xfrm>
-            <a:off x="8686800" y="3794760"/>
+            <a:off x="8686800" y="3867912"/>
             <a:ext cx="3200400" cy="320040"/>
           </a:xfrm>
           <a:prstGeom prst="roundRect">
@@ -23532,7 +23567,7 @@
         </p:nvSpPr>
         <p:spPr>
           <a:xfrm>
-            <a:off x="8686800" y="4160520"/>
+            <a:off x="8686800" y="4306824"/>
             <a:ext cx="3200400" cy="320040"/>
           </a:xfrm>
           <a:prstGeom prst="roundRect">
@@ -23584,7 +23619,7 @@
         </p:nvSpPr>
         <p:spPr>
           <a:xfrm>
-            <a:off x="8686800" y="4526280"/>
+            <a:off x="8686800" y="4745736"/>
             <a:ext cx="3200400" cy="320040"/>
           </a:xfrm>
           <a:prstGeom prst="roundRect">
@@ -23636,7 +23671,7 @@
         </p:nvSpPr>
         <p:spPr>
           <a:xfrm>
-            <a:off x="8686800" y="4892040"/>
+            <a:off x="8686800" y="5184648"/>
             <a:ext cx="3200400" cy="320040"/>
           </a:xfrm>
           <a:prstGeom prst="roundRect">
@@ -24592,7 +24627,7 @@
         </p:nvSpPr>
         <p:spPr>
           <a:xfrm>
-            <a:off x="502920" y="2670048"/>
+            <a:off x="502920" y="2788920"/>
             <a:ext cx="11247120" cy="868680"/>
           </a:xfrm>
           <a:prstGeom prst="rect">
@@ -24636,7 +24671,7 @@
         </p:nvSpPr>
         <p:spPr>
           <a:xfrm>
-            <a:off x="502920" y="2670048"/>
+            <a:off x="502920" y="2788920"/>
             <a:ext cx="73152" cy="868680"/>
           </a:xfrm>
           <a:prstGeom prst="rect">
@@ -24680,7 +24715,7 @@
         </p:nvSpPr>
         <p:spPr>
           <a:xfrm>
-            <a:off x="640080" y="2761488"/>
+            <a:off x="640080" y="2880360"/>
             <a:ext cx="1280160" cy="365760"/>
           </a:xfrm>
           <a:prstGeom prst="rect">
@@ -24719,7 +24754,7 @@
         </p:nvSpPr>
         <p:spPr>
           <a:xfrm>
-            <a:off x="640080" y="3127248"/>
+            <a:off x="640080" y="3246120"/>
             <a:ext cx="1280160" cy="365760"/>
           </a:xfrm>
           <a:prstGeom prst="rect">
@@ -24758,7 +24793,7 @@
         </p:nvSpPr>
         <p:spPr>
           <a:xfrm>
-            <a:off x="3611880" y="2779776"/>
+            <a:off x="3611880" y="2898648"/>
             <a:ext cx="2834640" cy="731520"/>
           </a:xfrm>
           <a:prstGeom prst="rect">
@@ -24813,7 +24848,7 @@
         </p:nvSpPr>
         <p:spPr>
           <a:xfrm>
-            <a:off x="6583680" y="2779776"/>
+            <a:off x="6583680" y="2898648"/>
             <a:ext cx="2880360" cy="731520"/>
           </a:xfrm>
           <a:prstGeom prst="rect">
@@ -24868,7 +24903,7 @@
         </p:nvSpPr>
         <p:spPr>
           <a:xfrm>
-            <a:off x="9601200" y="2779776"/>
+            <a:off x="9601200" y="2898648"/>
             <a:ext cx="2103120" cy="731520"/>
           </a:xfrm>
           <a:prstGeom prst="rect">
@@ -24907,7 +24942,7 @@
         </p:nvSpPr>
         <p:spPr>
           <a:xfrm>
-            <a:off x="502920" y="3602736"/>
+            <a:off x="502920" y="3840479"/>
             <a:ext cx="11247120" cy="868680"/>
           </a:xfrm>
           <a:prstGeom prst="rect">
@@ -24951,7 +24986,7 @@
         </p:nvSpPr>
         <p:spPr>
           <a:xfrm>
-            <a:off x="502920" y="3602736"/>
+            <a:off x="502920" y="3840479"/>
             <a:ext cx="73152" cy="868680"/>
           </a:xfrm>
           <a:prstGeom prst="rect">
@@ -24995,7 +25030,7 @@
         </p:nvSpPr>
         <p:spPr>
           <a:xfrm>
-            <a:off x="640080" y="3694176"/>
+            <a:off x="640080" y="3931919"/>
             <a:ext cx="1280160" cy="365760"/>
           </a:xfrm>
           <a:prstGeom prst="rect">
@@ -25034,7 +25069,7 @@
         </p:nvSpPr>
         <p:spPr>
           <a:xfrm>
-            <a:off x="640080" y="4059935"/>
+            <a:off x="640080" y="4297679"/>
             <a:ext cx="1280160" cy="365760"/>
           </a:xfrm>
           <a:prstGeom prst="rect">
@@ -25073,7 +25108,7 @@
         </p:nvSpPr>
         <p:spPr>
           <a:xfrm>
-            <a:off x="3611880" y="3712463"/>
+            <a:off x="3611880" y="3950207"/>
             <a:ext cx="2834640" cy="731520"/>
           </a:xfrm>
           <a:prstGeom prst="rect">
@@ -25128,7 +25163,7 @@
         </p:nvSpPr>
         <p:spPr>
           <a:xfrm>
-            <a:off x="6583680" y="3712463"/>
+            <a:off x="6583680" y="3950207"/>
             <a:ext cx="2880360" cy="731520"/>
           </a:xfrm>
           <a:prstGeom prst="rect">
@@ -25183,7 +25218,7 @@
         </p:nvSpPr>
         <p:spPr>
           <a:xfrm>
-            <a:off x="9601200" y="3712463"/>
+            <a:off x="9601200" y="3950207"/>
             <a:ext cx="2103120" cy="731520"/>
           </a:xfrm>
           <a:prstGeom prst="rect">
@@ -25222,7 +25257,7 @@
         </p:nvSpPr>
         <p:spPr>
           <a:xfrm>
-            <a:off x="502920" y="4535424"/>
+            <a:off x="502920" y="4892040"/>
             <a:ext cx="11247120" cy="868680"/>
           </a:xfrm>
           <a:prstGeom prst="rect">
@@ -25266,7 +25301,7 @@
         </p:nvSpPr>
         <p:spPr>
           <a:xfrm>
-            <a:off x="502920" y="4535424"/>
+            <a:off x="502920" y="4892040"/>
             <a:ext cx="73152" cy="868680"/>
           </a:xfrm>
           <a:prstGeom prst="rect">
@@ -25310,7 +25345,7 @@
         </p:nvSpPr>
         <p:spPr>
           <a:xfrm>
-            <a:off x="640080" y="4626864"/>
+            <a:off x="640080" y="4983479"/>
             <a:ext cx="1280160" cy="365760"/>
           </a:xfrm>
           <a:prstGeom prst="rect">
@@ -25349,7 +25384,7 @@
         </p:nvSpPr>
         <p:spPr>
           <a:xfrm>
-            <a:off x="640080" y="4992624"/>
+            <a:off x="640080" y="5349240"/>
             <a:ext cx="1280160" cy="365760"/>
           </a:xfrm>
           <a:prstGeom prst="rect">
@@ -25388,7 +25423,7 @@
         </p:nvSpPr>
         <p:spPr>
           <a:xfrm>
-            <a:off x="3611880" y="4645152"/>
+            <a:off x="3611880" y="5001768"/>
             <a:ext cx="2834640" cy="731520"/>
           </a:xfrm>
           <a:prstGeom prst="rect">
@@ -25443,7 +25478,7 @@
         </p:nvSpPr>
         <p:spPr>
           <a:xfrm>
-            <a:off x="6583680" y="4645152"/>
+            <a:off x="6583680" y="5001768"/>
             <a:ext cx="2880360" cy="731520"/>
           </a:xfrm>
           <a:prstGeom prst="rect">
@@ -25498,7 +25533,7 @@
         </p:nvSpPr>
         <p:spPr>
           <a:xfrm>
-            <a:off x="9601200" y="4645152"/>
+            <a:off x="9601200" y="5001768"/>
             <a:ext cx="2103120" cy="731520"/>
           </a:xfrm>
           <a:prstGeom prst="rect">
@@ -25537,7 +25572,7 @@
         </p:nvSpPr>
         <p:spPr>
           <a:xfrm>
-            <a:off x="502920" y="5468112"/>
+            <a:off x="502920" y="5943600"/>
             <a:ext cx="11247120" cy="868680"/>
           </a:xfrm>
           <a:prstGeom prst="rect">
@@ -25581,7 +25616,7 @@
         </p:nvSpPr>
         <p:spPr>
           <a:xfrm>
-            <a:off x="502920" y="5468112"/>
+            <a:off x="502920" y="5943600"/>
             <a:ext cx="73152" cy="868680"/>
           </a:xfrm>
           <a:prstGeom prst="rect">
@@ -25625,7 +25660,7 @@
         </p:nvSpPr>
         <p:spPr>
           <a:xfrm>
-            <a:off x="640080" y="5559552"/>
+            <a:off x="640080" y="6035040"/>
             <a:ext cx="1280160" cy="365760"/>
           </a:xfrm>
           <a:prstGeom prst="rect">
@@ -25664,7 +25699,7 @@
         </p:nvSpPr>
         <p:spPr>
           <a:xfrm>
-            <a:off x="640080" y="5925312"/>
+            <a:off x="640080" y="6400800"/>
             <a:ext cx="1280160" cy="365760"/>
           </a:xfrm>
           <a:prstGeom prst="rect">
@@ -25703,7 +25738,7 @@
         </p:nvSpPr>
         <p:spPr>
           <a:xfrm>
-            <a:off x="3611880" y="5577840"/>
+            <a:off x="3611880" y="6053328"/>
             <a:ext cx="2834640" cy="731520"/>
           </a:xfrm>
           <a:prstGeom prst="rect">
@@ -25758,7 +25793,7 @@
         </p:nvSpPr>
         <p:spPr>
           <a:xfrm>
-            <a:off x="6583680" y="5577840"/>
+            <a:off x="6583680" y="6053328"/>
             <a:ext cx="2880360" cy="731520"/>
           </a:xfrm>
           <a:prstGeom prst="rect">
@@ -25813,7 +25848,7 @@
         </p:nvSpPr>
         <p:spPr>
           <a:xfrm>
-            <a:off x="9601200" y="5577840"/>
+            <a:off x="9601200" y="6053328"/>
             <a:ext cx="2103120" cy="731520"/>
           </a:xfrm>
           <a:prstGeom prst="rect">
@@ -29201,7 +29236,7 @@
         </p:nvSpPr>
         <p:spPr>
           <a:xfrm>
-            <a:off x="502920" y="3630168"/>
+            <a:off x="502920" y="3721608"/>
             <a:ext cx="7315200" cy="365760"/>
           </a:xfrm>
           <a:prstGeom prst="rect">
@@ -29245,7 +29280,7 @@
         </p:nvSpPr>
         <p:spPr>
           <a:xfrm>
-            <a:off x="502920" y="3630168"/>
+            <a:off x="502920" y="3721608"/>
             <a:ext cx="2377440" cy="365760"/>
           </a:xfrm>
           <a:prstGeom prst="rect">
@@ -29284,7 +29319,7 @@
         </p:nvSpPr>
         <p:spPr>
           <a:xfrm>
-            <a:off x="2880360" y="3630168"/>
+            <a:off x="2880360" y="3721608"/>
             <a:ext cx="2468880" cy="365760"/>
           </a:xfrm>
           <a:prstGeom prst="rect">
@@ -29304,7 +29339,7 @@
               </a:lnSpc>
             </a:pPr>
             <a:r>
-              <a:rPr sz="1200" b="1">
+              <a:rPr sz="1200" b="0">
                 <a:solidFill>
                   <a:srgbClr val="E55C5C"/>
                 </a:solidFill>
@@ -29323,7 +29358,7 @@
         </p:nvSpPr>
         <p:spPr>
           <a:xfrm>
-            <a:off x="5349240" y="3630168"/>
+            <a:off x="5349240" y="3721608"/>
             <a:ext cx="2468880" cy="365760"/>
           </a:xfrm>
           <a:prstGeom prst="rect">
@@ -29343,7 +29378,7 @@
               </a:lnSpc>
             </a:pPr>
             <a:r>
-              <a:rPr sz="1200" b="1">
+              <a:rPr sz="1200" b="0">
                 <a:solidFill>
                   <a:srgbClr val="4CAF50"/>
                 </a:solidFill>
@@ -29362,7 +29397,7 @@
         </p:nvSpPr>
         <p:spPr>
           <a:xfrm>
-            <a:off x="502920" y="4014215"/>
+            <a:off x="502920" y="4197096"/>
             <a:ext cx="7315200" cy="365760"/>
           </a:xfrm>
           <a:prstGeom prst="rect">
@@ -29406,7 +29441,7 @@
         </p:nvSpPr>
         <p:spPr>
           <a:xfrm>
-            <a:off x="502920" y="4014215"/>
+            <a:off x="502920" y="4197096"/>
             <a:ext cx="2377440" cy="365760"/>
           </a:xfrm>
           <a:prstGeom prst="rect">
@@ -29445,7 +29480,7 @@
         </p:nvSpPr>
         <p:spPr>
           <a:xfrm>
-            <a:off x="2880360" y="4014215"/>
+            <a:off x="2880360" y="4197096"/>
             <a:ext cx="2468880" cy="365760"/>
           </a:xfrm>
           <a:prstGeom prst="rect">
@@ -29465,7 +29500,7 @@
               </a:lnSpc>
             </a:pPr>
             <a:r>
-              <a:rPr sz="1200" b="1">
+              <a:rPr sz="1200" b="0">
                 <a:solidFill>
                   <a:srgbClr val="E55C5C"/>
                 </a:solidFill>
@@ -29484,7 +29519,7 @@
         </p:nvSpPr>
         <p:spPr>
           <a:xfrm>
-            <a:off x="5349240" y="4014215"/>
+            <a:off x="5349240" y="4197096"/>
             <a:ext cx="2468880" cy="365760"/>
           </a:xfrm>
           <a:prstGeom prst="rect">
@@ -29504,7 +29539,7 @@
               </a:lnSpc>
             </a:pPr>
             <a:r>
-              <a:rPr sz="1200" b="1">
+              <a:rPr sz="1200" b="0">
                 <a:solidFill>
                   <a:srgbClr val="4CAF50"/>
                 </a:solidFill>
@@ -29523,7 +29558,7 @@
         </p:nvSpPr>
         <p:spPr>
           <a:xfrm>
-            <a:off x="502920" y="4398264"/>
+            <a:off x="502920" y="4672583"/>
             <a:ext cx="7315200" cy="365760"/>
           </a:xfrm>
           <a:prstGeom prst="rect">
@@ -29567,7 +29602,7 @@
         </p:nvSpPr>
         <p:spPr>
           <a:xfrm>
-            <a:off x="502920" y="4398264"/>
+            <a:off x="502920" y="4672583"/>
             <a:ext cx="2377440" cy="365760"/>
           </a:xfrm>
           <a:prstGeom prst="rect">
@@ -29606,7 +29641,7 @@
         </p:nvSpPr>
         <p:spPr>
           <a:xfrm>
-            <a:off x="2880360" y="4398264"/>
+            <a:off x="2880360" y="4672583"/>
             <a:ext cx="2468880" cy="365760"/>
           </a:xfrm>
           <a:prstGeom prst="rect">
@@ -29626,7 +29661,7 @@
               </a:lnSpc>
             </a:pPr>
             <a:r>
-              <a:rPr sz="1200" b="1">
+              <a:rPr sz="1200" b="0">
                 <a:solidFill>
                   <a:srgbClr val="E55C5C"/>
                 </a:solidFill>
@@ -29645,7 +29680,7 @@
         </p:nvSpPr>
         <p:spPr>
           <a:xfrm>
-            <a:off x="5349240" y="4398264"/>
+            <a:off x="5349240" y="4672583"/>
             <a:ext cx="2468880" cy="365760"/>
           </a:xfrm>
           <a:prstGeom prst="rect">
@@ -29665,7 +29700,7 @@
               </a:lnSpc>
             </a:pPr>
             <a:r>
-              <a:rPr sz="1200" b="1">
+              <a:rPr sz="1200" b="0">
                 <a:solidFill>
                   <a:srgbClr val="4CAF50"/>
                 </a:solidFill>
@@ -29684,7 +29719,7 @@
         </p:nvSpPr>
         <p:spPr>
           <a:xfrm>
-            <a:off x="502920" y="4782312"/>
+            <a:off x="502920" y="5148072"/>
             <a:ext cx="7315200" cy="365760"/>
           </a:xfrm>
           <a:prstGeom prst="rect">
@@ -29728,7 +29763,7 @@
         </p:nvSpPr>
         <p:spPr>
           <a:xfrm>
-            <a:off x="502920" y="4782312"/>
+            <a:off x="502920" y="5148072"/>
             <a:ext cx="2377440" cy="365760"/>
           </a:xfrm>
           <a:prstGeom prst="rect">
@@ -29767,7 +29802,7 @@
         </p:nvSpPr>
         <p:spPr>
           <a:xfrm>
-            <a:off x="2880360" y="4782312"/>
+            <a:off x="2880360" y="5148072"/>
             <a:ext cx="2468880" cy="365760"/>
           </a:xfrm>
           <a:prstGeom prst="rect">
@@ -29787,7 +29822,7 @@
               </a:lnSpc>
             </a:pPr>
             <a:r>
-              <a:rPr sz="1200" b="1">
+              <a:rPr sz="1200" b="0">
                 <a:solidFill>
                   <a:srgbClr val="E55C5C"/>
                 </a:solidFill>
@@ -29806,7 +29841,7 @@
         </p:nvSpPr>
         <p:spPr>
           <a:xfrm>
-            <a:off x="5349240" y="4782312"/>
+            <a:off x="5349240" y="5148072"/>
             <a:ext cx="2468880" cy="365760"/>
           </a:xfrm>
           <a:prstGeom prst="rect">
@@ -29826,7 +29861,7 @@
               </a:lnSpc>
             </a:pPr>
             <a:r>
-              <a:rPr sz="1200" b="1">
+              <a:rPr sz="1200" b="0">
                 <a:solidFill>
                   <a:srgbClr val="4CAF50"/>
                 </a:solidFill>
@@ -29845,7 +29880,7 @@
         </p:nvSpPr>
         <p:spPr>
           <a:xfrm>
-            <a:off x="502920" y="5166360"/>
+            <a:off x="502920" y="5623560"/>
             <a:ext cx="7315200" cy="365760"/>
           </a:xfrm>
           <a:prstGeom prst="rect">
@@ -29889,7 +29924,7 @@
         </p:nvSpPr>
         <p:spPr>
           <a:xfrm>
-            <a:off x="502920" y="5166360"/>
+            <a:off x="502920" y="5623560"/>
             <a:ext cx="2377440" cy="365760"/>
           </a:xfrm>
           <a:prstGeom prst="rect">
@@ -29915,7 +29950,7 @@
                 </a:solidFill>
                 <a:latin typeface="微软雅黑"/>
               </a:rPr>
-              <a:t>回表次数</a:t>
+              <a:t>排序</a:t>
             </a:r>
           </a:p>
         </p:txBody>
@@ -29928,7 +29963,7 @@
         </p:nvSpPr>
         <p:spPr>
           <a:xfrm>
-            <a:off x="2880360" y="5166360"/>
+            <a:off x="2880360" y="5623560"/>
             <a:ext cx="2468880" cy="365760"/>
           </a:xfrm>
           <a:prstGeom prst="rect">
@@ -29948,13 +29983,13 @@
               </a:lnSpc>
             </a:pPr>
             <a:r>
-              <a:rPr sz="1200" b="1">
+              <a:rPr sz="1200" b="0">
                 <a:solidFill>
                   <a:srgbClr val="E55C5C"/>
                 </a:solidFill>
                 <a:latin typeface="微软雅黑"/>
               </a:rPr>
-              <a:t>需回表过滤</a:t>
+              <a:t>filesort 额外排序</a:t>
             </a:r>
           </a:p>
         </p:txBody>
@@ -29967,7 +30002,7 @@
         </p:nvSpPr>
         <p:spPr>
           <a:xfrm>
-            <a:off x="5349240" y="5166360"/>
+            <a:off x="5349240" y="5623560"/>
             <a:ext cx="2468880" cy="365760"/>
           </a:xfrm>
           <a:prstGeom prst="rect">
@@ -29987,181 +30022,20 @@
               </a:lnSpc>
             </a:pPr>
             <a:r>
-              <a:rPr sz="1200" b="1">
+              <a:rPr sz="1200" b="0">
                 <a:solidFill>
                   <a:srgbClr val="4CAF50"/>
                 </a:solidFill>
                 <a:latin typeface="微软雅黑"/>
               </a:rPr>
-              <a:t>索引覆盖无需回表</a:t>
-            </a:r>
-          </a:p>
-        </p:txBody>
-      </p:sp>
-      <p:sp>
-        <p:nvSpPr>
-          <p:cNvPr id="36" name="Rectangle 35"/>
-          <p:cNvSpPr/>
-          <p:nvPr/>
-        </p:nvSpPr>
-        <p:spPr>
-          <a:xfrm>
-            <a:off x="502920" y="5550408"/>
-            <a:ext cx="7315200" cy="365760"/>
-          </a:xfrm>
-          <a:prstGeom prst="rect">
-            <a:avLst/>
-          </a:prstGeom>
-          <a:solidFill>
-            <a:srgbClr val="FFFFFF"/>
-          </a:solidFill>
-          <a:ln>
-            <a:noFill/>
-          </a:ln>
-          <a:effectLst/>
-        </p:spPr>
-        <p:style>
-          <a:lnRef idx="1">
-            <a:schemeClr val="accent1"/>
-          </a:lnRef>
-          <a:fillRef idx="3">
-            <a:schemeClr val="accent1"/>
-          </a:fillRef>
-          <a:effectRef idx="2">
-            <a:schemeClr val="accent1"/>
-          </a:effectRef>
-          <a:fontRef idx="minor">
-            <a:schemeClr val="lt1"/>
-          </a:fontRef>
-        </p:style>
-        <p:txBody>
-          <a:bodyPr rtlCol="0" anchor="ctr"/>
-          <a:lstStyle/>
-          <a:p>
-            <a:pPr algn="ctr"/>
-          </a:p>
-        </p:txBody>
-      </p:sp>
-      <p:sp>
-        <p:nvSpPr>
-          <p:cNvPr id="37" name="TextBox 36"/>
-          <p:cNvSpPr txBox="1"/>
-          <p:nvPr/>
-        </p:nvSpPr>
-        <p:spPr>
-          <a:xfrm>
-            <a:off x="502920" y="5550408"/>
-            <a:ext cx="2377440" cy="365760"/>
-          </a:xfrm>
-          <a:prstGeom prst="rect">
-            <a:avLst/>
-          </a:prstGeom>
-          <a:noFill/>
-        </p:spPr>
-        <p:txBody>
-          <a:bodyPr wrap="square" anchor="ctr" lIns="0" rIns="0" tIns="0" bIns="0">
-            <a:spAutoFit/>
-          </a:bodyPr>
-          <a:lstStyle/>
-          <a:p>
-            <a:pPr algn="ctr">
-              <a:lnSpc>
-                <a:spcPct val="115000"/>
-              </a:lnSpc>
-            </a:pPr>
-            <a:r>
-              <a:rPr sz="1200" b="1">
-                <a:solidFill>
-                  <a:srgbClr val="0F1B2D"/>
-                </a:solidFill>
-                <a:latin typeface="微软雅黑"/>
-              </a:rPr>
-              <a:t>filesort</a:t>
-            </a:r>
-          </a:p>
-        </p:txBody>
-      </p:sp>
-      <p:sp>
-        <p:nvSpPr>
-          <p:cNvPr id="38" name="TextBox 37"/>
-          <p:cNvSpPr txBox="1"/>
-          <p:nvPr/>
-        </p:nvSpPr>
-        <p:spPr>
-          <a:xfrm>
-            <a:off x="2880360" y="5550408"/>
-            <a:ext cx="2468880" cy="365760"/>
-          </a:xfrm>
-          <a:prstGeom prst="rect">
-            <a:avLst/>
-          </a:prstGeom>
-          <a:noFill/>
-        </p:spPr>
-        <p:txBody>
-          <a:bodyPr wrap="square" anchor="ctr" lIns="0" rIns="0" tIns="0" bIns="0">
-            <a:spAutoFit/>
-          </a:bodyPr>
-          <a:lstStyle/>
-          <a:p>
-            <a:pPr algn="ctr">
-              <a:lnSpc>
-                <a:spcPct val="115000"/>
-              </a:lnSpc>
-            </a:pPr>
-            <a:r>
-              <a:rPr sz="1200" b="1">
-                <a:solidFill>
-                  <a:srgbClr val="E55C5C"/>
-                </a:solidFill>
-                <a:latin typeface="微软雅黑"/>
-              </a:rPr>
-              <a:t>有(额外排序)</a:t>
-            </a:r>
-          </a:p>
-        </p:txBody>
-      </p:sp>
-      <p:sp>
-        <p:nvSpPr>
-          <p:cNvPr id="39" name="TextBox 38"/>
-          <p:cNvSpPr txBox="1"/>
-          <p:nvPr/>
-        </p:nvSpPr>
-        <p:spPr>
-          <a:xfrm>
-            <a:off x="5349240" y="5550408"/>
-            <a:ext cx="2468880" cy="365760"/>
-          </a:xfrm>
-          <a:prstGeom prst="rect">
-            <a:avLst/>
-          </a:prstGeom>
-          <a:noFill/>
-        </p:spPr>
-        <p:txBody>
-          <a:bodyPr wrap="square" anchor="ctr" lIns="0" rIns="0" tIns="0" bIns="0">
-            <a:spAutoFit/>
-          </a:bodyPr>
-          <a:lstStyle/>
-          <a:p>
-            <a:pPr algn="ctr">
-              <a:lnSpc>
-                <a:spcPct val="115000"/>
-              </a:lnSpc>
-            </a:pPr>
-            <a:r>
-              <a:rPr sz="1200" b="1">
-                <a:solidFill>
-                  <a:srgbClr val="4CAF50"/>
-                </a:solidFill>
-                <a:latin typeface="微软雅黑"/>
-              </a:rPr>
-              <a:t>无(索引有序)</a:t>
-            </a:r>
-          </a:p>
-        </p:txBody>
-      </p:sp>
-      <p:sp>
-        <p:nvSpPr>
-          <p:cNvPr id="40" name="TextBox 39"/>
+              <a:t>索引有序 无需排序</a:t>
+            </a:r>
+          </a:p>
+        </p:txBody>
+      </p:sp>
+      <p:sp>
+        <p:nvSpPr>
+          <p:cNvPr id="36" name="TextBox 35"/>
           <p:cNvSpPr txBox="1"/>
           <p:nvPr/>
         </p:nvSpPr>
@@ -30200,7 +30074,7 @@
       </p:sp>
       <p:sp>
         <p:nvSpPr>
-          <p:cNvPr id="41" name="Rectangle 40"/>
+          <p:cNvPr id="37" name="Rectangle 36"/>
           <p:cNvSpPr/>
           <p:nvPr/>
         </p:nvSpPr>
@@ -30244,7 +30118,7 @@
       </p:sp>
       <p:sp>
         <p:nvSpPr>
-          <p:cNvPr id="42" name="Rectangle 41"/>
+          <p:cNvPr id="38" name="Rectangle 37"/>
           <p:cNvSpPr/>
           <p:nvPr/>
         </p:nvSpPr>
@@ -30288,7 +30162,7 @@
       </p:sp>
       <p:sp>
         <p:nvSpPr>
-          <p:cNvPr id="43" name="TextBox 42"/>
+          <p:cNvPr id="39" name="TextBox 38"/>
           <p:cNvSpPr txBox="1"/>
           <p:nvPr/>
         </p:nvSpPr>
@@ -30327,7 +30201,7 @@
       </p:sp>
       <p:sp>
         <p:nvSpPr>
-          <p:cNvPr id="44" name="TextBox 43"/>
+          <p:cNvPr id="40" name="TextBox 39"/>
           <p:cNvSpPr txBox="1"/>
           <p:nvPr/>
         </p:nvSpPr>
@@ -30366,7 +30240,7 @@
       </p:sp>
       <p:sp>
         <p:nvSpPr>
-          <p:cNvPr id="45" name="Rectangle 44"/>
+          <p:cNvPr id="41" name="Rectangle 40"/>
           <p:cNvSpPr/>
           <p:nvPr/>
         </p:nvSpPr>
@@ -30410,7 +30284,7 @@
       </p:sp>
       <p:sp>
         <p:nvSpPr>
-          <p:cNvPr id="46" name="Rectangle 45"/>
+          <p:cNvPr id="42" name="Rectangle 41"/>
           <p:cNvSpPr/>
           <p:nvPr/>
         </p:nvSpPr>
@@ -30454,7 +30328,7 @@
       </p:sp>
       <p:sp>
         <p:nvSpPr>
-          <p:cNvPr id="47" name="TextBox 46"/>
+          <p:cNvPr id="43" name="TextBox 42"/>
           <p:cNvSpPr txBox="1"/>
           <p:nvPr/>
         </p:nvSpPr>
@@ -30493,7 +30367,7 @@
       </p:sp>
       <p:sp>
         <p:nvSpPr>
-          <p:cNvPr id="48" name="TextBox 47"/>
+          <p:cNvPr id="44" name="TextBox 43"/>
           <p:cNvSpPr txBox="1"/>
           <p:nvPr/>
         </p:nvSpPr>
@@ -30532,7 +30406,7 @@
       </p:sp>
       <p:sp>
         <p:nvSpPr>
-          <p:cNvPr id="49" name="Rectangle 48"/>
+          <p:cNvPr id="45" name="Rectangle 44"/>
           <p:cNvSpPr/>
           <p:nvPr/>
         </p:nvSpPr>
@@ -30576,7 +30450,7 @@
       </p:sp>
       <p:sp>
         <p:nvSpPr>
-          <p:cNvPr id="50" name="Rectangle 49"/>
+          <p:cNvPr id="46" name="Rectangle 45"/>
           <p:cNvSpPr/>
           <p:nvPr/>
         </p:nvSpPr>
@@ -30620,7 +30494,7 @@
       </p:sp>
       <p:sp>
         <p:nvSpPr>
-          <p:cNvPr id="51" name="TextBox 50"/>
+          <p:cNvPr id="47" name="TextBox 46"/>
           <p:cNvSpPr txBox="1"/>
           <p:nvPr/>
         </p:nvSpPr>
@@ -30659,7 +30533,7 @@
       </p:sp>
       <p:sp>
         <p:nvSpPr>
-          <p:cNvPr id="52" name="TextBox 51"/>
+          <p:cNvPr id="48" name="TextBox 47"/>
           <p:cNvSpPr txBox="1"/>
           <p:nvPr/>
         </p:nvSpPr>
@@ -30698,7 +30572,7 @@
       </p:sp>
       <p:sp>
         <p:nvSpPr>
-          <p:cNvPr id="53" name="Rectangle 52"/>
+          <p:cNvPr id="49" name="Rectangle 48"/>
           <p:cNvSpPr/>
           <p:nvPr/>
         </p:nvSpPr>
@@ -30742,7 +30616,7 @@
       </p:sp>
       <p:sp>
         <p:nvSpPr>
-          <p:cNvPr id="54" name="Rectangle 53"/>
+          <p:cNvPr id="50" name="Rectangle 49"/>
           <p:cNvSpPr/>
           <p:nvPr/>
         </p:nvSpPr>
@@ -30786,7 +30660,7 @@
       </p:sp>
       <p:sp>
         <p:nvSpPr>
-          <p:cNvPr id="55" name="TextBox 54"/>
+          <p:cNvPr id="51" name="TextBox 50"/>
           <p:cNvSpPr txBox="1"/>
           <p:nvPr/>
         </p:nvSpPr>
@@ -30825,7 +30699,7 @@
       </p:sp>
       <p:sp>
         <p:nvSpPr>
-          <p:cNvPr id="56" name="TextBox 55"/>
+          <p:cNvPr id="52" name="TextBox 51"/>
           <p:cNvSpPr txBox="1"/>
           <p:nvPr/>
         </p:nvSpPr>
@@ -30864,7 +30738,7 @@
       </p:sp>
       <p:sp>
         <p:nvSpPr>
-          <p:cNvPr id="57" name="TextBox 56"/>
+          <p:cNvPr id="53" name="TextBox 52"/>
           <p:cNvSpPr txBox="1"/>
           <p:nvPr/>
         </p:nvSpPr>
@@ -33456,7 +33330,7 @@
         </p:nvSpPr>
         <p:spPr>
           <a:xfrm>
-            <a:off x="502920" y="2834640"/>
+            <a:off x="502920" y="2926080"/>
             <a:ext cx="5486400" cy="1005840"/>
           </a:xfrm>
           <a:prstGeom prst="rect">
@@ -33500,7 +33374,7 @@
         </p:nvSpPr>
         <p:spPr>
           <a:xfrm>
-            <a:off x="502920" y="2834640"/>
+            <a:off x="502920" y="2926080"/>
             <a:ext cx="73152" cy="1005840"/>
           </a:xfrm>
           <a:prstGeom prst="rect">
@@ -33544,7 +33418,7 @@
         </p:nvSpPr>
         <p:spPr>
           <a:xfrm>
-            <a:off x="685800" y="2907792"/>
+            <a:off x="685800" y="2999232"/>
             <a:ext cx="5212080" cy="320040"/>
           </a:xfrm>
           <a:prstGeom prst="rect">
@@ -33583,7 +33457,7 @@
         </p:nvSpPr>
         <p:spPr>
           <a:xfrm>
-            <a:off x="685800" y="3218688"/>
+            <a:off x="685800" y="3310128"/>
             <a:ext cx="5212080" cy="292608"/>
           </a:xfrm>
           <a:prstGeom prst="rect">
@@ -33622,7 +33496,7 @@
         </p:nvSpPr>
         <p:spPr>
           <a:xfrm>
-            <a:off x="685800" y="3511296"/>
+            <a:off x="685800" y="3602736"/>
             <a:ext cx="5212080" cy="292608"/>
           </a:xfrm>
           <a:prstGeom prst="rect">
@@ -33661,7 +33535,7 @@
         </p:nvSpPr>
         <p:spPr>
           <a:xfrm>
-            <a:off x="6217920" y="2834640"/>
+            <a:off x="6217920" y="2926080"/>
             <a:ext cx="5486400" cy="1005840"/>
           </a:xfrm>
           <a:prstGeom prst="rect">
@@ -33705,7 +33579,7 @@
         </p:nvSpPr>
         <p:spPr>
           <a:xfrm>
-            <a:off x="6217920" y="2834640"/>
+            <a:off x="6217920" y="2926080"/>
             <a:ext cx="73152" cy="1005840"/>
           </a:xfrm>
           <a:prstGeom prst="rect">
@@ -33749,7 +33623,7 @@
         </p:nvSpPr>
         <p:spPr>
           <a:xfrm>
-            <a:off x="6400800" y="2907792"/>
+            <a:off x="6400800" y="2999232"/>
             <a:ext cx="5212080" cy="320040"/>
           </a:xfrm>
           <a:prstGeom prst="rect">
@@ -33788,7 +33662,7 @@
         </p:nvSpPr>
         <p:spPr>
           <a:xfrm>
-            <a:off x="6400800" y="3218688"/>
+            <a:off x="6400800" y="3310128"/>
             <a:ext cx="5212080" cy="292608"/>
           </a:xfrm>
           <a:prstGeom prst="rect">
@@ -33827,7 +33701,7 @@
         </p:nvSpPr>
         <p:spPr>
           <a:xfrm>
-            <a:off x="6400800" y="3511296"/>
+            <a:off x="6400800" y="3602736"/>
             <a:ext cx="5212080" cy="292608"/>
           </a:xfrm>
           <a:prstGeom prst="rect">
@@ -33866,7 +33740,7 @@
         </p:nvSpPr>
         <p:spPr>
           <a:xfrm>
-            <a:off x="502920" y="3977639"/>
+            <a:off x="502920" y="4160520"/>
             <a:ext cx="5486400" cy="1005840"/>
           </a:xfrm>
           <a:prstGeom prst="rect">
@@ -33910,7 +33784,7 @@
         </p:nvSpPr>
         <p:spPr>
           <a:xfrm>
-            <a:off x="502920" y="3977639"/>
+            <a:off x="502920" y="4160520"/>
             <a:ext cx="73152" cy="1005840"/>
           </a:xfrm>
           <a:prstGeom prst="rect">
@@ -33954,7 +33828,7 @@
         </p:nvSpPr>
         <p:spPr>
           <a:xfrm>
-            <a:off x="685800" y="4050791"/>
+            <a:off x="685800" y="4233672"/>
             <a:ext cx="5212080" cy="320040"/>
           </a:xfrm>
           <a:prstGeom prst="rect">
@@ -33993,7 +33867,7 @@
         </p:nvSpPr>
         <p:spPr>
           <a:xfrm>
-            <a:off x="685800" y="4361688"/>
+            <a:off x="685800" y="4544568"/>
             <a:ext cx="5212080" cy="292608"/>
           </a:xfrm>
           <a:prstGeom prst="rect">
@@ -34032,7 +33906,7 @@
         </p:nvSpPr>
         <p:spPr>
           <a:xfrm>
-            <a:off x="685800" y="4654296"/>
+            <a:off x="685800" y="4837176"/>
             <a:ext cx="5212080" cy="292608"/>
           </a:xfrm>
           <a:prstGeom prst="rect">
@@ -34071,7 +33945,7 @@
         </p:nvSpPr>
         <p:spPr>
           <a:xfrm>
-            <a:off x="6217920" y="3977639"/>
+            <a:off x="6217920" y="4160520"/>
             <a:ext cx="5486400" cy="1005840"/>
           </a:xfrm>
           <a:prstGeom prst="rect">
@@ -34115,7 +33989,7 @@
         </p:nvSpPr>
         <p:spPr>
           <a:xfrm>
-            <a:off x="6217920" y="3977639"/>
+            <a:off x="6217920" y="4160520"/>
             <a:ext cx="73152" cy="1005840"/>
           </a:xfrm>
           <a:prstGeom prst="rect">
@@ -34159,7 +34033,7 @@
         </p:nvSpPr>
         <p:spPr>
           <a:xfrm>
-            <a:off x="6400800" y="4050791"/>
+            <a:off x="6400800" y="4233672"/>
             <a:ext cx="5212080" cy="320040"/>
           </a:xfrm>
           <a:prstGeom prst="rect">
@@ -34198,7 +34072,7 @@
         </p:nvSpPr>
         <p:spPr>
           <a:xfrm>
-            <a:off x="6400800" y="4361688"/>
+            <a:off x="6400800" y="4544568"/>
             <a:ext cx="5212080" cy="292608"/>
           </a:xfrm>
           <a:prstGeom prst="rect">
@@ -34237,7 +34111,7 @@
         </p:nvSpPr>
         <p:spPr>
           <a:xfrm>
-            <a:off x="6400800" y="4654296"/>
+            <a:off x="6400800" y="4837176"/>
             <a:ext cx="5212080" cy="292608"/>
           </a:xfrm>
           <a:prstGeom prst="rect">

--- a/db_optimization_demo/ppt/全链路性能瓶颈排查与综合调优_优化版.pptx
+++ b/db_optimization_demo/ppt/全链路性能瓶颈排查与综合调优_优化版.pptx
@@ -3786,7 +3786,7 @@
         <p:spPr>
           <a:xfrm>
             <a:off x="201168" y="960120"/>
-            <a:ext cx="12191695" cy="54864"/>
+            <a:ext cx="11990527" cy="54864"/>
           </a:xfrm>
           <a:prstGeom prst="rect">
             <a:avLst/>
@@ -3908,7 +3908,7 @@
         <p:spPr>
           <a:xfrm>
             <a:off x="502920" y="1188720"/>
-            <a:ext cx="5486400" cy="0"/>
+            <a:ext cx="5486400" cy="365760"/>
           </a:xfrm>
           <a:prstGeom prst="rect">
             <a:avLst/>
@@ -4174,7 +4174,7 @@
         <p:spPr>
           <a:xfrm>
             <a:off x="6263640" y="1188720"/>
-            <a:ext cx="5486400" cy="0"/>
+            <a:ext cx="5486400" cy="365760"/>
           </a:xfrm>
           <a:prstGeom prst="rect">
             <a:avLst/>
@@ -4456,7 +4456,7 @@
         <p:spPr>
           <a:xfrm>
             <a:off x="502920" y="4160520"/>
-            <a:ext cx="10972800" cy="0"/>
+            <a:ext cx="10972800" cy="365760"/>
           </a:xfrm>
           <a:prstGeom prst="rect">
             <a:avLst/>
@@ -4911,7 +4911,7 @@
         <p:spPr>
           <a:xfrm>
             <a:off x="201168" y="960120"/>
-            <a:ext cx="12191695" cy="54864"/>
+            <a:ext cx="11990527" cy="54864"/>
           </a:xfrm>
           <a:prstGeom prst="rect">
             <a:avLst/>
@@ -5627,7 +5627,7 @@
         <p:spPr>
           <a:xfrm>
             <a:off x="502920" y="3840480"/>
-            <a:ext cx="10972800" cy="0"/>
+            <a:ext cx="10972800" cy="365760"/>
           </a:xfrm>
           <a:prstGeom prst="rect">
             <a:avLst/>
@@ -5992,7 +5992,7 @@
         <p:spPr>
           <a:xfrm>
             <a:off x="201168" y="960120"/>
-            <a:ext cx="12191695" cy="54864"/>
+            <a:ext cx="11990527" cy="54864"/>
           </a:xfrm>
           <a:prstGeom prst="rect">
             <a:avLst/>
@@ -6114,7 +6114,7 @@
         <p:spPr>
           <a:xfrm>
             <a:off x="502920" y="1188720"/>
-            <a:ext cx="10972800" cy="0"/>
+            <a:ext cx="10972800" cy="365760"/>
           </a:xfrm>
           <a:prstGeom prst="rect">
             <a:avLst/>
@@ -6153,7 +6153,7 @@
         <p:spPr>
           <a:xfrm>
             <a:off x="502920" y="1645920"/>
-            <a:ext cx="3657600" cy="0"/>
+            <a:ext cx="3657600" cy="320040"/>
           </a:xfrm>
           <a:prstGeom prst="rect">
             <a:avLst/>
@@ -6192,7 +6192,7 @@
         <p:spPr>
           <a:xfrm>
             <a:off x="4434840" y="1645920"/>
-            <a:ext cx="3657600" cy="0"/>
+            <a:ext cx="3657600" cy="320040"/>
           </a:xfrm>
           <a:prstGeom prst="rect">
             <a:avLst/>
@@ -7383,7 +7383,7 @@
         <p:spPr>
           <a:xfrm>
             <a:off x="502920" y="4526280"/>
-            <a:ext cx="10972800" cy="0"/>
+            <a:ext cx="10972800" cy="365760"/>
           </a:xfrm>
           <a:prstGeom prst="rect">
             <a:avLst/>
@@ -7758,7 +7758,7 @@
         <p:spPr>
           <a:xfrm>
             <a:off x="201168" y="960120"/>
-            <a:ext cx="12191695" cy="54864"/>
+            <a:ext cx="11990527" cy="54864"/>
           </a:xfrm>
           <a:prstGeom prst="rect">
             <a:avLst/>
@@ -7879,8 +7879,8 @@
         </p:nvSpPr>
         <p:spPr>
           <a:xfrm>
-            <a:off x="0" y="1"/>
-            <a:ext cx="5" cy="1"/>
+            <a:off x="502920" y="1234440"/>
+            <a:ext cx="5394960" cy="1371600"/>
           </a:xfrm>
           <a:prstGeom prst="rect">
             <a:avLst/>
@@ -7923,8 +7923,8 @@
         </p:nvSpPr>
         <p:spPr>
           <a:xfrm>
-            <a:off x="0" y="1"/>
-            <a:ext cx="73152" cy="1"/>
+            <a:off x="502920" y="1234440"/>
+            <a:ext cx="73152" cy="1371600"/>
           </a:xfrm>
           <a:prstGeom prst="rect">
             <a:avLst/>
@@ -7967,8 +7967,8 @@
         </p:nvSpPr>
         <p:spPr>
           <a:xfrm>
-            <a:off x="228600" y="164593"/>
-            <a:ext cx="-365754" cy="457200"/>
+            <a:off x="731520" y="1399032"/>
+            <a:ext cx="5029200" cy="457200"/>
           </a:xfrm>
           <a:prstGeom prst="rect">
             <a:avLst/>
@@ -8006,8 +8006,8 @@
         </p:nvSpPr>
         <p:spPr>
           <a:xfrm>
-            <a:off x="228600" y="658369"/>
-            <a:ext cx="-365754" cy="-777238"/>
+            <a:off x="731520" y="1892808"/>
+            <a:ext cx="5029200" cy="594360"/>
           </a:xfrm>
           <a:prstGeom prst="rect">
             <a:avLst/>
@@ -8093,8 +8093,8 @@
         </p:nvSpPr>
         <p:spPr>
           <a:xfrm>
-            <a:off x="6" y="1"/>
-            <a:ext cx="5" cy="1"/>
+            <a:off x="6263640" y="1234440"/>
+            <a:ext cx="5394960" cy="1371600"/>
           </a:xfrm>
           <a:prstGeom prst="rect">
             <a:avLst/>
@@ -8137,8 +8137,8 @@
         </p:nvSpPr>
         <p:spPr>
           <a:xfrm>
-            <a:off x="6" y="1"/>
-            <a:ext cx="73152" cy="1"/>
+            <a:off x="6263640" y="1234440"/>
+            <a:ext cx="73152" cy="1371600"/>
           </a:xfrm>
           <a:prstGeom prst="rect">
             <a:avLst/>
@@ -8181,8 +8181,8 @@
         </p:nvSpPr>
         <p:spPr>
           <a:xfrm>
-            <a:off x="228606" y="164593"/>
-            <a:ext cx="-365754" cy="457200"/>
+            <a:off x="6492240" y="1399032"/>
+            <a:ext cx="5029200" cy="457200"/>
           </a:xfrm>
           <a:prstGeom prst="rect">
             <a:avLst/>
@@ -8220,8 +8220,8 @@
         </p:nvSpPr>
         <p:spPr>
           <a:xfrm>
-            <a:off x="228606" y="658369"/>
-            <a:ext cx="-365754" cy="-777238"/>
+            <a:off x="6492240" y="1892808"/>
+            <a:ext cx="5029200" cy="594360"/>
           </a:xfrm>
           <a:prstGeom prst="rect">
             <a:avLst/>
@@ -8292,7 +8292,7 @@
         <p:spPr>
           <a:xfrm>
             <a:off x="502920" y="2788920"/>
-            <a:ext cx="10972800" cy="0"/>
+            <a:ext cx="10972800" cy="365760"/>
           </a:xfrm>
           <a:prstGeom prst="rect">
             <a:avLst/>
@@ -9347,7 +9347,7 @@
         <p:spPr>
           <a:xfrm>
             <a:off x="201168" y="960120"/>
-            <a:ext cx="12191695" cy="54864"/>
+            <a:ext cx="11990527" cy="54864"/>
           </a:xfrm>
           <a:prstGeom prst="rect">
             <a:avLst/>
@@ -9468,8 +9468,8 @@
         </p:nvSpPr>
         <p:spPr>
           <a:xfrm>
-            <a:off x="0" y="1"/>
-            <a:ext cx="5" cy="1"/>
+            <a:off x="502920" y="1234440"/>
+            <a:ext cx="5394960" cy="1280160"/>
           </a:xfrm>
           <a:prstGeom prst="rect">
             <a:avLst/>
@@ -9512,8 +9512,8 @@
         </p:nvSpPr>
         <p:spPr>
           <a:xfrm>
-            <a:off x="0" y="1"/>
-            <a:ext cx="73152" cy="1"/>
+            <a:off x="502920" y="1234440"/>
+            <a:ext cx="73152" cy="1280160"/>
           </a:xfrm>
           <a:prstGeom prst="rect">
             <a:avLst/>
@@ -9556,8 +9556,8 @@
         </p:nvSpPr>
         <p:spPr>
           <a:xfrm>
-            <a:off x="228600" y="164593"/>
-            <a:ext cx="-365754" cy="457200"/>
+            <a:off x="731520" y="1399032"/>
+            <a:ext cx="5029200" cy="457200"/>
           </a:xfrm>
           <a:prstGeom prst="rect">
             <a:avLst/>
@@ -9595,8 +9595,8 @@
         </p:nvSpPr>
         <p:spPr>
           <a:xfrm>
-            <a:off x="228600" y="658369"/>
-            <a:ext cx="-365754" cy="-777238"/>
+            <a:off x="731520" y="1892808"/>
+            <a:ext cx="5029200" cy="502920"/>
           </a:xfrm>
           <a:prstGeom prst="rect">
             <a:avLst/>
@@ -9682,8 +9682,8 @@
         </p:nvSpPr>
         <p:spPr>
           <a:xfrm>
-            <a:off x="6" y="1"/>
-            <a:ext cx="5" cy="1"/>
+            <a:off x="6263640" y="1234440"/>
+            <a:ext cx="5394960" cy="1280160"/>
           </a:xfrm>
           <a:prstGeom prst="rect">
             <a:avLst/>
@@ -9726,8 +9726,8 @@
         </p:nvSpPr>
         <p:spPr>
           <a:xfrm>
-            <a:off x="6" y="1"/>
-            <a:ext cx="73152" cy="1"/>
+            <a:off x="6263640" y="1234440"/>
+            <a:ext cx="73152" cy="1280160"/>
           </a:xfrm>
           <a:prstGeom prst="rect">
             <a:avLst/>
@@ -9770,8 +9770,8 @@
         </p:nvSpPr>
         <p:spPr>
           <a:xfrm>
-            <a:off x="228606" y="164593"/>
-            <a:ext cx="-365754" cy="457200"/>
+            <a:off x="6492240" y="1399032"/>
+            <a:ext cx="5029200" cy="457200"/>
           </a:xfrm>
           <a:prstGeom prst="rect">
             <a:avLst/>
@@ -9809,8 +9809,8 @@
         </p:nvSpPr>
         <p:spPr>
           <a:xfrm>
-            <a:off x="228606" y="658369"/>
-            <a:ext cx="-365754" cy="-777238"/>
+            <a:off x="6492240" y="1892808"/>
+            <a:ext cx="5029200" cy="502920"/>
           </a:xfrm>
           <a:prstGeom prst="rect">
             <a:avLst/>
@@ -9897,7 +9897,7 @@
         <p:spPr>
           <a:xfrm>
             <a:off x="502920" y="2697480"/>
-            <a:ext cx="10972800" cy="0"/>
+            <a:ext cx="10972800" cy="365760"/>
           </a:xfrm>
           <a:prstGeom prst="rect">
             <a:avLst/>
@@ -10163,7 +10163,7 @@
         <p:spPr>
           <a:xfrm>
             <a:off x="502920" y="5532120"/>
-            <a:ext cx="10972800" cy="0"/>
+            <a:ext cx="10972800" cy="365760"/>
           </a:xfrm>
           <a:prstGeom prst="rect">
             <a:avLst/>
@@ -10391,7 +10391,7 @@
         <p:spPr>
           <a:xfrm>
             <a:off x="201168" y="960120"/>
-            <a:ext cx="12191695" cy="54864"/>
+            <a:ext cx="11990527" cy="54864"/>
           </a:xfrm>
           <a:prstGeom prst="rect">
             <a:avLst/>
@@ -11241,7 +11241,7 @@
         <p:spPr>
           <a:xfrm>
             <a:off x="502920" y="3246120"/>
-            <a:ext cx="10972800" cy="0"/>
+            <a:ext cx="10972800" cy="365760"/>
           </a:xfrm>
           <a:prstGeom prst="rect">
             <a:avLst/>
@@ -11459,7 +11459,7 @@
         <p:spPr>
           <a:xfrm>
             <a:off x="502920" y="5212080"/>
-            <a:ext cx="10972800" cy="0"/>
+            <a:ext cx="10972800" cy="365760"/>
           </a:xfrm>
           <a:prstGeom prst="rect">
             <a:avLst/>
@@ -11802,7 +11802,7 @@
         <p:spPr>
           <a:xfrm>
             <a:off x="201168" y="960120"/>
-            <a:ext cx="12191695" cy="54864"/>
+            <a:ext cx="11990527" cy="54864"/>
           </a:xfrm>
           <a:prstGeom prst="rect">
             <a:avLst/>
@@ -11923,8 +11923,8 @@
         </p:nvSpPr>
         <p:spPr>
           <a:xfrm>
-            <a:off x="0" y="1"/>
-            <a:ext cx="5" cy="1"/>
+            <a:off x="502920" y="1234440"/>
+            <a:ext cx="5394960" cy="1280160"/>
           </a:xfrm>
           <a:prstGeom prst="rect">
             <a:avLst/>
@@ -11967,8 +11967,8 @@
         </p:nvSpPr>
         <p:spPr>
           <a:xfrm>
-            <a:off x="0" y="1"/>
-            <a:ext cx="73152" cy="1"/>
+            <a:off x="502920" y="1234440"/>
+            <a:ext cx="73152" cy="1280160"/>
           </a:xfrm>
           <a:prstGeom prst="rect">
             <a:avLst/>
@@ -12011,8 +12011,8 @@
         </p:nvSpPr>
         <p:spPr>
           <a:xfrm>
-            <a:off x="228600" y="164593"/>
-            <a:ext cx="-365754" cy="457200"/>
+            <a:off x="731520" y="1399032"/>
+            <a:ext cx="5029200" cy="457200"/>
           </a:xfrm>
           <a:prstGeom prst="rect">
             <a:avLst/>
@@ -12050,8 +12050,8 @@
         </p:nvSpPr>
         <p:spPr>
           <a:xfrm>
-            <a:off x="228600" y="658369"/>
-            <a:ext cx="-365754" cy="-777238"/>
+            <a:off x="731520" y="1892808"/>
+            <a:ext cx="5029200" cy="502920"/>
           </a:xfrm>
           <a:prstGeom prst="rect">
             <a:avLst/>
@@ -12121,8 +12121,8 @@
         </p:nvSpPr>
         <p:spPr>
           <a:xfrm>
-            <a:off x="6" y="1"/>
-            <a:ext cx="5" cy="1"/>
+            <a:off x="6263640" y="1234440"/>
+            <a:ext cx="5394960" cy="1280160"/>
           </a:xfrm>
           <a:prstGeom prst="rect">
             <a:avLst/>
@@ -12165,8 +12165,8 @@
         </p:nvSpPr>
         <p:spPr>
           <a:xfrm>
-            <a:off x="6" y="1"/>
-            <a:ext cx="73152" cy="1"/>
+            <a:off x="6263640" y="1234440"/>
+            <a:ext cx="73152" cy="1280160"/>
           </a:xfrm>
           <a:prstGeom prst="rect">
             <a:avLst/>
@@ -12209,8 +12209,8 @@
         </p:nvSpPr>
         <p:spPr>
           <a:xfrm>
-            <a:off x="228606" y="164593"/>
-            <a:ext cx="-365754" cy="457200"/>
+            <a:off x="6492240" y="1399032"/>
+            <a:ext cx="5029200" cy="457200"/>
           </a:xfrm>
           <a:prstGeom prst="rect">
             <a:avLst/>
@@ -12248,8 +12248,8 @@
         </p:nvSpPr>
         <p:spPr>
           <a:xfrm>
-            <a:off x="228606" y="658369"/>
-            <a:ext cx="-365754" cy="-777238"/>
+            <a:off x="6492240" y="1892808"/>
+            <a:ext cx="5029200" cy="502920"/>
           </a:xfrm>
           <a:prstGeom prst="rect">
             <a:avLst/>
@@ -12336,7 +12336,7 @@
         <p:spPr>
           <a:xfrm>
             <a:off x="502920" y="2697480"/>
-            <a:ext cx="10972800" cy="0"/>
+            <a:ext cx="10972800" cy="365760"/>
           </a:xfrm>
           <a:prstGeom prst="rect">
             <a:avLst/>
@@ -12474,7 +12474,7 @@
         <p:spPr>
           <a:xfrm>
             <a:off x="6263640" y="2697480"/>
-            <a:ext cx="5486400" cy="0"/>
+            <a:ext cx="5486400" cy="365760"/>
           </a:xfrm>
           <a:prstGeom prst="rect">
             <a:avLst/>
@@ -12756,7 +12756,7 @@
         <p:spPr>
           <a:xfrm>
             <a:off x="502920" y="5074920"/>
-            <a:ext cx="10972800" cy="0"/>
+            <a:ext cx="10972800" cy="365760"/>
           </a:xfrm>
           <a:prstGeom prst="rect">
             <a:avLst/>
@@ -13064,7 +13064,7 @@
         <p:spPr>
           <a:xfrm>
             <a:off x="201168" y="960120"/>
-            <a:ext cx="12191695" cy="54864"/>
+            <a:ext cx="11990527" cy="54864"/>
           </a:xfrm>
           <a:prstGeom prst="rect">
             <a:avLst/>
@@ -13186,7 +13186,7 @@
         <p:spPr>
           <a:xfrm>
             <a:off x="502920" y="1188720"/>
-            <a:ext cx="10972800" cy="0"/>
+            <a:ext cx="10972800" cy="365760"/>
           </a:xfrm>
           <a:prstGeom prst="rect">
             <a:avLst/>
@@ -13452,7 +13452,7 @@
         <p:spPr>
           <a:xfrm>
             <a:off x="7269480" y="1188720"/>
-            <a:ext cx="4572000" cy="0"/>
+            <a:ext cx="4572000" cy="365760"/>
           </a:xfrm>
           <a:prstGeom prst="rect">
             <a:avLst/>
@@ -13593,7 +13593,7 @@
         <p:spPr>
           <a:xfrm>
             <a:off x="502920" y="4297680"/>
-            <a:ext cx="10972800" cy="0"/>
+            <a:ext cx="10972800" cy="365760"/>
           </a:xfrm>
           <a:prstGeom prst="rect">
             <a:avLst/>
@@ -14626,7 +14626,7 @@
         <p:spPr>
           <a:xfrm>
             <a:off x="201168" y="960120"/>
-            <a:ext cx="12191695" cy="54864"/>
+            <a:ext cx="11990527" cy="54864"/>
           </a:xfrm>
           <a:prstGeom prst="rect">
             <a:avLst/>
@@ -14748,7 +14748,7 @@
         <p:spPr>
           <a:xfrm>
             <a:off x="502920" y="1188720"/>
-            <a:ext cx="10972800" cy="0"/>
+            <a:ext cx="10972800" cy="365760"/>
           </a:xfrm>
           <a:prstGeom prst="rect">
             <a:avLst/>
@@ -16866,7 +16866,7 @@
         <p:spPr>
           <a:xfrm>
             <a:off x="502920" y="5394960"/>
-            <a:ext cx="11155680" cy="0"/>
+            <a:ext cx="11155680" cy="365760"/>
           </a:xfrm>
           <a:prstGeom prst="rect">
             <a:avLst/>
@@ -17094,7 +17094,7 @@
         <p:spPr>
           <a:xfrm>
             <a:off x="201168" y="960120"/>
-            <a:ext cx="12191695" cy="54864"/>
+            <a:ext cx="11990527" cy="54864"/>
           </a:xfrm>
           <a:prstGeom prst="rect">
             <a:avLst/>
@@ -17216,7 +17216,7 @@
         <p:spPr>
           <a:xfrm>
             <a:off x="502920" y="1188720"/>
-            <a:ext cx="10972800" cy="0"/>
+            <a:ext cx="10972800" cy="365760"/>
           </a:xfrm>
           <a:prstGeom prst="rect">
             <a:avLst/>
@@ -17968,7 +17968,7 @@
         <p:spPr>
           <a:xfrm>
             <a:off x="502920" y="2743200"/>
-            <a:ext cx="5486400" cy="0"/>
+            <a:ext cx="5486400" cy="365760"/>
           </a:xfrm>
           <a:prstGeom prst="rect">
             <a:avLst/>
@@ -18144,7 +18144,7 @@
         <p:spPr>
           <a:xfrm>
             <a:off x="6400800" y="2743200"/>
-            <a:ext cx="5303520" cy="0"/>
+            <a:ext cx="5303520" cy="365760"/>
           </a:xfrm>
           <a:prstGeom prst="rect">
             <a:avLst/>
@@ -19013,7 +19013,7 @@
         <p:spPr>
           <a:xfrm>
             <a:off x="502920" y="5715000"/>
-            <a:ext cx="11155680" cy="0"/>
+            <a:ext cx="11155680" cy="365760"/>
           </a:xfrm>
           <a:prstGeom prst="rect">
             <a:avLst/>
@@ -19241,7 +19241,7 @@
         <p:spPr>
           <a:xfrm>
             <a:off x="201168" y="960120"/>
-            <a:ext cx="12191695" cy="54864"/>
+            <a:ext cx="11990527" cy="54864"/>
           </a:xfrm>
           <a:prstGeom prst="rect">
             <a:avLst/>
@@ -21714,7 +21714,7 @@
         <p:spPr>
           <a:xfrm>
             <a:off x="201168" y="960120"/>
-            <a:ext cx="12191695" cy="54864"/>
+            <a:ext cx="11990527" cy="54864"/>
           </a:xfrm>
           <a:prstGeom prst="rect">
             <a:avLst/>
@@ -23913,7 +23913,7 @@
         <p:spPr>
           <a:xfrm>
             <a:off x="201168" y="960120"/>
-            <a:ext cx="12191695" cy="54864"/>
+            <a:ext cx="11990527" cy="54864"/>
           </a:xfrm>
           <a:prstGeom prst="rect">
             <a:avLst/>
@@ -26077,7 +26077,7 @@
         <p:spPr>
           <a:xfrm>
             <a:off x="201168" y="960120"/>
-            <a:ext cx="12191695" cy="54864"/>
+            <a:ext cx="11990527" cy="54864"/>
           </a:xfrm>
           <a:prstGeom prst="rect">
             <a:avLst/>
@@ -26198,8 +26198,8 @@
         </p:nvSpPr>
         <p:spPr>
           <a:xfrm>
-            <a:off x="0" y="1"/>
-            <a:ext cx="5" cy="1"/>
+            <a:off x="502920" y="1234440"/>
+            <a:ext cx="5394960" cy="1280160"/>
           </a:xfrm>
           <a:prstGeom prst="rect">
             <a:avLst/>
@@ -26242,8 +26242,8 @@
         </p:nvSpPr>
         <p:spPr>
           <a:xfrm>
-            <a:off x="0" y="1"/>
-            <a:ext cx="73152" cy="1"/>
+            <a:off x="502920" y="1234440"/>
+            <a:ext cx="73152" cy="1280160"/>
           </a:xfrm>
           <a:prstGeom prst="rect">
             <a:avLst/>
@@ -26286,8 +26286,8 @@
         </p:nvSpPr>
         <p:spPr>
           <a:xfrm>
-            <a:off x="228600" y="164593"/>
-            <a:ext cx="-365754" cy="457200"/>
+            <a:off x="731520" y="1399032"/>
+            <a:ext cx="5029200" cy="457200"/>
           </a:xfrm>
           <a:prstGeom prst="rect">
             <a:avLst/>
@@ -26325,8 +26325,8 @@
         </p:nvSpPr>
         <p:spPr>
           <a:xfrm>
-            <a:off x="228600" y="658369"/>
-            <a:ext cx="-365754" cy="-777238"/>
+            <a:off x="731520" y="1892808"/>
+            <a:ext cx="5029200" cy="502920"/>
           </a:xfrm>
           <a:prstGeom prst="rect">
             <a:avLst/>
@@ -26380,8 +26380,8 @@
         </p:nvSpPr>
         <p:spPr>
           <a:xfrm>
-            <a:off x="6" y="1"/>
-            <a:ext cx="5" cy="1"/>
+            <a:off x="6263640" y="1234440"/>
+            <a:ext cx="5394960" cy="1280160"/>
           </a:xfrm>
           <a:prstGeom prst="rect">
             <a:avLst/>
@@ -26424,8 +26424,8 @@
         </p:nvSpPr>
         <p:spPr>
           <a:xfrm>
-            <a:off x="6" y="1"/>
-            <a:ext cx="73152" cy="1"/>
+            <a:off x="6263640" y="1234440"/>
+            <a:ext cx="73152" cy="1280160"/>
           </a:xfrm>
           <a:prstGeom prst="rect">
             <a:avLst/>
@@ -26468,8 +26468,8 @@
         </p:nvSpPr>
         <p:spPr>
           <a:xfrm>
-            <a:off x="228606" y="164593"/>
-            <a:ext cx="-365754" cy="457200"/>
+            <a:off x="6492240" y="1399032"/>
+            <a:ext cx="5029200" cy="457200"/>
           </a:xfrm>
           <a:prstGeom prst="rect">
             <a:avLst/>
@@ -26507,8 +26507,8 @@
         </p:nvSpPr>
         <p:spPr>
           <a:xfrm>
-            <a:off x="228606" y="658369"/>
-            <a:ext cx="-365754" cy="-777238"/>
+            <a:off x="6492240" y="1892808"/>
+            <a:ext cx="5029200" cy="502920"/>
           </a:xfrm>
           <a:prstGeom prst="rect">
             <a:avLst/>
@@ -26578,8 +26578,8 @@
         </p:nvSpPr>
         <p:spPr>
           <a:xfrm>
-            <a:off x="0" y="2"/>
-            <a:ext cx="12" cy="0"/>
+            <a:off x="502920" y="2697480"/>
+            <a:ext cx="10972800" cy="365760"/>
           </a:xfrm>
           <a:prstGeom prst="rect">
             <a:avLst/>
@@ -26925,7 +26925,7 @@
         <p:spPr>
           <a:xfrm>
             <a:off x="7132320" y="3108960"/>
-            <a:ext cx="4572000" cy="0"/>
+            <a:ext cx="4572000" cy="365760"/>
           </a:xfrm>
           <a:prstGeom prst="rect">
             <a:avLst/>
@@ -27309,7 +27309,7 @@
         <p:spPr>
           <a:xfrm>
             <a:off x="201168" y="960120"/>
-            <a:ext cx="12191695" cy="54864"/>
+            <a:ext cx="11990527" cy="54864"/>
           </a:xfrm>
           <a:prstGeom prst="rect">
             <a:avLst/>
@@ -27626,7 +27626,7 @@
         <p:spPr>
           <a:xfrm>
             <a:off x="6675120" y="1234440"/>
-            <a:ext cx="5029200" cy="0"/>
+            <a:ext cx="5029200" cy="365760"/>
           </a:xfrm>
           <a:prstGeom prst="rect">
             <a:avLst/>
@@ -27764,7 +27764,7 @@
         <p:spPr>
           <a:xfrm>
             <a:off x="502920" y="3794760"/>
-            <a:ext cx="10972800" cy="0"/>
+            <a:ext cx="10972800" cy="365760"/>
           </a:xfrm>
           <a:prstGeom prst="rect">
             <a:avLst/>
@@ -28745,7 +28745,7 @@
         <p:spPr>
           <a:xfrm>
             <a:off x="201168" y="960120"/>
-            <a:ext cx="12191695" cy="54864"/>
+            <a:ext cx="11990527" cy="54864"/>
           </a:xfrm>
           <a:prstGeom prst="rect">
             <a:avLst/>
@@ -28867,7 +28867,7 @@
         <p:spPr>
           <a:xfrm>
             <a:off x="502920" y="1188720"/>
-            <a:ext cx="10972800" cy="0"/>
+            <a:ext cx="10972800" cy="365760"/>
           </a:xfrm>
           <a:prstGeom prst="rect">
             <a:avLst/>
@@ -29037,7 +29037,7 @@
         <p:spPr>
           <a:xfrm>
             <a:off x="502920" y="2834640"/>
-            <a:ext cx="5486400" cy="0"/>
+            <a:ext cx="5486400" cy="365760"/>
           </a:xfrm>
           <a:prstGeom prst="rect">
             <a:avLst/>
@@ -30042,7 +30042,7 @@
         <p:spPr>
           <a:xfrm>
             <a:off x="8138160" y="2834640"/>
-            <a:ext cx="3657600" cy="0"/>
+            <a:ext cx="3657600" cy="365760"/>
           </a:xfrm>
           <a:prstGeom prst="rect">
             <a:avLst/>
@@ -30934,7 +30934,7 @@
         <p:spPr>
           <a:xfrm>
             <a:off x="201168" y="960120"/>
-            <a:ext cx="12191695" cy="54864"/>
+            <a:ext cx="11990527" cy="54864"/>
           </a:xfrm>
           <a:prstGeom prst="rect">
             <a:avLst/>
@@ -31056,7 +31056,7 @@
         <p:spPr>
           <a:xfrm>
             <a:off x="502920" y="1188720"/>
-            <a:ext cx="10972800" cy="0"/>
+            <a:ext cx="10972800" cy="365760"/>
           </a:xfrm>
           <a:prstGeom prst="rect">
             <a:avLst/>
@@ -32452,7 +32452,7 @@
         <p:spPr>
           <a:xfrm>
             <a:off x="502920" y="4754880"/>
-            <a:ext cx="10972800" cy="0"/>
+            <a:ext cx="10972800" cy="365760"/>
           </a:xfrm>
           <a:prstGeom prst="rect">
             <a:avLst/>
@@ -32760,7 +32760,7 @@
         <p:spPr>
           <a:xfrm>
             <a:off x="201168" y="960120"/>
-            <a:ext cx="12191695" cy="54864"/>
+            <a:ext cx="11990527" cy="54864"/>
           </a:xfrm>
           <a:prstGeom prst="rect">
             <a:avLst/>
@@ -32882,7 +32882,7 @@
         <p:spPr>
           <a:xfrm>
             <a:off x="502920" y="1188720"/>
-            <a:ext cx="10972800" cy="0"/>
+            <a:ext cx="10972800" cy="365760"/>
           </a:xfrm>
           <a:prstGeom prst="rect">
             <a:avLst/>
